--- a/Presentation_ResearchPaper/Group15Presentation.pptx
+++ b/Presentation_ResearchPaper/Group15Presentation.pptx
@@ -2,13 +2,31 @@
 <file path=ppt/presentation.xml><?xml version="1.0" encoding="utf-8"?>
 <p:presentation xmlns:a="http://schemas.openxmlformats.org/drawingml/2006/main" xmlns:r="http://schemas.openxmlformats.org/officeDocument/2006/relationships" xmlns:p="http://schemas.openxmlformats.org/presentationml/2006/main" saveSubsetFonts="1">
   <p:sldMasterIdLst>
-    <p:sldMasterId id="2147483660" r:id="rId1"/>
+    <p:sldMasterId id="2147483672" r:id="rId1"/>
   </p:sldMasterIdLst>
+  <p:notesMasterIdLst>
+    <p:notesMasterId r:id="rId21"/>
+  </p:notesMasterIdLst>
   <p:sldIdLst>
     <p:sldId id="256" r:id="rId2"/>
     <p:sldId id="257" r:id="rId3"/>
     <p:sldId id="258" r:id="rId4"/>
     <p:sldId id="259" r:id="rId5"/>
+    <p:sldId id="270" r:id="rId6"/>
+    <p:sldId id="261" r:id="rId7"/>
+    <p:sldId id="262" r:id="rId8"/>
+    <p:sldId id="263" r:id="rId9"/>
+    <p:sldId id="269" r:id="rId10"/>
+    <p:sldId id="264" r:id="rId11"/>
+    <p:sldId id="265" r:id="rId12"/>
+    <p:sldId id="276" r:id="rId13"/>
+    <p:sldId id="266" r:id="rId14"/>
+    <p:sldId id="273" r:id="rId15"/>
+    <p:sldId id="267" r:id="rId16"/>
+    <p:sldId id="272" r:id="rId17"/>
+    <p:sldId id="274" r:id="rId18"/>
+    <p:sldId id="275" r:id="rId19"/>
+    <p:sldId id="268" r:id="rId20"/>
   </p:sldIdLst>
   <p:sldSz cx="12192000" cy="6858000"/>
   <p:notesSz cx="6858000" cy="9144000"/>
@@ -113,13 +131,959 @@
 <file path=ppt/revisionInfo.xml><?xml version="1.0" encoding="utf-8"?>
 <p1510:revInfo xmlns:a="http://schemas.openxmlformats.org/drawingml/2006/main" xmlns:r="http://schemas.openxmlformats.org/officeDocument/2006/relationships" xmlns:p1510="http://schemas.microsoft.com/office/powerpoint/2015/10/main">
   <p1510:revLst>
-    <p1510:client id="{3F1AE177-7FBB-4261-BAF4-3934E86301B0}" v="2" dt="2026-02-12T18:50:12.078"/>
+    <p1510:client id="{8428EF9D-88AE-0DDC-9642-5BC75D3CAC61}" v="1" dt="2026-03-04T20:24:44.126"/>
+    <p1510:client id="{B65BF2AF-170B-4007-9854-630B02808F59}" v="65" dt="2026-03-04T20:37:41.196"/>
   </p1510:revLst>
 </p1510:revInfo>
 </file>
 
 <file path=ppt/changesInfos/changesInfo1.xml><?xml version="1.0" encoding="utf-8"?>
 <pc:chgInfo xmlns:a="http://schemas.openxmlformats.org/drawingml/2006/main" xmlns:r="http://schemas.openxmlformats.org/officeDocument/2006/relationships" xmlns:ac="http://schemas.microsoft.com/office/drawing/2013/main/command" xmlns:pc="http://schemas.microsoft.com/office/powerpoint/2013/main/command">
+  <pc:docChgLst>
+    <pc:chgData name="Bellerjeau, Jason (bellerjn)" userId="S::bellerjn@mail.uc.edu::507df12a-3f54-41fc-94a4-1031422f350b" providerId="AD" clId="Web-{8428EF9D-88AE-0DDC-9642-5BC75D3CAC61}"/>
+    <pc:docChg chg="modSld">
+      <pc:chgData name="Bellerjeau, Jason (bellerjn)" userId="S::bellerjn@mail.uc.edu::507df12a-3f54-41fc-94a4-1031422f350b" providerId="AD" clId="Web-{8428EF9D-88AE-0DDC-9642-5BC75D3CAC61}" dt="2026-03-04T20:24:44.126" v="0" actId="20577"/>
+      <pc:docMkLst>
+        <pc:docMk/>
+      </pc:docMkLst>
+      <pc:sldChg chg="modSp">
+        <pc:chgData name="Bellerjeau, Jason (bellerjn)" userId="S::bellerjn@mail.uc.edu::507df12a-3f54-41fc-94a4-1031422f350b" providerId="AD" clId="Web-{8428EF9D-88AE-0DDC-9642-5BC75D3CAC61}" dt="2026-03-04T20:24:44.126" v="0" actId="20577"/>
+        <pc:sldMkLst>
+          <pc:docMk/>
+          <pc:sldMk cId="961948761" sldId="275"/>
+        </pc:sldMkLst>
+        <pc:spChg chg="mod">
+          <ac:chgData name="Bellerjeau, Jason (bellerjn)" userId="S::bellerjn@mail.uc.edu::507df12a-3f54-41fc-94a4-1031422f350b" providerId="AD" clId="Web-{8428EF9D-88AE-0DDC-9642-5BC75D3CAC61}" dt="2026-03-04T20:24:44.126" v="0" actId="20577"/>
+          <ac:spMkLst>
+            <pc:docMk/>
+            <pc:sldMk cId="961948761" sldId="275"/>
+            <ac:spMk id="3" creationId="{24C296AD-018D-C004-7F46-B18EDBFAF70A}"/>
+          </ac:spMkLst>
+        </pc:spChg>
+      </pc:sldChg>
+    </pc:docChg>
+  </pc:docChgLst>
+  <pc:docChgLst>
+    <pc:chgData name="Bellerjeau, Jason (bellerjn)" userId="S::bellerjn@mail.uc.edu::507df12a-3f54-41fc-94a4-1031422f350b" providerId="AD" clId="Web-{9890C945-DF54-8317-FE7B-6AE25D11DC42}"/>
+    <pc:docChg chg="modSld">
+      <pc:chgData name="Bellerjeau, Jason (bellerjn)" userId="S::bellerjn@mail.uc.edu::507df12a-3f54-41fc-94a4-1031422f350b" providerId="AD" clId="Web-{9890C945-DF54-8317-FE7B-6AE25D11DC42}" dt="2026-03-02T22:04:15.404" v="114" actId="20577"/>
+      <pc:docMkLst>
+        <pc:docMk/>
+      </pc:docMkLst>
+      <pc:sldChg chg="modSp">
+        <pc:chgData name="Bellerjeau, Jason (bellerjn)" userId="S::bellerjn@mail.uc.edu::507df12a-3f54-41fc-94a4-1031422f350b" providerId="AD" clId="Web-{9890C945-DF54-8317-FE7B-6AE25D11DC42}" dt="2026-03-02T21:55:25.136" v="16" actId="20577"/>
+        <pc:sldMkLst>
+          <pc:docMk/>
+          <pc:sldMk cId="3621439300" sldId="267"/>
+        </pc:sldMkLst>
+        <pc:spChg chg="mod">
+          <ac:chgData name="Bellerjeau, Jason (bellerjn)" userId="S::bellerjn@mail.uc.edu::507df12a-3f54-41fc-94a4-1031422f350b" providerId="AD" clId="Web-{9890C945-DF54-8317-FE7B-6AE25D11DC42}" dt="2026-03-02T21:55:25.136" v="16" actId="20577"/>
+          <ac:spMkLst>
+            <pc:docMk/>
+            <pc:sldMk cId="3621439300" sldId="267"/>
+            <ac:spMk id="3" creationId="{5D1521FA-7F31-C3DF-A99D-FA91508766F7}"/>
+          </ac:spMkLst>
+        </pc:spChg>
+      </pc:sldChg>
+      <pc:sldChg chg="modSp">
+        <pc:chgData name="Bellerjeau, Jason (bellerjn)" userId="S::bellerjn@mail.uc.edu::507df12a-3f54-41fc-94a4-1031422f350b" providerId="AD" clId="Web-{9890C945-DF54-8317-FE7B-6AE25D11DC42}" dt="2026-03-02T22:00:55.387" v="76" actId="20577"/>
+        <pc:sldMkLst>
+          <pc:docMk/>
+          <pc:sldMk cId="2409727910" sldId="272"/>
+        </pc:sldMkLst>
+        <pc:spChg chg="mod">
+          <ac:chgData name="Bellerjeau, Jason (bellerjn)" userId="S::bellerjn@mail.uc.edu::507df12a-3f54-41fc-94a4-1031422f350b" providerId="AD" clId="Web-{9890C945-DF54-8317-FE7B-6AE25D11DC42}" dt="2026-03-02T22:00:55.387" v="76" actId="20577"/>
+          <ac:spMkLst>
+            <pc:docMk/>
+            <pc:sldMk cId="2409727910" sldId="272"/>
+            <ac:spMk id="3" creationId="{1389D8CB-1B32-ADF8-8C77-67C0968008E0}"/>
+          </ac:spMkLst>
+        </pc:spChg>
+      </pc:sldChg>
+      <pc:sldChg chg="modSp">
+        <pc:chgData name="Bellerjeau, Jason (bellerjn)" userId="S::bellerjn@mail.uc.edu::507df12a-3f54-41fc-94a4-1031422f350b" providerId="AD" clId="Web-{9890C945-DF54-8317-FE7B-6AE25D11DC42}" dt="2026-03-02T22:02:45.498" v="108" actId="20577"/>
+        <pc:sldMkLst>
+          <pc:docMk/>
+          <pc:sldMk cId="2044678048" sldId="274"/>
+        </pc:sldMkLst>
+        <pc:spChg chg="mod">
+          <ac:chgData name="Bellerjeau, Jason (bellerjn)" userId="S::bellerjn@mail.uc.edu::507df12a-3f54-41fc-94a4-1031422f350b" providerId="AD" clId="Web-{9890C945-DF54-8317-FE7B-6AE25D11DC42}" dt="2026-03-02T22:02:45.498" v="108" actId="20577"/>
+          <ac:spMkLst>
+            <pc:docMk/>
+            <pc:sldMk cId="2044678048" sldId="274"/>
+            <ac:spMk id="3" creationId="{A5396FEA-DB69-3B35-F5EE-C1C8DF87795B}"/>
+          </ac:spMkLst>
+        </pc:spChg>
+      </pc:sldChg>
+      <pc:sldChg chg="modSp">
+        <pc:chgData name="Bellerjeau, Jason (bellerjn)" userId="S::bellerjn@mail.uc.edu::507df12a-3f54-41fc-94a4-1031422f350b" providerId="AD" clId="Web-{9890C945-DF54-8317-FE7B-6AE25D11DC42}" dt="2026-03-02T22:04:15.404" v="114" actId="20577"/>
+        <pc:sldMkLst>
+          <pc:docMk/>
+          <pc:sldMk cId="961948761" sldId="275"/>
+        </pc:sldMkLst>
+        <pc:spChg chg="mod">
+          <ac:chgData name="Bellerjeau, Jason (bellerjn)" userId="S::bellerjn@mail.uc.edu::507df12a-3f54-41fc-94a4-1031422f350b" providerId="AD" clId="Web-{9890C945-DF54-8317-FE7B-6AE25D11DC42}" dt="2026-03-02T22:04:15.404" v="114" actId="20577"/>
+          <ac:spMkLst>
+            <pc:docMk/>
+            <pc:sldMk cId="961948761" sldId="275"/>
+            <ac:spMk id="3" creationId="{24C296AD-018D-C004-7F46-B18EDBFAF70A}"/>
+          </ac:spMkLst>
+        </pc:spChg>
+      </pc:sldChg>
+    </pc:docChg>
+  </pc:docChgLst>
+  <pc:docChgLst>
+    <pc:chgData name="Ferguson, Joe (fergujp)" userId="4f65ad1c-5ee5-40cd-aa65-b2e007bab6e6" providerId="ADAL" clId="{3FB175E4-2D26-456B-8D3F-6A89E8E2BDC2}"/>
+    <pc:docChg chg="undo redo custSel addSld modSld">
+      <pc:chgData name="Ferguson, Joe (fergujp)" userId="4f65ad1c-5ee5-40cd-aa65-b2e007bab6e6" providerId="ADAL" clId="{3FB175E4-2D26-456B-8D3F-6A89E8E2BDC2}" dt="2026-03-03T14:23:09.384" v="1848" actId="1076"/>
+      <pc:docMkLst>
+        <pc:docMk/>
+      </pc:docMkLst>
+      <pc:sldChg chg="modSp mod">
+        <pc:chgData name="Ferguson, Joe (fergujp)" userId="4f65ad1c-5ee5-40cd-aa65-b2e007bab6e6" providerId="ADAL" clId="{3FB175E4-2D26-456B-8D3F-6A89E8E2BDC2}" dt="2026-03-02T21:31:02.251" v="1838" actId="27636"/>
+        <pc:sldMkLst>
+          <pc:docMk/>
+          <pc:sldMk cId="1741922381" sldId="256"/>
+        </pc:sldMkLst>
+        <pc:spChg chg="mod">
+          <ac:chgData name="Ferguson, Joe (fergujp)" userId="4f65ad1c-5ee5-40cd-aa65-b2e007bab6e6" providerId="ADAL" clId="{3FB175E4-2D26-456B-8D3F-6A89E8E2BDC2}" dt="2026-03-02T21:31:02.251" v="1838" actId="27636"/>
+          <ac:spMkLst>
+            <pc:docMk/>
+            <pc:sldMk cId="1741922381" sldId="256"/>
+            <ac:spMk id="2" creationId="{F5B0FF09-4EF5-701A-BA09-23BA2646A235}"/>
+          </ac:spMkLst>
+        </pc:spChg>
+        <pc:spChg chg="mod">
+          <ac:chgData name="Ferguson, Joe (fergujp)" userId="4f65ad1c-5ee5-40cd-aa65-b2e007bab6e6" providerId="ADAL" clId="{3FB175E4-2D26-456B-8D3F-6A89E8E2BDC2}" dt="2026-03-02T21:31:02.191" v="1837"/>
+          <ac:spMkLst>
+            <pc:docMk/>
+            <pc:sldMk cId="1741922381" sldId="256"/>
+            <ac:spMk id="3" creationId="{5AAF06A1-CB80-3497-9FC0-035DAAD474E8}"/>
+          </ac:spMkLst>
+        </pc:spChg>
+      </pc:sldChg>
+      <pc:sldChg chg="modSp mod">
+        <pc:chgData name="Ferguson, Joe (fergujp)" userId="4f65ad1c-5ee5-40cd-aa65-b2e007bab6e6" providerId="ADAL" clId="{3FB175E4-2D26-456B-8D3F-6A89E8E2BDC2}" dt="2026-03-03T14:22:36.680" v="1847" actId="20577"/>
+        <pc:sldMkLst>
+          <pc:docMk/>
+          <pc:sldMk cId="1561429950" sldId="257"/>
+        </pc:sldMkLst>
+        <pc:spChg chg="mod">
+          <ac:chgData name="Ferguson, Joe (fergujp)" userId="4f65ad1c-5ee5-40cd-aa65-b2e007bab6e6" providerId="ADAL" clId="{3FB175E4-2D26-456B-8D3F-6A89E8E2BDC2}" dt="2026-03-02T21:31:02.191" v="1837"/>
+          <ac:spMkLst>
+            <pc:docMk/>
+            <pc:sldMk cId="1561429950" sldId="257"/>
+            <ac:spMk id="2" creationId="{6F9A0FD2-7809-9A4A-2653-BEFFCC836E6E}"/>
+          </ac:spMkLst>
+        </pc:spChg>
+        <pc:spChg chg="mod">
+          <ac:chgData name="Ferguson, Joe (fergujp)" userId="4f65ad1c-5ee5-40cd-aa65-b2e007bab6e6" providerId="ADAL" clId="{3FB175E4-2D26-456B-8D3F-6A89E8E2BDC2}" dt="2026-03-03T14:22:36.680" v="1847" actId="20577"/>
+          <ac:spMkLst>
+            <pc:docMk/>
+            <pc:sldMk cId="1561429950" sldId="257"/>
+            <ac:spMk id="3" creationId="{70B0DFF6-98DA-C9CF-7FDD-36C70E4F6169}"/>
+          </ac:spMkLst>
+        </pc:spChg>
+      </pc:sldChg>
+      <pc:sldChg chg="modSp mod">
+        <pc:chgData name="Ferguson, Joe (fergujp)" userId="4f65ad1c-5ee5-40cd-aa65-b2e007bab6e6" providerId="ADAL" clId="{3FB175E4-2D26-456B-8D3F-6A89E8E2BDC2}" dt="2026-03-02T21:31:02.269" v="1839" actId="27636"/>
+        <pc:sldMkLst>
+          <pc:docMk/>
+          <pc:sldMk cId="627422543" sldId="258"/>
+        </pc:sldMkLst>
+        <pc:spChg chg="mod">
+          <ac:chgData name="Ferguson, Joe (fergujp)" userId="4f65ad1c-5ee5-40cd-aa65-b2e007bab6e6" providerId="ADAL" clId="{3FB175E4-2D26-456B-8D3F-6A89E8E2BDC2}" dt="2026-03-02T21:31:02.191" v="1837"/>
+          <ac:spMkLst>
+            <pc:docMk/>
+            <pc:sldMk cId="627422543" sldId="258"/>
+            <ac:spMk id="2" creationId="{A2A4F66F-11D0-537A-668B-8FA3CBA401E3}"/>
+          </ac:spMkLst>
+        </pc:spChg>
+        <pc:spChg chg="mod">
+          <ac:chgData name="Ferguson, Joe (fergujp)" userId="4f65ad1c-5ee5-40cd-aa65-b2e007bab6e6" providerId="ADAL" clId="{3FB175E4-2D26-456B-8D3F-6A89E8E2BDC2}" dt="2026-03-02T21:31:02.269" v="1839" actId="27636"/>
+          <ac:spMkLst>
+            <pc:docMk/>
+            <pc:sldMk cId="627422543" sldId="258"/>
+            <ac:spMk id="3" creationId="{62824C6C-7716-F69E-96B5-73A2F9A3F727}"/>
+          </ac:spMkLst>
+        </pc:spChg>
+      </pc:sldChg>
+      <pc:sldChg chg="modSp mod">
+        <pc:chgData name="Ferguson, Joe (fergujp)" userId="4f65ad1c-5ee5-40cd-aa65-b2e007bab6e6" providerId="ADAL" clId="{3FB175E4-2D26-456B-8D3F-6A89E8E2BDC2}" dt="2026-03-02T21:31:02.282" v="1840" actId="27636"/>
+        <pc:sldMkLst>
+          <pc:docMk/>
+          <pc:sldMk cId="3737386758" sldId="259"/>
+        </pc:sldMkLst>
+        <pc:spChg chg="mod">
+          <ac:chgData name="Ferguson, Joe (fergujp)" userId="4f65ad1c-5ee5-40cd-aa65-b2e007bab6e6" providerId="ADAL" clId="{3FB175E4-2D26-456B-8D3F-6A89E8E2BDC2}" dt="2026-03-02T21:31:02.191" v="1837"/>
+          <ac:spMkLst>
+            <pc:docMk/>
+            <pc:sldMk cId="3737386758" sldId="259"/>
+            <ac:spMk id="2" creationId="{5C013C26-D768-29D7-C17B-1DF1F00327B0}"/>
+          </ac:spMkLst>
+        </pc:spChg>
+        <pc:spChg chg="mod">
+          <ac:chgData name="Ferguson, Joe (fergujp)" userId="4f65ad1c-5ee5-40cd-aa65-b2e007bab6e6" providerId="ADAL" clId="{3FB175E4-2D26-456B-8D3F-6A89E8E2BDC2}" dt="2026-03-02T21:31:02.282" v="1840" actId="27636"/>
+          <ac:spMkLst>
+            <pc:docMk/>
+            <pc:sldMk cId="3737386758" sldId="259"/>
+            <ac:spMk id="3" creationId="{18A74BD8-6AAE-BF71-A752-AE1D9C4404BE}"/>
+          </ac:spMkLst>
+        </pc:spChg>
+      </pc:sldChg>
+      <pc:sldChg chg="modSp new mod">
+        <pc:chgData name="Ferguson, Joe (fergujp)" userId="4f65ad1c-5ee5-40cd-aa65-b2e007bab6e6" providerId="ADAL" clId="{3FB175E4-2D26-456B-8D3F-6A89E8E2BDC2}" dt="2026-03-02T21:31:02.191" v="1837"/>
+        <pc:sldMkLst>
+          <pc:docMk/>
+          <pc:sldMk cId="622951656" sldId="261"/>
+        </pc:sldMkLst>
+        <pc:spChg chg="mod">
+          <ac:chgData name="Ferguson, Joe (fergujp)" userId="4f65ad1c-5ee5-40cd-aa65-b2e007bab6e6" providerId="ADAL" clId="{3FB175E4-2D26-456B-8D3F-6A89E8E2BDC2}" dt="2026-03-02T21:31:02.191" v="1837"/>
+          <ac:spMkLst>
+            <pc:docMk/>
+            <pc:sldMk cId="622951656" sldId="261"/>
+            <ac:spMk id="2" creationId="{F17469BB-B00A-90B5-248E-5D65A93B5B50}"/>
+          </ac:spMkLst>
+        </pc:spChg>
+        <pc:spChg chg="mod">
+          <ac:chgData name="Ferguson, Joe (fergujp)" userId="4f65ad1c-5ee5-40cd-aa65-b2e007bab6e6" providerId="ADAL" clId="{3FB175E4-2D26-456B-8D3F-6A89E8E2BDC2}" dt="2026-03-02T21:31:02.191" v="1837"/>
+          <ac:spMkLst>
+            <pc:docMk/>
+            <pc:sldMk cId="622951656" sldId="261"/>
+            <ac:spMk id="3" creationId="{1A481761-35DA-467C-5E6B-31CD2B3280FB}"/>
+          </ac:spMkLst>
+        </pc:spChg>
+      </pc:sldChg>
+      <pc:sldChg chg="modSp new mod">
+        <pc:chgData name="Ferguson, Joe (fergujp)" userId="4f65ad1c-5ee5-40cd-aa65-b2e007bab6e6" providerId="ADAL" clId="{3FB175E4-2D26-456B-8D3F-6A89E8E2BDC2}" dt="2026-03-02T21:31:02.191" v="1837"/>
+        <pc:sldMkLst>
+          <pc:docMk/>
+          <pc:sldMk cId="2197768062" sldId="262"/>
+        </pc:sldMkLst>
+        <pc:spChg chg="mod">
+          <ac:chgData name="Ferguson, Joe (fergujp)" userId="4f65ad1c-5ee5-40cd-aa65-b2e007bab6e6" providerId="ADAL" clId="{3FB175E4-2D26-456B-8D3F-6A89E8E2BDC2}" dt="2026-03-02T21:31:02.191" v="1837"/>
+          <ac:spMkLst>
+            <pc:docMk/>
+            <pc:sldMk cId="2197768062" sldId="262"/>
+            <ac:spMk id="2" creationId="{907EA7BB-43BB-550B-8505-D9FDFFF0CFAE}"/>
+          </ac:spMkLst>
+        </pc:spChg>
+        <pc:spChg chg="mod">
+          <ac:chgData name="Ferguson, Joe (fergujp)" userId="4f65ad1c-5ee5-40cd-aa65-b2e007bab6e6" providerId="ADAL" clId="{3FB175E4-2D26-456B-8D3F-6A89E8E2BDC2}" dt="2026-03-02T21:31:02.191" v="1837"/>
+          <ac:spMkLst>
+            <pc:docMk/>
+            <pc:sldMk cId="2197768062" sldId="262"/>
+            <ac:spMk id="3" creationId="{7A42D408-B048-CAC7-BA8F-8CEBD0F6E9BB}"/>
+          </ac:spMkLst>
+        </pc:spChg>
+      </pc:sldChg>
+      <pc:sldChg chg="modSp new mod">
+        <pc:chgData name="Ferguson, Joe (fergujp)" userId="4f65ad1c-5ee5-40cd-aa65-b2e007bab6e6" providerId="ADAL" clId="{3FB175E4-2D26-456B-8D3F-6A89E8E2BDC2}" dt="2026-03-02T21:31:02.191" v="1837"/>
+        <pc:sldMkLst>
+          <pc:docMk/>
+          <pc:sldMk cId="2653251690" sldId="263"/>
+        </pc:sldMkLst>
+        <pc:spChg chg="mod">
+          <ac:chgData name="Ferguson, Joe (fergujp)" userId="4f65ad1c-5ee5-40cd-aa65-b2e007bab6e6" providerId="ADAL" clId="{3FB175E4-2D26-456B-8D3F-6A89E8E2BDC2}" dt="2026-03-02T21:31:02.191" v="1837"/>
+          <ac:spMkLst>
+            <pc:docMk/>
+            <pc:sldMk cId="2653251690" sldId="263"/>
+            <ac:spMk id="2" creationId="{C78AFC12-1542-995C-B7D9-B437EE2B7F2A}"/>
+          </ac:spMkLst>
+        </pc:spChg>
+        <pc:spChg chg="mod">
+          <ac:chgData name="Ferguson, Joe (fergujp)" userId="4f65ad1c-5ee5-40cd-aa65-b2e007bab6e6" providerId="ADAL" clId="{3FB175E4-2D26-456B-8D3F-6A89E8E2BDC2}" dt="2026-03-02T21:31:02.191" v="1837"/>
+          <ac:spMkLst>
+            <pc:docMk/>
+            <pc:sldMk cId="2653251690" sldId="263"/>
+            <ac:spMk id="3" creationId="{5D209B06-A39E-AEDD-5B3F-59378B82D5CD}"/>
+          </ac:spMkLst>
+        </pc:spChg>
+      </pc:sldChg>
+      <pc:sldChg chg="addSp modSp new mod">
+        <pc:chgData name="Ferguson, Joe (fergujp)" userId="4f65ad1c-5ee5-40cd-aa65-b2e007bab6e6" providerId="ADAL" clId="{3FB175E4-2D26-456B-8D3F-6A89E8E2BDC2}" dt="2026-03-03T14:23:09.384" v="1848" actId="1076"/>
+        <pc:sldMkLst>
+          <pc:docMk/>
+          <pc:sldMk cId="3741326513" sldId="264"/>
+        </pc:sldMkLst>
+        <pc:spChg chg="mod">
+          <ac:chgData name="Ferguson, Joe (fergujp)" userId="4f65ad1c-5ee5-40cd-aa65-b2e007bab6e6" providerId="ADAL" clId="{3FB175E4-2D26-456B-8D3F-6A89E8E2BDC2}" dt="2026-03-02T21:31:02.191" v="1837"/>
+          <ac:spMkLst>
+            <pc:docMk/>
+            <pc:sldMk cId="3741326513" sldId="264"/>
+            <ac:spMk id="2" creationId="{2F62DDB8-2F62-EED1-2222-D52F987BF33F}"/>
+          </ac:spMkLst>
+        </pc:spChg>
+        <pc:spChg chg="mod">
+          <ac:chgData name="Ferguson, Joe (fergujp)" userId="4f65ad1c-5ee5-40cd-aa65-b2e007bab6e6" providerId="ADAL" clId="{3FB175E4-2D26-456B-8D3F-6A89E8E2BDC2}" dt="2026-03-02T21:31:02.191" v="1837"/>
+          <ac:spMkLst>
+            <pc:docMk/>
+            <pc:sldMk cId="3741326513" sldId="264"/>
+            <ac:spMk id="3" creationId="{608C4F5C-9279-1AF2-DBD1-12CA5133496A}"/>
+          </ac:spMkLst>
+        </pc:spChg>
+        <pc:spChg chg="add mod">
+          <ac:chgData name="Ferguson, Joe (fergujp)" userId="4f65ad1c-5ee5-40cd-aa65-b2e007bab6e6" providerId="ADAL" clId="{3FB175E4-2D26-456B-8D3F-6A89E8E2BDC2}" dt="2026-03-03T14:23:09.384" v="1848" actId="1076"/>
+          <ac:spMkLst>
+            <pc:docMk/>
+            <pc:sldMk cId="3741326513" sldId="264"/>
+            <ac:spMk id="6" creationId="{C4192FC7-6511-B90F-412D-17C8729608A9}"/>
+          </ac:spMkLst>
+        </pc:spChg>
+        <pc:picChg chg="add mod modCrop">
+          <ac:chgData name="Ferguson, Joe (fergujp)" userId="4f65ad1c-5ee5-40cd-aa65-b2e007bab6e6" providerId="ADAL" clId="{3FB175E4-2D26-456B-8D3F-6A89E8E2BDC2}" dt="2026-03-02T21:22:22.407" v="1672" actId="1076"/>
+          <ac:picMkLst>
+            <pc:docMk/>
+            <pc:sldMk cId="3741326513" sldId="264"/>
+            <ac:picMk id="5" creationId="{1866F6E6-D8F9-D485-EEB9-88FA1E2DE7CC}"/>
+          </ac:picMkLst>
+        </pc:picChg>
+      </pc:sldChg>
+      <pc:sldChg chg="modSp new mod">
+        <pc:chgData name="Ferguson, Joe (fergujp)" userId="4f65ad1c-5ee5-40cd-aa65-b2e007bab6e6" providerId="ADAL" clId="{3FB175E4-2D26-456B-8D3F-6A89E8E2BDC2}" dt="2026-03-02T21:31:02.293" v="1842" actId="27636"/>
+        <pc:sldMkLst>
+          <pc:docMk/>
+          <pc:sldMk cId="2539389966" sldId="265"/>
+        </pc:sldMkLst>
+        <pc:spChg chg="mod">
+          <ac:chgData name="Ferguson, Joe (fergujp)" userId="4f65ad1c-5ee5-40cd-aa65-b2e007bab6e6" providerId="ADAL" clId="{3FB175E4-2D26-456B-8D3F-6A89E8E2BDC2}" dt="2026-03-02T21:31:02.191" v="1837"/>
+          <ac:spMkLst>
+            <pc:docMk/>
+            <pc:sldMk cId="2539389966" sldId="265"/>
+            <ac:spMk id="2" creationId="{CF50709A-2BAC-9481-B9CB-EED734C529EE}"/>
+          </ac:spMkLst>
+        </pc:spChg>
+        <pc:spChg chg="mod">
+          <ac:chgData name="Ferguson, Joe (fergujp)" userId="4f65ad1c-5ee5-40cd-aa65-b2e007bab6e6" providerId="ADAL" clId="{3FB175E4-2D26-456B-8D3F-6A89E8E2BDC2}" dt="2026-03-02T21:31:02.293" v="1842" actId="27636"/>
+          <ac:spMkLst>
+            <pc:docMk/>
+            <pc:sldMk cId="2539389966" sldId="265"/>
+            <ac:spMk id="3" creationId="{B1585CD1-4C07-4C26-BAD2-02F84944702A}"/>
+          </ac:spMkLst>
+        </pc:spChg>
+      </pc:sldChg>
+      <pc:sldChg chg="addSp delSp modSp new mod">
+        <pc:chgData name="Ferguson, Joe (fergujp)" userId="4f65ad1c-5ee5-40cd-aa65-b2e007bab6e6" providerId="ADAL" clId="{3FB175E4-2D26-456B-8D3F-6A89E8E2BDC2}" dt="2026-03-02T21:31:02.191" v="1837"/>
+        <pc:sldMkLst>
+          <pc:docMk/>
+          <pc:sldMk cId="3420494535" sldId="266"/>
+        </pc:sldMkLst>
+        <pc:spChg chg="mod">
+          <ac:chgData name="Ferguson, Joe (fergujp)" userId="4f65ad1c-5ee5-40cd-aa65-b2e007bab6e6" providerId="ADAL" clId="{3FB175E4-2D26-456B-8D3F-6A89E8E2BDC2}" dt="2026-03-02T21:31:02.191" v="1837"/>
+          <ac:spMkLst>
+            <pc:docMk/>
+            <pc:sldMk cId="3420494535" sldId="266"/>
+            <ac:spMk id="2" creationId="{D1D8C650-1EA4-81D8-ED1B-455385CFCC5A}"/>
+          </ac:spMkLst>
+        </pc:spChg>
+        <pc:picChg chg="add mod ord">
+          <ac:chgData name="Ferguson, Joe (fergujp)" userId="4f65ad1c-5ee5-40cd-aa65-b2e007bab6e6" providerId="ADAL" clId="{3FB175E4-2D26-456B-8D3F-6A89E8E2BDC2}" dt="2026-03-02T21:31:02.191" v="1837"/>
+          <ac:picMkLst>
+            <pc:docMk/>
+            <pc:sldMk cId="3420494535" sldId="266"/>
+            <ac:picMk id="5" creationId="{A8BB1C0B-2576-58A7-01A2-A36B96300EE0}"/>
+          </ac:picMkLst>
+        </pc:picChg>
+      </pc:sldChg>
+      <pc:sldChg chg="modSp new mod">
+        <pc:chgData name="Ferguson, Joe (fergujp)" userId="4f65ad1c-5ee5-40cd-aa65-b2e007bab6e6" providerId="ADAL" clId="{3FB175E4-2D26-456B-8D3F-6A89E8E2BDC2}" dt="2026-03-02T21:31:02.299" v="1843" actId="27636"/>
+        <pc:sldMkLst>
+          <pc:docMk/>
+          <pc:sldMk cId="3621439300" sldId="267"/>
+        </pc:sldMkLst>
+        <pc:spChg chg="mod">
+          <ac:chgData name="Ferguson, Joe (fergujp)" userId="4f65ad1c-5ee5-40cd-aa65-b2e007bab6e6" providerId="ADAL" clId="{3FB175E4-2D26-456B-8D3F-6A89E8E2BDC2}" dt="2026-03-02T21:31:02.191" v="1837"/>
+          <ac:spMkLst>
+            <pc:docMk/>
+            <pc:sldMk cId="3621439300" sldId="267"/>
+            <ac:spMk id="2" creationId="{B2B1A80C-97C8-FD4E-768B-3D29D4BEDC2C}"/>
+          </ac:spMkLst>
+        </pc:spChg>
+        <pc:spChg chg="mod">
+          <ac:chgData name="Ferguson, Joe (fergujp)" userId="4f65ad1c-5ee5-40cd-aa65-b2e007bab6e6" providerId="ADAL" clId="{3FB175E4-2D26-456B-8D3F-6A89E8E2BDC2}" dt="2026-03-02T21:31:02.299" v="1843" actId="27636"/>
+          <ac:spMkLst>
+            <pc:docMk/>
+            <pc:sldMk cId="3621439300" sldId="267"/>
+            <ac:spMk id="3" creationId="{5D1521FA-7F31-C3DF-A99D-FA91508766F7}"/>
+          </ac:spMkLst>
+        </pc:spChg>
+      </pc:sldChg>
+      <pc:sldChg chg="modSp new">
+        <pc:chgData name="Ferguson, Joe (fergujp)" userId="4f65ad1c-5ee5-40cd-aa65-b2e007bab6e6" providerId="ADAL" clId="{3FB175E4-2D26-456B-8D3F-6A89E8E2BDC2}" dt="2026-03-02T21:31:02.191" v="1837"/>
+        <pc:sldMkLst>
+          <pc:docMk/>
+          <pc:sldMk cId="3944135579" sldId="268"/>
+        </pc:sldMkLst>
+        <pc:spChg chg="mod">
+          <ac:chgData name="Ferguson, Joe (fergujp)" userId="4f65ad1c-5ee5-40cd-aa65-b2e007bab6e6" providerId="ADAL" clId="{3FB175E4-2D26-456B-8D3F-6A89E8E2BDC2}" dt="2026-03-02T21:31:02.191" v="1837"/>
+          <ac:spMkLst>
+            <pc:docMk/>
+            <pc:sldMk cId="3944135579" sldId="268"/>
+            <ac:spMk id="2" creationId="{3D5BA892-02D8-864D-D202-65F6026E81B3}"/>
+          </ac:spMkLst>
+        </pc:spChg>
+        <pc:spChg chg="mod">
+          <ac:chgData name="Ferguson, Joe (fergujp)" userId="4f65ad1c-5ee5-40cd-aa65-b2e007bab6e6" providerId="ADAL" clId="{3FB175E4-2D26-456B-8D3F-6A89E8E2BDC2}" dt="2026-03-02T21:31:02.191" v="1837"/>
+          <ac:spMkLst>
+            <pc:docMk/>
+            <pc:sldMk cId="3944135579" sldId="268"/>
+            <ac:spMk id="3" creationId="{4D9622CD-30FC-5D1F-3F24-C987E4671236}"/>
+          </ac:spMkLst>
+        </pc:spChg>
+      </pc:sldChg>
+      <pc:sldChg chg="addSp delSp modSp new mod">
+        <pc:chgData name="Ferguson, Joe (fergujp)" userId="4f65ad1c-5ee5-40cd-aa65-b2e007bab6e6" providerId="ADAL" clId="{3FB175E4-2D26-456B-8D3F-6A89E8E2BDC2}" dt="2026-03-02T21:31:02.191" v="1837"/>
+        <pc:sldMkLst>
+          <pc:docMk/>
+          <pc:sldMk cId="341965317" sldId="269"/>
+        </pc:sldMkLst>
+        <pc:spChg chg="mod">
+          <ac:chgData name="Ferguson, Joe (fergujp)" userId="4f65ad1c-5ee5-40cd-aa65-b2e007bab6e6" providerId="ADAL" clId="{3FB175E4-2D26-456B-8D3F-6A89E8E2BDC2}" dt="2026-03-02T21:31:02.191" v="1837"/>
+          <ac:spMkLst>
+            <pc:docMk/>
+            <pc:sldMk cId="341965317" sldId="269"/>
+            <ac:spMk id="2" creationId="{D849C0A8-55AD-26CD-4C22-CA6B246F5FDB}"/>
+          </ac:spMkLst>
+        </pc:spChg>
+        <pc:spChg chg="add mod">
+          <ac:chgData name="Ferguson, Joe (fergujp)" userId="4f65ad1c-5ee5-40cd-aa65-b2e007bab6e6" providerId="ADAL" clId="{3FB175E4-2D26-456B-8D3F-6A89E8E2BDC2}" dt="2026-03-02T21:28:00.310" v="1776" actId="1076"/>
+          <ac:spMkLst>
+            <pc:docMk/>
+            <pc:sldMk cId="341965317" sldId="269"/>
+            <ac:spMk id="3" creationId="{F0EB9F45-687D-2862-1859-89A727482791}"/>
+          </ac:spMkLst>
+        </pc:spChg>
+        <pc:picChg chg="add mod ord">
+          <ac:chgData name="Ferguson, Joe (fergujp)" userId="4f65ad1c-5ee5-40cd-aa65-b2e007bab6e6" providerId="ADAL" clId="{3FB175E4-2D26-456B-8D3F-6A89E8E2BDC2}" dt="2026-03-02T21:31:02.191" v="1837"/>
+          <ac:picMkLst>
+            <pc:docMk/>
+            <pc:sldMk cId="341965317" sldId="269"/>
+            <ac:picMk id="5" creationId="{E1192C79-5921-4105-741D-BB258453EC0A}"/>
+          </ac:picMkLst>
+        </pc:picChg>
+      </pc:sldChg>
+      <pc:sldChg chg="modSp mod">
+        <pc:chgData name="Ferguson, Joe (fergujp)" userId="4f65ad1c-5ee5-40cd-aa65-b2e007bab6e6" providerId="ADAL" clId="{3FB175E4-2D26-456B-8D3F-6A89E8E2BDC2}" dt="2026-03-02T21:31:02.285" v="1841" actId="27636"/>
+        <pc:sldMkLst>
+          <pc:docMk/>
+          <pc:sldMk cId="152513560" sldId="270"/>
+        </pc:sldMkLst>
+        <pc:spChg chg="mod">
+          <ac:chgData name="Ferguson, Joe (fergujp)" userId="4f65ad1c-5ee5-40cd-aa65-b2e007bab6e6" providerId="ADAL" clId="{3FB175E4-2D26-456B-8D3F-6A89E8E2BDC2}" dt="2026-03-02T21:31:02.191" v="1837"/>
+          <ac:spMkLst>
+            <pc:docMk/>
+            <pc:sldMk cId="152513560" sldId="270"/>
+            <ac:spMk id="2" creationId="{32A38BBD-CC6E-932C-6F22-BFA50B69C640}"/>
+          </ac:spMkLst>
+        </pc:spChg>
+        <pc:spChg chg="mod">
+          <ac:chgData name="Ferguson, Joe (fergujp)" userId="4f65ad1c-5ee5-40cd-aa65-b2e007bab6e6" providerId="ADAL" clId="{3FB175E4-2D26-456B-8D3F-6A89E8E2BDC2}" dt="2026-03-02T21:31:02.285" v="1841" actId="27636"/>
+          <ac:spMkLst>
+            <pc:docMk/>
+            <pc:sldMk cId="152513560" sldId="270"/>
+            <ac:spMk id="3" creationId="{E70A46BB-CE40-2943-461C-7720446FE98B}"/>
+          </ac:spMkLst>
+        </pc:spChg>
+      </pc:sldChg>
+      <pc:sldChg chg="modSp mod">
+        <pc:chgData name="Ferguson, Joe (fergujp)" userId="4f65ad1c-5ee5-40cd-aa65-b2e007bab6e6" providerId="ADAL" clId="{3FB175E4-2D26-456B-8D3F-6A89E8E2BDC2}" dt="2026-03-02T21:31:02.303" v="1844" actId="27636"/>
+        <pc:sldMkLst>
+          <pc:docMk/>
+          <pc:sldMk cId="2409727910" sldId="272"/>
+        </pc:sldMkLst>
+        <pc:spChg chg="mod">
+          <ac:chgData name="Ferguson, Joe (fergujp)" userId="4f65ad1c-5ee5-40cd-aa65-b2e007bab6e6" providerId="ADAL" clId="{3FB175E4-2D26-456B-8D3F-6A89E8E2BDC2}" dt="2026-03-02T21:31:02.191" v="1837"/>
+          <ac:spMkLst>
+            <pc:docMk/>
+            <pc:sldMk cId="2409727910" sldId="272"/>
+            <ac:spMk id="2" creationId="{F9E2BB49-A389-DED3-062A-4BD369B5A44C}"/>
+          </ac:spMkLst>
+        </pc:spChg>
+        <pc:spChg chg="mod">
+          <ac:chgData name="Ferguson, Joe (fergujp)" userId="4f65ad1c-5ee5-40cd-aa65-b2e007bab6e6" providerId="ADAL" clId="{3FB175E4-2D26-456B-8D3F-6A89E8E2BDC2}" dt="2026-03-02T21:31:02.303" v="1844" actId="27636"/>
+          <ac:spMkLst>
+            <pc:docMk/>
+            <pc:sldMk cId="2409727910" sldId="272"/>
+            <ac:spMk id="3" creationId="{1389D8CB-1B32-ADF8-8C77-67C0968008E0}"/>
+          </ac:spMkLst>
+        </pc:spChg>
+      </pc:sldChg>
+      <pc:sldChg chg="modSp">
+        <pc:chgData name="Ferguson, Joe (fergujp)" userId="4f65ad1c-5ee5-40cd-aa65-b2e007bab6e6" providerId="ADAL" clId="{3FB175E4-2D26-456B-8D3F-6A89E8E2BDC2}" dt="2026-03-02T21:31:02.191" v="1837"/>
+        <pc:sldMkLst>
+          <pc:docMk/>
+          <pc:sldMk cId="3105816496" sldId="273"/>
+        </pc:sldMkLst>
+        <pc:spChg chg="mod">
+          <ac:chgData name="Ferguson, Joe (fergujp)" userId="4f65ad1c-5ee5-40cd-aa65-b2e007bab6e6" providerId="ADAL" clId="{3FB175E4-2D26-456B-8D3F-6A89E8E2BDC2}" dt="2026-03-02T21:31:02.191" v="1837"/>
+          <ac:spMkLst>
+            <pc:docMk/>
+            <pc:sldMk cId="3105816496" sldId="273"/>
+            <ac:spMk id="2" creationId="{6E9D1834-4204-F95E-5530-1A36CD25F82E}"/>
+          </ac:spMkLst>
+        </pc:spChg>
+      </pc:sldChg>
+      <pc:sldChg chg="modSp mod">
+        <pc:chgData name="Ferguson, Joe (fergujp)" userId="4f65ad1c-5ee5-40cd-aa65-b2e007bab6e6" providerId="ADAL" clId="{3FB175E4-2D26-456B-8D3F-6A89E8E2BDC2}" dt="2026-03-02T21:31:02.309" v="1845" actId="27636"/>
+        <pc:sldMkLst>
+          <pc:docMk/>
+          <pc:sldMk cId="2044678048" sldId="274"/>
+        </pc:sldMkLst>
+        <pc:spChg chg="mod">
+          <ac:chgData name="Ferguson, Joe (fergujp)" userId="4f65ad1c-5ee5-40cd-aa65-b2e007bab6e6" providerId="ADAL" clId="{3FB175E4-2D26-456B-8D3F-6A89E8E2BDC2}" dt="2026-03-02T21:31:02.191" v="1837"/>
+          <ac:spMkLst>
+            <pc:docMk/>
+            <pc:sldMk cId="2044678048" sldId="274"/>
+            <ac:spMk id="2" creationId="{04B88FFD-6F1F-5944-4D62-FB191B005180}"/>
+          </ac:spMkLst>
+        </pc:spChg>
+        <pc:spChg chg="mod">
+          <ac:chgData name="Ferguson, Joe (fergujp)" userId="4f65ad1c-5ee5-40cd-aa65-b2e007bab6e6" providerId="ADAL" clId="{3FB175E4-2D26-456B-8D3F-6A89E8E2BDC2}" dt="2026-03-02T21:31:02.309" v="1845" actId="27636"/>
+          <ac:spMkLst>
+            <pc:docMk/>
+            <pc:sldMk cId="2044678048" sldId="274"/>
+            <ac:spMk id="3" creationId="{A5396FEA-DB69-3B35-F5EE-C1C8DF87795B}"/>
+          </ac:spMkLst>
+        </pc:spChg>
+      </pc:sldChg>
+      <pc:sldChg chg="modSp mod">
+        <pc:chgData name="Ferguson, Joe (fergujp)" userId="4f65ad1c-5ee5-40cd-aa65-b2e007bab6e6" providerId="ADAL" clId="{3FB175E4-2D26-456B-8D3F-6A89E8E2BDC2}" dt="2026-03-02T21:31:02.315" v="1846" actId="27636"/>
+        <pc:sldMkLst>
+          <pc:docMk/>
+          <pc:sldMk cId="961948761" sldId="275"/>
+        </pc:sldMkLst>
+        <pc:spChg chg="mod">
+          <ac:chgData name="Ferguson, Joe (fergujp)" userId="4f65ad1c-5ee5-40cd-aa65-b2e007bab6e6" providerId="ADAL" clId="{3FB175E4-2D26-456B-8D3F-6A89E8E2BDC2}" dt="2026-03-02T21:31:02.191" v="1837"/>
+          <ac:spMkLst>
+            <pc:docMk/>
+            <pc:sldMk cId="961948761" sldId="275"/>
+            <ac:spMk id="2" creationId="{C1132972-FE7D-680A-D634-D41E34ECA654}"/>
+          </ac:spMkLst>
+        </pc:spChg>
+        <pc:spChg chg="mod">
+          <ac:chgData name="Ferguson, Joe (fergujp)" userId="4f65ad1c-5ee5-40cd-aa65-b2e007bab6e6" providerId="ADAL" clId="{3FB175E4-2D26-456B-8D3F-6A89E8E2BDC2}" dt="2026-03-02T21:31:02.315" v="1846" actId="27636"/>
+          <ac:spMkLst>
+            <pc:docMk/>
+            <pc:sldMk cId="961948761" sldId="275"/>
+            <ac:spMk id="3" creationId="{24C296AD-018D-C004-7F46-B18EDBFAF70A}"/>
+          </ac:spMkLst>
+        </pc:spChg>
+      </pc:sldChg>
+      <pc:sldChg chg="addSp delSp modSp new mod">
+        <pc:chgData name="Ferguson, Joe (fergujp)" userId="4f65ad1c-5ee5-40cd-aa65-b2e007bab6e6" providerId="ADAL" clId="{3FB175E4-2D26-456B-8D3F-6A89E8E2BDC2}" dt="2026-03-02T21:31:02.191" v="1837"/>
+        <pc:sldMkLst>
+          <pc:docMk/>
+          <pc:sldMk cId="596634680" sldId="276"/>
+        </pc:sldMkLst>
+        <pc:spChg chg="mod">
+          <ac:chgData name="Ferguson, Joe (fergujp)" userId="4f65ad1c-5ee5-40cd-aa65-b2e007bab6e6" providerId="ADAL" clId="{3FB175E4-2D26-456B-8D3F-6A89E8E2BDC2}" dt="2026-03-02T21:31:02.191" v="1837"/>
+          <ac:spMkLst>
+            <pc:docMk/>
+            <pc:sldMk cId="596634680" sldId="276"/>
+            <ac:spMk id="2" creationId="{AC7512B7-7B55-7B43-C005-6987AC29E451}"/>
+          </ac:spMkLst>
+        </pc:spChg>
+        <pc:spChg chg="add mod">
+          <ac:chgData name="Ferguson, Joe (fergujp)" userId="4f65ad1c-5ee5-40cd-aa65-b2e007bab6e6" providerId="ADAL" clId="{3FB175E4-2D26-456B-8D3F-6A89E8E2BDC2}" dt="2026-03-02T21:26:45.297" v="1734" actId="207"/>
+          <ac:spMkLst>
+            <pc:docMk/>
+            <pc:sldMk cId="596634680" sldId="276"/>
+            <ac:spMk id="6" creationId="{5487ED87-F6A7-6B77-1C3A-E00A97080A9F}"/>
+          </ac:spMkLst>
+        </pc:spChg>
+        <pc:picChg chg="add mod ord">
+          <ac:chgData name="Ferguson, Joe (fergujp)" userId="4f65ad1c-5ee5-40cd-aa65-b2e007bab6e6" providerId="ADAL" clId="{3FB175E4-2D26-456B-8D3F-6A89E8E2BDC2}" dt="2026-03-02T21:25:32.977" v="1676" actId="1076"/>
+          <ac:picMkLst>
+            <pc:docMk/>
+            <pc:sldMk cId="596634680" sldId="276"/>
+            <ac:picMk id="5" creationId="{8C7CC620-40AD-FDD5-5B8D-A2F0E0AC6599}"/>
+          </ac:picMkLst>
+        </pc:picChg>
+      </pc:sldChg>
+    </pc:docChg>
+  </pc:docChgLst>
+  <pc:docChgLst>
+    <pc:chgData name="Saraf, Ameya (sarafae)" userId="S::sarafae@mail.uc.edu::9160a3c0-5aa7-406c-b7af-7ab7c89f1ebf" providerId="AD" clId="Web-{017B04BA-2876-C5E0-E0FB-188ECF31E37D}"/>
+    <pc:docChg chg="modSld">
+      <pc:chgData name="Saraf, Ameya (sarafae)" userId="S::sarafae@mail.uc.edu::9160a3c0-5aa7-406c-b7af-7ab7c89f1ebf" providerId="AD" clId="Web-{017B04BA-2876-C5E0-E0FB-188ECF31E37D}" dt="2026-02-26T02:54:25.087" v="124" actId="20577"/>
+      <pc:docMkLst>
+        <pc:docMk/>
+      </pc:docMkLst>
+      <pc:sldChg chg="modSp">
+        <pc:chgData name="Saraf, Ameya (sarafae)" userId="S::sarafae@mail.uc.edu::9160a3c0-5aa7-406c-b7af-7ab7c89f1ebf" providerId="AD" clId="Web-{017B04BA-2876-C5E0-E0FB-188ECF31E37D}" dt="2026-02-26T02:52:51.431" v="55" actId="20577"/>
+        <pc:sldMkLst>
+          <pc:docMk/>
+          <pc:sldMk cId="1561429950" sldId="257"/>
+        </pc:sldMkLst>
+        <pc:spChg chg="mod">
+          <ac:chgData name="Saraf, Ameya (sarafae)" userId="S::sarafae@mail.uc.edu::9160a3c0-5aa7-406c-b7af-7ab7c89f1ebf" providerId="AD" clId="Web-{017B04BA-2876-C5E0-E0FB-188ECF31E37D}" dt="2026-02-26T02:52:51.431" v="55" actId="20577"/>
+          <ac:spMkLst>
+            <pc:docMk/>
+            <pc:sldMk cId="1561429950" sldId="257"/>
+            <ac:spMk id="3" creationId="{70B0DFF6-98DA-C9CF-7FDD-36C70E4F6169}"/>
+          </ac:spMkLst>
+        </pc:spChg>
+      </pc:sldChg>
+      <pc:sldChg chg="modSp">
+        <pc:chgData name="Saraf, Ameya (sarafae)" userId="S::sarafae@mail.uc.edu::9160a3c0-5aa7-406c-b7af-7ab7c89f1ebf" providerId="AD" clId="Web-{017B04BA-2876-C5E0-E0FB-188ECF31E37D}" dt="2026-02-26T02:53:48.243" v="92" actId="20577"/>
+        <pc:sldMkLst>
+          <pc:docMk/>
+          <pc:sldMk cId="627422543" sldId="258"/>
+        </pc:sldMkLst>
+        <pc:spChg chg="mod">
+          <ac:chgData name="Saraf, Ameya (sarafae)" userId="S::sarafae@mail.uc.edu::9160a3c0-5aa7-406c-b7af-7ab7c89f1ebf" providerId="AD" clId="Web-{017B04BA-2876-C5E0-E0FB-188ECF31E37D}" dt="2026-02-26T02:53:48.243" v="92" actId="20577"/>
+          <ac:spMkLst>
+            <pc:docMk/>
+            <pc:sldMk cId="627422543" sldId="258"/>
+            <ac:spMk id="3" creationId="{62824C6C-7716-F69E-96B5-73A2F9A3F727}"/>
+          </ac:spMkLst>
+        </pc:spChg>
+      </pc:sldChg>
+      <pc:sldChg chg="modSp">
+        <pc:chgData name="Saraf, Ameya (sarafae)" userId="S::sarafae@mail.uc.edu::9160a3c0-5aa7-406c-b7af-7ab7c89f1ebf" providerId="AD" clId="Web-{017B04BA-2876-C5E0-E0FB-188ECF31E37D}" dt="2026-02-26T02:54:25.087" v="124" actId="20577"/>
+        <pc:sldMkLst>
+          <pc:docMk/>
+          <pc:sldMk cId="3737386758" sldId="259"/>
+        </pc:sldMkLst>
+        <pc:spChg chg="mod">
+          <ac:chgData name="Saraf, Ameya (sarafae)" userId="S::sarafae@mail.uc.edu::9160a3c0-5aa7-406c-b7af-7ab7c89f1ebf" providerId="AD" clId="Web-{017B04BA-2876-C5E0-E0FB-188ECF31E37D}" dt="2026-02-26T02:54:25.087" v="124" actId="20577"/>
+          <ac:spMkLst>
+            <pc:docMk/>
+            <pc:sldMk cId="3737386758" sldId="259"/>
+            <ac:spMk id="3" creationId="{18A74BD8-6AAE-BF71-A752-AE1D9C4404BE}"/>
+          </ac:spMkLst>
+        </pc:spChg>
+      </pc:sldChg>
+    </pc:docChg>
+  </pc:docChgLst>
+  <pc:docChgLst>
+    <pc:chgData name="Gerver, Garrett (gerverge)" userId="S::gerverge@mail.uc.edu::216e70fc-59cc-4f5a-9f3c-4941a3c31d93" providerId="AD" clId="Web-{C1862239-A8AC-82FA-F49A-0FD5BDE08050}"/>
+    <pc:docChg chg="addSld delSld modSld">
+      <pc:chgData name="Gerver, Garrett (gerverge)" userId="S::gerverge@mail.uc.edu::216e70fc-59cc-4f5a-9f3c-4941a3c31d93" providerId="AD" clId="Web-{C1862239-A8AC-82FA-F49A-0FD5BDE08050}" dt="2026-02-26T19:01:33.941" v="318"/>
+      <pc:docMkLst>
+        <pc:docMk/>
+      </pc:docMkLst>
+      <pc:sldChg chg="modSp">
+        <pc:chgData name="Gerver, Garrett (gerverge)" userId="S::gerverge@mail.uc.edu::216e70fc-59cc-4f5a-9f3c-4941a3c31d93" providerId="AD" clId="Web-{C1862239-A8AC-82FA-F49A-0FD5BDE08050}" dt="2026-02-26T18:59:04.894" v="285" actId="20577"/>
+        <pc:sldMkLst>
+          <pc:docMk/>
+          <pc:sldMk cId="622951656" sldId="261"/>
+        </pc:sldMkLst>
+        <pc:spChg chg="mod">
+          <ac:chgData name="Gerver, Garrett (gerverge)" userId="S::gerverge@mail.uc.edu::216e70fc-59cc-4f5a-9f3c-4941a3c31d93" providerId="AD" clId="Web-{C1862239-A8AC-82FA-F49A-0FD5BDE08050}" dt="2026-02-26T18:59:04.894" v="285" actId="20577"/>
+          <ac:spMkLst>
+            <pc:docMk/>
+            <pc:sldMk cId="622951656" sldId="261"/>
+            <ac:spMk id="3" creationId="{1A481761-35DA-467C-5E6B-31CD2B3280FB}"/>
+          </ac:spMkLst>
+        </pc:spChg>
+      </pc:sldChg>
+      <pc:sldChg chg="modSp add replId addAnim delAnim modAnim modNotes">
+        <pc:chgData name="Gerver, Garrett (gerverge)" userId="S::gerverge@mail.uc.edu::216e70fc-59cc-4f5a-9f3c-4941a3c31d93" providerId="AD" clId="Web-{C1862239-A8AC-82FA-F49A-0FD5BDE08050}" dt="2026-02-26T19:01:33.941" v="318"/>
+        <pc:sldMkLst>
+          <pc:docMk/>
+          <pc:sldMk cId="152513560" sldId="270"/>
+        </pc:sldMkLst>
+        <pc:spChg chg="mod">
+          <ac:chgData name="Gerver, Garrett (gerverge)" userId="S::gerverge@mail.uc.edu::216e70fc-59cc-4f5a-9f3c-4941a3c31d93" providerId="AD" clId="Web-{C1862239-A8AC-82FA-F49A-0FD5BDE08050}" dt="2026-02-26T19:00:51.113" v="300" actId="20577"/>
+          <ac:spMkLst>
+            <pc:docMk/>
+            <pc:sldMk cId="152513560" sldId="270"/>
+            <ac:spMk id="3" creationId="{E70A46BB-CE40-2943-461C-7720446FE98B}"/>
+          </ac:spMkLst>
+        </pc:spChg>
+      </pc:sldChg>
+    </pc:docChg>
+  </pc:docChgLst>
+  <pc:docChgLst>
+    <pc:chgData name="El Homayssi, Ali (elhomaab)" userId="S::elhomaab@mail.uc.edu::46c7c60b-afbf-4cb7-81f2-2076d51e9f9c" providerId="AD" clId="Web-{CD583127-A303-25F6-0BFF-1D9571589E10}"/>
+    <pc:docChg chg="addSld delSld modSld sldOrd">
+      <pc:chgData name="El Homayssi, Ali (elhomaab)" userId="S::elhomaab@mail.uc.edu::46c7c60b-afbf-4cb7-81f2-2076d51e9f9c" providerId="AD" clId="Web-{CD583127-A303-25F6-0BFF-1D9571589E10}" dt="2026-03-02T19:45:48.430" v="1650" actId="20577"/>
+      <pc:docMkLst>
+        <pc:docMk/>
+      </pc:docMkLst>
+      <pc:sldChg chg="modSp">
+        <pc:chgData name="El Homayssi, Ali (elhomaab)" userId="S::elhomaab@mail.uc.edu::46c7c60b-afbf-4cb7-81f2-2076d51e9f9c" providerId="AD" clId="Web-{CD583127-A303-25F6-0BFF-1D9571589E10}" dt="2026-03-02T17:48:32.057" v="1" actId="20577"/>
+        <pc:sldMkLst>
+          <pc:docMk/>
+          <pc:sldMk cId="1741922381" sldId="256"/>
+        </pc:sldMkLst>
+        <pc:spChg chg="mod">
+          <ac:chgData name="El Homayssi, Ali (elhomaab)" userId="S::elhomaab@mail.uc.edu::46c7c60b-afbf-4cb7-81f2-2076d51e9f9c" providerId="AD" clId="Web-{CD583127-A303-25F6-0BFF-1D9571589E10}" dt="2026-03-02T17:48:32.057" v="1" actId="20577"/>
+          <ac:spMkLst>
+            <pc:docMk/>
+            <pc:sldMk cId="1741922381" sldId="256"/>
+            <ac:spMk id="3" creationId="{5AAF06A1-CB80-3497-9FC0-035DAAD474E8}"/>
+          </ac:spMkLst>
+        </pc:spChg>
+      </pc:sldChg>
+      <pc:sldChg chg="addSp modSp">
+        <pc:chgData name="El Homayssi, Ali (elhomaab)" userId="S::elhomaab@mail.uc.edu::46c7c60b-afbf-4cb7-81f2-2076d51e9f9c" providerId="AD" clId="Web-{CD583127-A303-25F6-0BFF-1D9571589E10}" dt="2026-03-02T19:01:37.409" v="497" actId="20577"/>
+        <pc:sldMkLst>
+          <pc:docMk/>
+          <pc:sldMk cId="3621439300" sldId="267"/>
+        </pc:sldMkLst>
+        <pc:spChg chg="mod">
+          <ac:chgData name="El Homayssi, Ali (elhomaab)" userId="S::elhomaab@mail.uc.edu::46c7c60b-afbf-4cb7-81f2-2076d51e9f9c" providerId="AD" clId="Web-{CD583127-A303-25F6-0BFF-1D9571589E10}" dt="2026-03-02T18:58:03.112" v="467" actId="20577"/>
+          <ac:spMkLst>
+            <pc:docMk/>
+            <pc:sldMk cId="3621439300" sldId="267"/>
+            <ac:spMk id="2" creationId="{B2B1A80C-97C8-FD4E-768B-3D29D4BEDC2C}"/>
+          </ac:spMkLst>
+        </pc:spChg>
+        <pc:spChg chg="mod">
+          <ac:chgData name="El Homayssi, Ali (elhomaab)" userId="S::elhomaab@mail.uc.edu::46c7c60b-afbf-4cb7-81f2-2076d51e9f9c" providerId="AD" clId="Web-{CD583127-A303-25F6-0BFF-1D9571589E10}" dt="2026-03-02T19:01:37.409" v="497" actId="20577"/>
+          <ac:spMkLst>
+            <pc:docMk/>
+            <pc:sldMk cId="3621439300" sldId="267"/>
+            <ac:spMk id="3" creationId="{5D1521FA-7F31-C3DF-A99D-FA91508766F7}"/>
+          </ac:spMkLst>
+        </pc:spChg>
+        <pc:picChg chg="add mod">
+          <ac:chgData name="El Homayssi, Ali (elhomaab)" userId="S::elhomaab@mail.uc.edu::46c7c60b-afbf-4cb7-81f2-2076d51e9f9c" providerId="AD" clId="Web-{CD583127-A303-25F6-0BFF-1D9571589E10}" dt="2026-03-02T18:53:58.855" v="462" actId="14100"/>
+          <ac:picMkLst>
+            <pc:docMk/>
+            <pc:sldMk cId="3621439300" sldId="267"/>
+            <ac:picMk id="4" creationId="{79A1117C-AD45-B857-C25B-33FB381FB410}"/>
+          </ac:picMkLst>
+        </pc:picChg>
+      </pc:sldChg>
+      <pc:sldChg chg="modSp">
+        <pc:chgData name="El Homayssi, Ali (elhomaab)" userId="S::elhomaab@mail.uc.edu::46c7c60b-afbf-4cb7-81f2-2076d51e9f9c" providerId="AD" clId="Web-{CD583127-A303-25F6-0BFF-1D9571589E10}" dt="2026-03-02T19:45:48.430" v="1650" actId="20577"/>
+        <pc:sldMkLst>
+          <pc:docMk/>
+          <pc:sldMk cId="3944135579" sldId="268"/>
+        </pc:sldMkLst>
+        <pc:spChg chg="mod">
+          <ac:chgData name="El Homayssi, Ali (elhomaab)" userId="S::elhomaab@mail.uc.edu::46c7c60b-afbf-4cb7-81f2-2076d51e9f9c" providerId="AD" clId="Web-{CD583127-A303-25F6-0BFF-1D9571589E10}" dt="2026-03-02T19:45:48.430" v="1650" actId="20577"/>
+          <ac:spMkLst>
+            <pc:docMk/>
+            <pc:sldMk cId="3944135579" sldId="268"/>
+            <ac:spMk id="2" creationId="{3D5BA892-02D8-864D-D202-65F6026E81B3}"/>
+          </ac:spMkLst>
+        </pc:spChg>
+      </pc:sldChg>
+      <pc:sldChg chg="addSp delSp modSp add replId">
+        <pc:chgData name="El Homayssi, Ali (elhomaab)" userId="S::elhomaab@mail.uc.edu::46c7c60b-afbf-4cb7-81f2-2076d51e9f9c" providerId="AD" clId="Web-{CD583127-A303-25F6-0BFF-1D9571589E10}" dt="2026-03-02T19:45:24.648" v="1644" actId="20577"/>
+        <pc:sldMkLst>
+          <pc:docMk/>
+          <pc:sldMk cId="2409727910" sldId="272"/>
+        </pc:sldMkLst>
+        <pc:spChg chg="mod">
+          <ac:chgData name="El Homayssi, Ali (elhomaab)" userId="S::elhomaab@mail.uc.edu::46c7c60b-afbf-4cb7-81f2-2076d51e9f9c" providerId="AD" clId="Web-{CD583127-A303-25F6-0BFF-1D9571589E10}" dt="2026-03-02T19:45:24.648" v="1644" actId="20577"/>
+          <ac:spMkLst>
+            <pc:docMk/>
+            <pc:sldMk cId="2409727910" sldId="272"/>
+            <ac:spMk id="2" creationId="{F9E2BB49-A389-DED3-062A-4BD369B5A44C}"/>
+          </ac:spMkLst>
+        </pc:spChg>
+        <pc:spChg chg="mod">
+          <ac:chgData name="El Homayssi, Ali (elhomaab)" userId="S::elhomaab@mail.uc.edu::46c7c60b-afbf-4cb7-81f2-2076d51e9f9c" providerId="AD" clId="Web-{CD583127-A303-25F6-0BFF-1D9571589E10}" dt="2026-03-02T19:17:59.194" v="893" actId="1076"/>
+          <ac:spMkLst>
+            <pc:docMk/>
+            <pc:sldMk cId="2409727910" sldId="272"/>
+            <ac:spMk id="3" creationId="{1389D8CB-1B32-ADF8-8C77-67C0968008E0}"/>
+          </ac:spMkLst>
+        </pc:spChg>
+        <pc:picChg chg="add mod">
+          <ac:chgData name="El Homayssi, Ali (elhomaab)" userId="S::elhomaab@mail.uc.edu::46c7c60b-afbf-4cb7-81f2-2076d51e9f9c" providerId="AD" clId="Web-{CD583127-A303-25F6-0BFF-1D9571589E10}" dt="2026-03-02T19:10:58.973" v="775" actId="1076"/>
+          <ac:picMkLst>
+            <pc:docMk/>
+            <pc:sldMk cId="2409727910" sldId="272"/>
+            <ac:picMk id="5" creationId="{325E7108-81FD-1F8F-A4E5-084266844926}"/>
+          </ac:picMkLst>
+        </pc:picChg>
+        <pc:picChg chg="add mod">
+          <ac:chgData name="El Homayssi, Ali (elhomaab)" userId="S::elhomaab@mail.uc.edu::46c7c60b-afbf-4cb7-81f2-2076d51e9f9c" providerId="AD" clId="Web-{CD583127-A303-25F6-0BFF-1D9571589E10}" dt="2026-03-02T19:11:01.864" v="776" actId="1076"/>
+          <ac:picMkLst>
+            <pc:docMk/>
+            <pc:sldMk cId="2409727910" sldId="272"/>
+            <ac:picMk id="6" creationId="{2ADCD0B9-FF07-FFBB-6F81-E98562E2E4EA}"/>
+          </ac:picMkLst>
+        </pc:picChg>
+      </pc:sldChg>
+      <pc:sldChg chg="addSp delSp modSp add ord replId">
+        <pc:chgData name="El Homayssi, Ali (elhomaab)" userId="S::elhomaab@mail.uc.edu::46c7c60b-afbf-4cb7-81f2-2076d51e9f9c" providerId="AD" clId="Web-{CD583127-A303-25F6-0BFF-1D9571589E10}" dt="2026-03-02T19:17:45.833" v="891" actId="20577"/>
+        <pc:sldMkLst>
+          <pc:docMk/>
+          <pc:sldMk cId="3105816496" sldId="273"/>
+        </pc:sldMkLst>
+        <pc:spChg chg="mod">
+          <ac:chgData name="El Homayssi, Ali (elhomaab)" userId="S::elhomaab@mail.uc.edu::46c7c60b-afbf-4cb7-81f2-2076d51e9f9c" providerId="AD" clId="Web-{CD583127-A303-25F6-0BFF-1D9571589E10}" dt="2026-03-02T19:13:32.040" v="784" actId="20577"/>
+          <ac:spMkLst>
+            <pc:docMk/>
+            <pc:sldMk cId="3105816496" sldId="273"/>
+            <ac:spMk id="2" creationId="{6E9D1834-4204-F95E-5530-1A36CD25F82E}"/>
+          </ac:spMkLst>
+        </pc:spChg>
+        <pc:spChg chg="mod">
+          <ac:chgData name="El Homayssi, Ali (elhomaab)" userId="S::elhomaab@mail.uc.edu::46c7c60b-afbf-4cb7-81f2-2076d51e9f9c" providerId="AD" clId="Web-{CD583127-A303-25F6-0BFF-1D9571589E10}" dt="2026-03-02T19:17:45.833" v="891" actId="20577"/>
+          <ac:spMkLst>
+            <pc:docMk/>
+            <pc:sldMk cId="3105816496" sldId="273"/>
+            <ac:spMk id="3" creationId="{8403CEEA-219A-FDE6-14F9-E31B0E0F74E0}"/>
+          </ac:spMkLst>
+        </pc:spChg>
+        <pc:picChg chg="add mod">
+          <ac:chgData name="El Homayssi, Ali (elhomaab)" userId="S::elhomaab@mail.uc.edu::46c7c60b-afbf-4cb7-81f2-2076d51e9f9c" providerId="AD" clId="Web-{CD583127-A303-25F6-0BFF-1D9571589E10}" dt="2026-03-02T19:15:38.218" v="888" actId="1076"/>
+          <ac:picMkLst>
+            <pc:docMk/>
+            <pc:sldMk cId="3105816496" sldId="273"/>
+            <ac:picMk id="5" creationId="{F1B2BE95-BF9B-A38D-1357-7FEDB72E5321}"/>
+          </ac:picMkLst>
+        </pc:picChg>
+      </pc:sldChg>
+      <pc:sldChg chg="addSp delSp modSp add replId">
+        <pc:chgData name="El Homayssi, Ali (elhomaab)" userId="S::elhomaab@mail.uc.edu::46c7c60b-afbf-4cb7-81f2-2076d51e9f9c" providerId="AD" clId="Web-{CD583127-A303-25F6-0BFF-1D9571589E10}" dt="2026-03-02T19:45:28.929" v="1645" actId="20577"/>
+        <pc:sldMkLst>
+          <pc:docMk/>
+          <pc:sldMk cId="2044678048" sldId="274"/>
+        </pc:sldMkLst>
+        <pc:spChg chg="mod">
+          <ac:chgData name="El Homayssi, Ali (elhomaab)" userId="S::elhomaab@mail.uc.edu::46c7c60b-afbf-4cb7-81f2-2076d51e9f9c" providerId="AD" clId="Web-{CD583127-A303-25F6-0BFF-1D9571589E10}" dt="2026-03-02T19:45:28.929" v="1645" actId="20577"/>
+          <ac:spMkLst>
+            <pc:docMk/>
+            <pc:sldMk cId="2044678048" sldId="274"/>
+            <ac:spMk id="2" creationId="{04B88FFD-6F1F-5944-4D62-FB191B005180}"/>
+          </ac:spMkLst>
+        </pc:spChg>
+        <pc:spChg chg="mod">
+          <ac:chgData name="El Homayssi, Ali (elhomaab)" userId="S::elhomaab@mail.uc.edu::46c7c60b-afbf-4cb7-81f2-2076d51e9f9c" providerId="AD" clId="Web-{CD583127-A303-25F6-0BFF-1D9571589E10}" dt="2026-03-02T19:27:36.138" v="1167" actId="20577"/>
+          <ac:spMkLst>
+            <pc:docMk/>
+            <pc:sldMk cId="2044678048" sldId="274"/>
+            <ac:spMk id="3" creationId="{A5396FEA-DB69-3B35-F5EE-C1C8DF87795B}"/>
+          </ac:spMkLst>
+        </pc:spChg>
+        <pc:picChg chg="add mod">
+          <ac:chgData name="El Homayssi, Ali (elhomaab)" userId="S::elhomaab@mail.uc.edu::46c7c60b-afbf-4cb7-81f2-2076d51e9f9c" providerId="AD" clId="Web-{CD583127-A303-25F6-0BFF-1D9571589E10}" dt="2026-03-02T19:24:19.693" v="1072" actId="14100"/>
+          <ac:picMkLst>
+            <pc:docMk/>
+            <pc:sldMk cId="2044678048" sldId="274"/>
+            <ac:picMk id="4" creationId="{0D9147D9-0AA5-EA19-66A7-F4D087F27659}"/>
+          </ac:picMkLst>
+        </pc:picChg>
+      </pc:sldChg>
+      <pc:sldChg chg="addSp delSp modSp add replId">
+        <pc:chgData name="El Homayssi, Ali (elhomaab)" userId="S::elhomaab@mail.uc.edu::46c7c60b-afbf-4cb7-81f2-2076d51e9f9c" providerId="AD" clId="Web-{CD583127-A303-25F6-0BFF-1D9571589E10}" dt="2026-03-02T19:45:18.320" v="1643" actId="20577"/>
+        <pc:sldMkLst>
+          <pc:docMk/>
+          <pc:sldMk cId="961948761" sldId="275"/>
+        </pc:sldMkLst>
+        <pc:spChg chg="mod">
+          <ac:chgData name="El Homayssi, Ali (elhomaab)" userId="S::elhomaab@mail.uc.edu::46c7c60b-afbf-4cb7-81f2-2076d51e9f9c" providerId="AD" clId="Web-{CD583127-A303-25F6-0BFF-1D9571589E10}" dt="2026-03-02T19:45:18.320" v="1643" actId="20577"/>
+          <ac:spMkLst>
+            <pc:docMk/>
+            <pc:sldMk cId="961948761" sldId="275"/>
+            <ac:spMk id="2" creationId="{C1132972-FE7D-680A-D634-D41E34ECA654}"/>
+          </ac:spMkLst>
+        </pc:spChg>
+        <pc:spChg chg="mod">
+          <ac:chgData name="El Homayssi, Ali (elhomaab)" userId="S::elhomaab@mail.uc.edu::46c7c60b-afbf-4cb7-81f2-2076d51e9f9c" providerId="AD" clId="Web-{CD583127-A303-25F6-0BFF-1D9571589E10}" dt="2026-03-02T19:45:06.444" v="1642" actId="1076"/>
+          <ac:spMkLst>
+            <pc:docMk/>
+            <pc:sldMk cId="961948761" sldId="275"/>
+            <ac:spMk id="3" creationId="{24C296AD-018D-C004-7F46-B18EDBFAF70A}"/>
+          </ac:spMkLst>
+        </pc:spChg>
+        <pc:picChg chg="add mod">
+          <ac:chgData name="El Homayssi, Ali (elhomaab)" userId="S::elhomaab@mail.uc.edu::46c7c60b-afbf-4cb7-81f2-2076d51e9f9c" providerId="AD" clId="Web-{CD583127-A303-25F6-0BFF-1D9571589E10}" dt="2026-03-02T19:44:56.553" v="1641" actId="1076"/>
+          <ac:picMkLst>
+            <pc:docMk/>
+            <pc:sldMk cId="961948761" sldId="275"/>
+            <ac:picMk id="6" creationId="{971BB413-ECCA-190B-ED3A-BAA1B085B717}"/>
+          </ac:picMkLst>
+        </pc:picChg>
+      </pc:sldChg>
+    </pc:docChg>
+  </pc:docChgLst>
+  <pc:docChgLst>
+    <pc:chgData name="Khairy, Anas (khairyas)" userId="1850a4aa-824e-41bd-895e-13f061b1a290" providerId="ADAL" clId="{70E8EF7A-9B3E-4B7C-83C1-22DE7DD7CA05}"/>
+    <pc:docChg chg="undo custSel modSld">
+      <pc:chgData name="Khairy, Anas (khairyas)" userId="1850a4aa-824e-41bd-895e-13f061b1a290" providerId="ADAL" clId="{70E8EF7A-9B3E-4B7C-83C1-22DE7DD7CA05}" dt="2026-03-04T20:37:41.196" v="62" actId="20577"/>
+      <pc:docMkLst>
+        <pc:docMk/>
+      </pc:docMkLst>
+      <pc:sldChg chg="addSp modSp mod">
+        <pc:chgData name="Khairy, Anas (khairyas)" userId="1850a4aa-824e-41bd-895e-13f061b1a290" providerId="ADAL" clId="{70E8EF7A-9B3E-4B7C-83C1-22DE7DD7CA05}" dt="2026-03-04T20:37:41.196" v="62" actId="20577"/>
+        <pc:sldMkLst>
+          <pc:docMk/>
+          <pc:sldMk cId="3944135579" sldId="268"/>
+        </pc:sldMkLst>
+        <pc:spChg chg="mod">
+          <ac:chgData name="Khairy, Anas (khairyas)" userId="1850a4aa-824e-41bd-895e-13f061b1a290" providerId="ADAL" clId="{70E8EF7A-9B3E-4B7C-83C1-22DE7DD7CA05}" dt="2026-03-04T20:36:30.664" v="59" actId="1076"/>
+          <ac:spMkLst>
+            <pc:docMk/>
+            <pc:sldMk cId="3944135579" sldId="268"/>
+            <ac:spMk id="2" creationId="{3D5BA892-02D8-864D-D202-65F6026E81B3}"/>
+          </ac:spMkLst>
+        </pc:spChg>
+        <pc:spChg chg="mod">
+          <ac:chgData name="Khairy, Anas (khairyas)" userId="1850a4aa-824e-41bd-895e-13f061b1a290" providerId="ADAL" clId="{70E8EF7A-9B3E-4B7C-83C1-22DE7DD7CA05}" dt="2026-03-04T20:37:41.196" v="62" actId="20577"/>
+          <ac:spMkLst>
+            <pc:docMk/>
+            <pc:sldMk cId="3944135579" sldId="268"/>
+            <ac:spMk id="3" creationId="{4D9622CD-30FC-5D1F-3F24-C987E4671236}"/>
+          </ac:spMkLst>
+        </pc:spChg>
+        <pc:spChg chg="add">
+          <ac:chgData name="Khairy, Anas (khairyas)" userId="1850a4aa-824e-41bd-895e-13f061b1a290" providerId="ADAL" clId="{70E8EF7A-9B3E-4B7C-83C1-22DE7DD7CA05}" dt="2026-03-04T20:34:12.194" v="8"/>
+          <ac:spMkLst>
+            <pc:docMk/>
+            <pc:sldMk cId="3944135579" sldId="268"/>
+            <ac:spMk id="4" creationId="{CB054E96-F431-0EC7-8E61-3FDF5012A59A}"/>
+          </ac:spMkLst>
+        </pc:spChg>
+        <pc:spChg chg="add">
+          <ac:chgData name="Khairy, Anas (khairyas)" userId="1850a4aa-824e-41bd-895e-13f061b1a290" providerId="ADAL" clId="{70E8EF7A-9B3E-4B7C-83C1-22DE7DD7CA05}" dt="2026-03-04T20:34:51.203" v="15"/>
+          <ac:spMkLst>
+            <pc:docMk/>
+            <pc:sldMk cId="3944135579" sldId="268"/>
+            <ac:spMk id="5" creationId="{AE62AA4B-C0A3-9DC7-5692-51F2D0BD2DCD}"/>
+          </ac:spMkLst>
+        </pc:spChg>
+      </pc:sldChg>
+    </pc:docChg>
+  </pc:docChgLst>
+  <pc:docChgLst>
+    <pc:chgData name="El Homayssi, Ali (elhomaab)" userId="S::elhomaab@mail.uc.edu::46c7c60b-afbf-4cb7-81f2-2076d51e9f9c" providerId="AD" clId="Web-{9AAC3ABC-7416-CEBD-5F47-364715DC3E7D}"/>
+    <pc:docChg chg="modSld">
+      <pc:chgData name="El Homayssi, Ali (elhomaab)" userId="S::elhomaab@mail.uc.edu::46c7c60b-afbf-4cb7-81f2-2076d51e9f9c" providerId="AD" clId="Web-{9AAC3ABC-7416-CEBD-5F47-364715DC3E7D}" dt="2026-03-02T22:06:54.797" v="2" actId="20577"/>
+      <pc:docMkLst>
+        <pc:docMk/>
+      </pc:docMkLst>
+      <pc:sldChg chg="modSp">
+        <pc:chgData name="El Homayssi, Ali (elhomaab)" userId="S::elhomaab@mail.uc.edu::46c7c60b-afbf-4cb7-81f2-2076d51e9f9c" providerId="AD" clId="Web-{9AAC3ABC-7416-CEBD-5F47-364715DC3E7D}" dt="2026-03-02T22:06:34.437" v="0" actId="1076"/>
+        <pc:sldMkLst>
+          <pc:docMk/>
+          <pc:sldMk cId="3105816496" sldId="273"/>
+        </pc:sldMkLst>
+        <pc:spChg chg="mod">
+          <ac:chgData name="El Homayssi, Ali (elhomaab)" userId="S::elhomaab@mail.uc.edu::46c7c60b-afbf-4cb7-81f2-2076d51e9f9c" providerId="AD" clId="Web-{9AAC3ABC-7416-CEBD-5F47-364715DC3E7D}" dt="2026-03-02T22:06:34.437" v="0" actId="1076"/>
+          <ac:spMkLst>
+            <pc:docMk/>
+            <pc:sldMk cId="3105816496" sldId="273"/>
+            <ac:spMk id="3" creationId="{8403CEEA-219A-FDE6-14F9-E31B0E0F74E0}"/>
+          </ac:spMkLst>
+        </pc:spChg>
+      </pc:sldChg>
+      <pc:sldChg chg="modSp">
+        <pc:chgData name="El Homayssi, Ali (elhomaab)" userId="S::elhomaab@mail.uc.edu::46c7c60b-afbf-4cb7-81f2-2076d51e9f9c" providerId="AD" clId="Web-{9AAC3ABC-7416-CEBD-5F47-364715DC3E7D}" dt="2026-03-02T22:06:54.797" v="2" actId="20577"/>
+        <pc:sldMkLst>
+          <pc:docMk/>
+          <pc:sldMk cId="2044678048" sldId="274"/>
+        </pc:sldMkLst>
+        <pc:spChg chg="mod">
+          <ac:chgData name="El Homayssi, Ali (elhomaab)" userId="S::elhomaab@mail.uc.edu::46c7c60b-afbf-4cb7-81f2-2076d51e9f9c" providerId="AD" clId="Web-{9AAC3ABC-7416-CEBD-5F47-364715DC3E7D}" dt="2026-03-02T22:06:54.797" v="2" actId="20577"/>
+          <ac:spMkLst>
+            <pc:docMk/>
+            <pc:sldMk cId="2044678048" sldId="274"/>
+            <ac:spMk id="3" creationId="{A5396FEA-DB69-3B35-F5EE-C1C8DF87795B}"/>
+          </ac:spMkLst>
+        </pc:spChg>
+      </pc:sldChg>
+    </pc:docChg>
+  </pc:docChgLst>
   <pc:docChgLst>
     <pc:chgData name="Ferguson, Joe (fergujp)" userId="4f65ad1c-5ee5-40cd-aa65-b2e007bab6e6" providerId="ADAL" clId="{41F57C3A-DD7E-4E1F-9779-C8B80D0CBC44}"/>
     <pc:docChg chg="custSel addSld delSld modSld">
@@ -149,13 +1113,6 @@
             <ac:spMk id="3" creationId="{5AAF06A1-CB80-3497-9FC0-035DAAD474E8}"/>
           </ac:spMkLst>
         </pc:spChg>
-      </pc:sldChg>
-      <pc:sldChg chg="new del">
-        <pc:chgData name="Ferguson, Joe (fergujp)" userId="4f65ad1c-5ee5-40cd-aa65-b2e007bab6e6" providerId="ADAL" clId="{41F57C3A-DD7E-4E1F-9779-C8B80D0CBC44}" dt="2026-02-12T18:54:10.437" v="161" actId="47"/>
-        <pc:sldMkLst>
-          <pc:docMk/>
-          <pc:sldMk cId="339348977" sldId="257"/>
-        </pc:sldMkLst>
       </pc:sldChg>
       <pc:sldChg chg="modSp new mod">
         <pc:chgData name="Ferguson, Joe (fergujp)" userId="4f65ad1c-5ee5-40cd-aa65-b2e007bab6e6" providerId="ADAL" clId="{41F57C3A-DD7E-4E1F-9779-C8B80D0CBC44}" dt="2026-02-12T18:57:37.198" v="473" actId="113"/>
@@ -215,16 +1172,13 @@
 </pc:chgInfo>
 </file>
 
-<file path=ppt/slideLayouts/slideLayout1.xml><?xml version="1.0" encoding="utf-8"?>
-<p:sldLayout xmlns:a="http://schemas.openxmlformats.org/drawingml/2006/main" xmlns:r="http://schemas.openxmlformats.org/officeDocument/2006/relationships" xmlns:p="http://schemas.openxmlformats.org/presentationml/2006/main" type="title" preserve="1">
-  <p:cSld name="Title Slide">
+<file path=ppt/notesMasters/notesMaster1.xml><?xml version="1.0" encoding="utf-8"?>
+<p:notesMaster xmlns:a="http://schemas.openxmlformats.org/drawingml/2006/main" xmlns:r="http://schemas.openxmlformats.org/officeDocument/2006/relationships" xmlns:p="http://schemas.openxmlformats.org/presentationml/2006/main">
+  <p:cSld>
     <p:bg>
-      <p:bgPr>
-        <a:solidFill>
-          <a:schemeClr val="accent2"/>
-        </a:solidFill>
-        <a:effectLst/>
-      </p:bgPr>
+      <p:bgRef idx="1001">
+        <a:schemeClr val="bg1"/>
+      </p:bgRef>
     </p:bg>
     <p:spTree>
       <p:nvGrpSpPr>
@@ -242,39 +1196,483 @@
       </p:grpSpPr>
       <p:sp>
         <p:nvSpPr>
-          <p:cNvPr id="2" name="Title 1"/>
-          <p:cNvSpPr>
-            <a:spLocks noGrp="1"/>
-          </p:cNvSpPr>
-          <p:nvPr>
-            <p:ph type="ctrTitle"/>
-          </p:nvPr>
-        </p:nvSpPr>
-        <p:spPr bwMode="blackWhite">
+          <p:cNvPr id="2" name="Header Placeholder 1"/>
+          <p:cNvSpPr>
+            <a:spLocks noGrp="1"/>
+          </p:cNvSpPr>
+          <p:nvPr>
+            <p:ph type="hdr" sz="quarter"/>
+          </p:nvPr>
+        </p:nvSpPr>
+        <p:spPr>
           <a:xfrm>
-            <a:off x="1600200" y="2386744"/>
-            <a:ext cx="8991600" cy="1645920"/>
+            <a:off x="0" y="0"/>
+            <a:ext cx="2971800" cy="458788"/>
           </a:xfrm>
-          <a:solidFill>
-            <a:srgbClr val="FFFFFF"/>
-          </a:solidFill>
-          <a:ln w="38100">
+          <a:prstGeom prst="rect">
+            <a:avLst/>
+          </a:prstGeom>
+        </p:spPr>
+        <p:txBody>
+          <a:bodyPr vert="horz" lIns="91440" tIns="45720" rIns="91440" bIns="45720" rtlCol="0"/>
+          <a:lstStyle>
+            <a:lvl1pPr algn="l">
+              <a:defRPr sz="1200"/>
+            </a:lvl1pPr>
+          </a:lstStyle>
+          <a:p>
+            <a:endParaRPr lang="en-US"/>
+          </a:p>
+        </p:txBody>
+      </p:sp>
+      <p:sp>
+        <p:nvSpPr>
+          <p:cNvPr id="3" name="Date Placeholder 2"/>
+          <p:cNvSpPr>
+            <a:spLocks noGrp="1"/>
+          </p:cNvSpPr>
+          <p:nvPr>
+            <p:ph type="dt" idx="1"/>
+          </p:nvPr>
+        </p:nvSpPr>
+        <p:spPr>
+          <a:xfrm>
+            <a:off x="3884613" y="0"/>
+            <a:ext cx="2971800" cy="458788"/>
+          </a:xfrm>
+          <a:prstGeom prst="rect">
+            <a:avLst/>
+          </a:prstGeom>
+        </p:spPr>
+        <p:txBody>
+          <a:bodyPr vert="horz" lIns="91440" tIns="45720" rIns="91440" bIns="45720" rtlCol="0"/>
+          <a:lstStyle>
+            <a:lvl1pPr algn="r">
+              <a:defRPr sz="1200"/>
+            </a:lvl1pPr>
+          </a:lstStyle>
+          <a:p>
+            <a:fld id="{59446176-DEFC-4F1B-AA65-6BBF7AF325E2}" type="datetimeFigureOut">
+              <a:t>3/5/2026</a:t>
+            </a:fld>
+            <a:endParaRPr lang="en-US"/>
+          </a:p>
+        </p:txBody>
+      </p:sp>
+      <p:sp>
+        <p:nvSpPr>
+          <p:cNvPr id="4" name="Slide Image Placeholder 3"/>
+          <p:cNvSpPr>
+            <a:spLocks noGrp="1" noRot="1" noChangeAspect="1"/>
+          </p:cNvSpPr>
+          <p:nvPr>
+            <p:ph type="sldImg" idx="2"/>
+          </p:nvPr>
+        </p:nvSpPr>
+        <p:spPr>
+          <a:xfrm>
+            <a:off x="685800" y="1143000"/>
+            <a:ext cx="5486400" cy="3086100"/>
+          </a:xfrm>
+          <a:prstGeom prst="rect">
+            <a:avLst/>
+          </a:prstGeom>
+          <a:noFill/>
+          <a:ln w="12700">
             <a:solidFill>
-              <a:srgbClr val="404040"/>
+              <a:prstClr val="black"/>
             </a:solidFill>
           </a:ln>
         </p:spPr>
         <p:txBody>
-          <a:bodyPr lIns="274320" rIns="274320" anchor="ctr" anchorCtr="1">
+          <a:bodyPr vert="horz" lIns="91440" tIns="45720" rIns="91440" bIns="45720" rtlCol="0" anchor="ctr"/>
+          <a:lstStyle/>
+          <a:p>
+            <a:endParaRPr lang="en-US"/>
+          </a:p>
+        </p:txBody>
+      </p:sp>
+      <p:sp>
+        <p:nvSpPr>
+          <p:cNvPr id="5" name="Notes Placeholder 4"/>
+          <p:cNvSpPr>
+            <a:spLocks noGrp="1"/>
+          </p:cNvSpPr>
+          <p:nvPr>
+            <p:ph type="body" sz="quarter" idx="3"/>
+          </p:nvPr>
+        </p:nvSpPr>
+        <p:spPr>
+          <a:xfrm>
+            <a:off x="685800" y="4400550"/>
+            <a:ext cx="5486400" cy="3600450"/>
+          </a:xfrm>
+          <a:prstGeom prst="rect">
+            <a:avLst/>
+          </a:prstGeom>
+        </p:spPr>
+        <p:txBody>
+          <a:bodyPr vert="horz" lIns="91440" tIns="45720" rIns="91440" bIns="45720" rtlCol="0"/>
+          <a:lstStyle/>
+          <a:p>
+            <a:pPr lvl="0"/>
+            <a:r>
+              <a:rPr lang="en-US"/>
+              <a:t>Click to edit Master text styles</a:t>
+            </a:r>
+          </a:p>
+          <a:p>
+            <a:pPr lvl="1"/>
+            <a:r>
+              <a:rPr lang="en-US"/>
+              <a:t>Second level</a:t>
+            </a:r>
+          </a:p>
+          <a:p>
+            <a:pPr lvl="2"/>
+            <a:r>
+              <a:rPr lang="en-US"/>
+              <a:t>Third level</a:t>
+            </a:r>
+          </a:p>
+          <a:p>
+            <a:pPr lvl="3"/>
+            <a:r>
+              <a:rPr lang="en-US"/>
+              <a:t>Fourth level</a:t>
+            </a:r>
+          </a:p>
+          <a:p>
+            <a:pPr lvl="4"/>
+            <a:r>
+              <a:rPr lang="en-US"/>
+              <a:t>Fifth level</a:t>
+            </a:r>
+          </a:p>
+        </p:txBody>
+      </p:sp>
+      <p:sp>
+        <p:nvSpPr>
+          <p:cNvPr id="6" name="Footer Placeholder 5"/>
+          <p:cNvSpPr>
+            <a:spLocks noGrp="1"/>
+          </p:cNvSpPr>
+          <p:nvPr>
+            <p:ph type="ftr" sz="quarter" idx="4"/>
+          </p:nvPr>
+        </p:nvSpPr>
+        <p:spPr>
+          <a:xfrm>
+            <a:off x="0" y="8685213"/>
+            <a:ext cx="2971800" cy="458787"/>
+          </a:xfrm>
+          <a:prstGeom prst="rect">
+            <a:avLst/>
+          </a:prstGeom>
+        </p:spPr>
+        <p:txBody>
+          <a:bodyPr vert="horz" lIns="91440" tIns="45720" rIns="91440" bIns="45720" rtlCol="0" anchor="b"/>
+          <a:lstStyle>
+            <a:lvl1pPr algn="l">
+              <a:defRPr sz="1200"/>
+            </a:lvl1pPr>
+          </a:lstStyle>
+          <a:p>
+            <a:endParaRPr lang="en-US"/>
+          </a:p>
+        </p:txBody>
+      </p:sp>
+      <p:sp>
+        <p:nvSpPr>
+          <p:cNvPr id="7" name="Slide Number Placeholder 6"/>
+          <p:cNvSpPr>
+            <a:spLocks noGrp="1"/>
+          </p:cNvSpPr>
+          <p:nvPr>
+            <p:ph type="sldNum" sz="quarter" idx="5"/>
+          </p:nvPr>
+        </p:nvSpPr>
+        <p:spPr>
+          <a:xfrm>
+            <a:off x="3884613" y="8685213"/>
+            <a:ext cx="2971800" cy="458787"/>
+          </a:xfrm>
+          <a:prstGeom prst="rect">
+            <a:avLst/>
+          </a:prstGeom>
+        </p:spPr>
+        <p:txBody>
+          <a:bodyPr vert="horz" lIns="91440" tIns="45720" rIns="91440" bIns="45720" rtlCol="0" anchor="b"/>
+          <a:lstStyle>
+            <a:lvl1pPr algn="r">
+              <a:defRPr sz="1200"/>
+            </a:lvl1pPr>
+          </a:lstStyle>
+          <a:p>
+            <a:fld id="{7D46177E-6295-4FAC-977C-D57403D1B8BD}" type="slidenum">
+              <a:t>‹#›</a:t>
+            </a:fld>
+            <a:endParaRPr lang="en-US"/>
+          </a:p>
+        </p:txBody>
+      </p:sp>
+    </p:spTree>
+    <p:extLst>
+      <p:ext uri="{BB962C8B-B14F-4D97-AF65-F5344CB8AC3E}">
+        <p14:creationId xmlns:p14="http://schemas.microsoft.com/office/powerpoint/2010/main" val="3584604695"/>
+      </p:ext>
+    </p:extLst>
+  </p:cSld>
+  <p:clrMap bg1="lt1" tx1="dk1" bg2="lt2" tx2="dk2" accent1="accent1" accent2="accent2" accent3="accent3" accent4="accent4" accent5="accent5" accent6="accent6" hlink="hlink" folHlink="folHlink"/>
+  <p:notesStyle>
+    <a:lvl1pPr marL="0" algn="l" defTabSz="914400" rtl="0" eaLnBrk="1" latinLnBrk="0" hangingPunct="1">
+      <a:defRPr sz="1200" kern="1200">
+        <a:solidFill>
+          <a:schemeClr val="tx1"/>
+        </a:solidFill>
+        <a:latin typeface="+mn-lt"/>
+        <a:ea typeface="+mn-ea"/>
+        <a:cs typeface="+mn-cs"/>
+      </a:defRPr>
+    </a:lvl1pPr>
+    <a:lvl2pPr marL="457200" algn="l" defTabSz="914400" rtl="0" eaLnBrk="1" latinLnBrk="0" hangingPunct="1">
+      <a:defRPr sz="1200" kern="1200">
+        <a:solidFill>
+          <a:schemeClr val="tx1"/>
+        </a:solidFill>
+        <a:latin typeface="+mn-lt"/>
+        <a:ea typeface="+mn-ea"/>
+        <a:cs typeface="+mn-cs"/>
+      </a:defRPr>
+    </a:lvl2pPr>
+    <a:lvl3pPr marL="914400" algn="l" defTabSz="914400" rtl="0" eaLnBrk="1" latinLnBrk="0" hangingPunct="1">
+      <a:defRPr sz="1200" kern="1200">
+        <a:solidFill>
+          <a:schemeClr val="tx1"/>
+        </a:solidFill>
+        <a:latin typeface="+mn-lt"/>
+        <a:ea typeface="+mn-ea"/>
+        <a:cs typeface="+mn-cs"/>
+      </a:defRPr>
+    </a:lvl3pPr>
+    <a:lvl4pPr marL="1371600" algn="l" defTabSz="914400" rtl="0" eaLnBrk="1" latinLnBrk="0" hangingPunct="1">
+      <a:defRPr sz="1200" kern="1200">
+        <a:solidFill>
+          <a:schemeClr val="tx1"/>
+        </a:solidFill>
+        <a:latin typeface="+mn-lt"/>
+        <a:ea typeface="+mn-ea"/>
+        <a:cs typeface="+mn-cs"/>
+      </a:defRPr>
+    </a:lvl4pPr>
+    <a:lvl5pPr marL="1828800" algn="l" defTabSz="914400" rtl="0" eaLnBrk="1" latinLnBrk="0" hangingPunct="1">
+      <a:defRPr sz="1200" kern="1200">
+        <a:solidFill>
+          <a:schemeClr val="tx1"/>
+        </a:solidFill>
+        <a:latin typeface="+mn-lt"/>
+        <a:ea typeface="+mn-ea"/>
+        <a:cs typeface="+mn-cs"/>
+      </a:defRPr>
+    </a:lvl5pPr>
+    <a:lvl6pPr marL="2286000" algn="l" defTabSz="914400" rtl="0" eaLnBrk="1" latinLnBrk="0" hangingPunct="1">
+      <a:defRPr sz="1200" kern="1200">
+        <a:solidFill>
+          <a:schemeClr val="tx1"/>
+        </a:solidFill>
+        <a:latin typeface="+mn-lt"/>
+        <a:ea typeface="+mn-ea"/>
+        <a:cs typeface="+mn-cs"/>
+      </a:defRPr>
+    </a:lvl6pPr>
+    <a:lvl7pPr marL="2743200" algn="l" defTabSz="914400" rtl="0" eaLnBrk="1" latinLnBrk="0" hangingPunct="1">
+      <a:defRPr sz="1200" kern="1200">
+        <a:solidFill>
+          <a:schemeClr val="tx1"/>
+        </a:solidFill>
+        <a:latin typeface="+mn-lt"/>
+        <a:ea typeface="+mn-ea"/>
+        <a:cs typeface="+mn-cs"/>
+      </a:defRPr>
+    </a:lvl7pPr>
+    <a:lvl8pPr marL="3200400" algn="l" defTabSz="914400" rtl="0" eaLnBrk="1" latinLnBrk="0" hangingPunct="1">
+      <a:defRPr sz="1200" kern="1200">
+        <a:solidFill>
+          <a:schemeClr val="tx1"/>
+        </a:solidFill>
+        <a:latin typeface="+mn-lt"/>
+        <a:ea typeface="+mn-ea"/>
+        <a:cs typeface="+mn-cs"/>
+      </a:defRPr>
+    </a:lvl8pPr>
+    <a:lvl9pPr marL="3657600" algn="l" defTabSz="914400" rtl="0" eaLnBrk="1" latinLnBrk="0" hangingPunct="1">
+      <a:defRPr sz="1200" kern="1200">
+        <a:solidFill>
+          <a:schemeClr val="tx1"/>
+        </a:solidFill>
+        <a:latin typeface="+mn-lt"/>
+        <a:ea typeface="+mn-ea"/>
+        <a:cs typeface="+mn-cs"/>
+      </a:defRPr>
+    </a:lvl9pPr>
+  </p:notesStyle>
+</p:notesMaster>
+</file>
+
+<file path=ppt/notesSlides/notesSlide1.xml><?xml version="1.0" encoding="utf-8"?>
+<p:notes xmlns:a="http://schemas.openxmlformats.org/drawingml/2006/main" xmlns:r="http://schemas.openxmlformats.org/officeDocument/2006/relationships" xmlns:p="http://schemas.openxmlformats.org/presentationml/2006/main">
+  <p:cSld>
+    <p:spTree>
+      <p:nvGrpSpPr>
+        <p:cNvPr id="1" name="">
+          <a:extLst>
+            <a:ext uri="{FF2B5EF4-FFF2-40B4-BE49-F238E27FC236}">
+              <a16:creationId xmlns:a16="http://schemas.microsoft.com/office/drawing/2014/main" id="{242EBA27-11D0-AC62-587B-09718B380617}"/>
+            </a:ext>
+          </a:extLst>
+        </p:cNvPr>
+        <p:cNvGrpSpPr/>
+        <p:nvPr/>
+      </p:nvGrpSpPr>
+      <p:grpSpPr>
+        <a:xfrm>
+          <a:off x="0" y="0"/>
+          <a:ext cx="0" cy="0"/>
+          <a:chOff x="0" y="0"/>
+          <a:chExt cx="0" cy="0"/>
+        </a:xfrm>
+      </p:grpSpPr>
+      <p:sp>
+        <p:nvSpPr>
+          <p:cNvPr id="2" name="Slide Image Placeholder 1">
+            <a:extLst>
+              <a:ext uri="{FF2B5EF4-FFF2-40B4-BE49-F238E27FC236}">
+                <a16:creationId xmlns:a16="http://schemas.microsoft.com/office/drawing/2014/main" id="{FC450142-88C9-4039-1081-88AE8550B48F}"/>
+              </a:ext>
+            </a:extLst>
+          </p:cNvPr>
+          <p:cNvSpPr>
+            <a:spLocks noGrp="1" noRot="1" noChangeAspect="1"/>
+          </p:cNvSpPr>
+          <p:nvPr>
+            <p:ph type="sldImg"/>
+          </p:nvPr>
+        </p:nvSpPr>
+        <p:spPr/>
+      </p:sp>
+      <p:sp>
+        <p:nvSpPr>
+          <p:cNvPr id="3" name="Notes Placeholder 2">
+            <a:extLst>
+              <a:ext uri="{FF2B5EF4-FFF2-40B4-BE49-F238E27FC236}">
+                <a16:creationId xmlns:a16="http://schemas.microsoft.com/office/drawing/2014/main" id="{737A8659-F3ED-A75B-EFF8-FE5B47A982B3}"/>
+              </a:ext>
+            </a:extLst>
+          </p:cNvPr>
+          <p:cNvSpPr>
+            <a:spLocks noGrp="1"/>
+          </p:cNvSpPr>
+          <p:nvPr>
+            <p:ph type="body" idx="1"/>
+          </p:nvPr>
+        </p:nvSpPr>
+        <p:spPr/>
+        <p:txBody>
+          <a:bodyPr/>
+          <a:lstStyle/>
+          <a:p>
+            <a:r>
+              <a:rPr lang="en-US">
+                <a:ea typeface="Calibri"/>
+                <a:cs typeface="Calibri"/>
+              </a:rPr>
+              <a:t>AR-MINER Circa 2014, our paper came out in 2016. </a:t>
+            </a:r>
+            <a:endParaRPr lang="en-US"/>
+          </a:p>
+        </p:txBody>
+      </p:sp>
+      <p:sp>
+        <p:nvSpPr>
+          <p:cNvPr id="4" name="Slide Number Placeholder 3">
+            <a:extLst>
+              <a:ext uri="{FF2B5EF4-FFF2-40B4-BE49-F238E27FC236}">
+                <a16:creationId xmlns:a16="http://schemas.microsoft.com/office/drawing/2014/main" id="{BF2206D1-2F3D-3820-B703-DC0C614389A2}"/>
+              </a:ext>
+            </a:extLst>
+          </p:cNvPr>
+          <p:cNvSpPr>
+            <a:spLocks noGrp="1"/>
+          </p:cNvSpPr>
+          <p:nvPr>
+            <p:ph type="sldNum" sz="quarter" idx="5"/>
+          </p:nvPr>
+        </p:nvSpPr>
+        <p:spPr/>
+        <p:txBody>
+          <a:bodyPr/>
+          <a:lstStyle/>
+          <a:p>
+            <a:fld id="{7D46177E-6295-4FAC-977C-D57403D1B8BD}" type="slidenum">
+              <a:t>5</a:t>
+            </a:fld>
+            <a:endParaRPr lang="en-US"/>
+          </a:p>
+        </p:txBody>
+      </p:sp>
+    </p:spTree>
+    <p:extLst>
+      <p:ext uri="{BB962C8B-B14F-4D97-AF65-F5344CB8AC3E}">
+        <p14:creationId xmlns:p14="http://schemas.microsoft.com/office/powerpoint/2010/main" val="122303102"/>
+      </p:ext>
+    </p:extLst>
+  </p:cSld>
+  <p:clrMapOvr>
+    <a:masterClrMapping/>
+  </p:clrMapOvr>
+</p:notes>
+</file>
+
+<file path=ppt/slideLayouts/slideLayout1.xml><?xml version="1.0" encoding="utf-8"?>
+<p:sldLayout xmlns:a="http://schemas.openxmlformats.org/drawingml/2006/main" xmlns:r="http://schemas.openxmlformats.org/officeDocument/2006/relationships" xmlns:p="http://schemas.openxmlformats.org/presentationml/2006/main" type="title" preserve="1">
+  <p:cSld name="Title Slide">
+    <p:spTree>
+      <p:nvGrpSpPr>
+        <p:cNvPr id="1" name=""/>
+        <p:cNvGrpSpPr/>
+        <p:nvPr/>
+      </p:nvGrpSpPr>
+      <p:grpSpPr>
+        <a:xfrm>
+          <a:off x="0" y="0"/>
+          <a:ext cx="0" cy="0"/>
+          <a:chOff x="0" y="0"/>
+          <a:chExt cx="0" cy="0"/>
+        </a:xfrm>
+      </p:grpSpPr>
+      <p:sp>
+        <p:nvSpPr>
+          <p:cNvPr id="2" name="Title 1"/>
+          <p:cNvSpPr>
+            <a:spLocks noGrp="1"/>
+          </p:cNvSpPr>
+          <p:nvPr>
+            <p:ph type="ctrTitle"/>
+          </p:nvPr>
+        </p:nvSpPr>
+        <p:spPr>
+          <a:xfrm>
+            <a:off x="2417779" y="802298"/>
+            <a:ext cx="8637073" cy="2541431"/>
+          </a:xfrm>
+        </p:spPr>
+        <p:txBody>
+          <a:bodyPr bIns="0" anchor="b">
             <a:normAutofit/>
           </a:bodyPr>
           <a:lstStyle>
-            <a:lvl1pPr algn="ctr">
-              <a:defRPr sz="3800">
-                <a:solidFill>
-                  <a:srgbClr val="262626"/>
-                </a:solidFill>
-              </a:defRPr>
+            <a:lvl1pPr algn="l">
+              <a:defRPr sz="6600"/>
             </a:lvl1pPr>
           </a:lstStyle>
           <a:p>
@@ -282,7 +1680,6 @@
               <a:rPr lang="en-US"/>
               <a:t>Click to edit Master title style</a:t>
             </a:r>
-            <a:endParaRPr lang="en-US" dirty="0"/>
           </a:p>
         </p:txBody>
       </p:sp>
@@ -298,30 +1695,26 @@
         </p:nvSpPr>
         <p:spPr>
           <a:xfrm>
-            <a:off x="2695194" y="4352544"/>
-            <a:ext cx="6801612" cy="1239894"/>
+            <a:off x="2417780" y="3531204"/>
+            <a:ext cx="8637072" cy="977621"/>
           </a:xfrm>
-          <a:noFill/>
         </p:spPr>
         <p:txBody>
-          <a:bodyPr>
+          <a:bodyPr tIns="91440" bIns="91440">
             <a:normAutofit/>
           </a:bodyPr>
           <a:lstStyle>
-            <a:lvl1pPr marL="0" indent="0" algn="ctr">
+            <a:lvl1pPr marL="0" indent="0" algn="l">
               <a:buNone/>
-              <a:defRPr sz="2000">
+              <a:defRPr sz="1800" b="0" cap="all" baseline="0">
                 <a:solidFill>
-                  <a:schemeClr val="tx1">
-                    <a:lumMod val="75000"/>
-                    <a:lumOff val="25000"/>
-                  </a:schemeClr>
+                  <a:schemeClr val="tx1"/>
                 </a:solidFill>
               </a:defRPr>
             </a:lvl1pPr>
             <a:lvl2pPr marL="457200" indent="0" algn="ctr">
               <a:buNone/>
-              <a:defRPr sz="2000"/>
+              <a:defRPr sz="1800"/>
             </a:lvl2pPr>
             <a:lvl3pPr marL="914400" indent="0" algn="ctr">
               <a:buNone/>
@@ -357,13 +1750,12 @@
               <a:rPr lang="en-US"/>
               <a:t>Click to edit Master subtitle style</a:t>
             </a:r>
-            <a:endParaRPr lang="en-US" dirty="0"/>
-          </a:p>
-        </p:txBody>
-      </p:sp>
-      <p:sp>
-        <p:nvSpPr>
-          <p:cNvPr id="7" name="Date Placeholder 6"/>
+          </a:p>
+        </p:txBody>
+      </p:sp>
+      <p:sp>
+        <p:nvSpPr>
+          <p:cNvPr id="4" name="Date Placeholder 3"/>
           <p:cNvSpPr>
             <a:spLocks noGrp="1"/>
           </p:cNvSpPr>
@@ -378,7 +1770,7 @@
           <a:p>
             <a:fld id="{6EF5D040-31F8-4918-8619-B8E0C517AD2F}" type="datetimeFigureOut">
               <a:rPr lang="en-US" smtClean="0"/>
-              <a:t>2/12/2026</a:t>
+              <a:t>3/5/2026</a:t>
             </a:fld>
             <a:endParaRPr lang="en-US"/>
           </a:p>
@@ -386,7 +1778,7 @@
       </p:sp>
       <p:sp>
         <p:nvSpPr>
-          <p:cNvPr id="8" name="Footer Placeholder 7"/>
+          <p:cNvPr id="5" name="Footer Placeholder 4"/>
           <p:cNvSpPr>
             <a:spLocks noGrp="1"/>
           </p:cNvSpPr>
@@ -394,7 +1786,12 @@
             <p:ph type="ftr" sz="quarter" idx="11"/>
           </p:nvPr>
         </p:nvSpPr>
-        <p:spPr/>
+        <p:spPr>
+          <a:xfrm>
+            <a:off x="2416500" y="329307"/>
+            <a:ext cx="4973915" cy="309201"/>
+          </a:xfrm>
+        </p:spPr>
         <p:txBody>
           <a:bodyPr/>
           <a:lstStyle/>
@@ -405,7 +1802,7 @@
       </p:sp>
       <p:sp>
         <p:nvSpPr>
-          <p:cNvPr id="9" name="Slide Number Placeholder 8"/>
+          <p:cNvPr id="6" name="Slide Number Placeholder 5"/>
           <p:cNvSpPr>
             <a:spLocks noGrp="1"/>
           </p:cNvSpPr>
@@ -413,7 +1810,12 @@
             <p:ph type="sldNum" sz="quarter" idx="12"/>
           </p:nvPr>
         </p:nvSpPr>
-        <p:spPr/>
+        <p:spPr>
+          <a:xfrm>
+            <a:off x="1437664" y="798973"/>
+            <a:ext cx="811019" cy="503578"/>
+          </a:xfrm>
+        </p:spPr>
         <p:txBody>
           <a:bodyPr/>
           <a:lstStyle/>
@@ -426,15 +1828,46 @@
           </a:p>
         </p:txBody>
       </p:sp>
+      <p:cxnSp>
+        <p:nvCxnSpPr>
+          <p:cNvPr id="15" name="Straight Connector 14"/>
+          <p:cNvCxnSpPr/>
+          <p:nvPr/>
+        </p:nvCxnSpPr>
+        <p:spPr>
+          <a:xfrm>
+            <a:off x="2417780" y="3528542"/>
+            <a:ext cx="8637072" cy="0"/>
+          </a:xfrm>
+          <a:prstGeom prst="line">
+            <a:avLst/>
+          </a:prstGeom>
+          <a:ln w="31750"/>
+        </p:spPr>
+        <p:style>
+          <a:lnRef idx="3">
+            <a:schemeClr val="accent1"/>
+          </a:lnRef>
+          <a:fillRef idx="0">
+            <a:schemeClr val="accent1"/>
+          </a:fillRef>
+          <a:effectRef idx="2">
+            <a:schemeClr val="accent1"/>
+          </a:effectRef>
+          <a:fontRef idx="minor">
+            <a:schemeClr val="tx1"/>
+          </a:fontRef>
+        </p:style>
+      </p:cxnSp>
     </p:spTree>
     <p:extLst>
       <p:ext uri="{BB962C8B-B14F-4D97-AF65-F5344CB8AC3E}">
-        <p14:creationId xmlns:p14="http://schemas.microsoft.com/office/powerpoint/2010/main" val="4222413702"/>
+        <p14:creationId xmlns:p14="http://schemas.microsoft.com/office/powerpoint/2010/main" val="520067633"/>
       </p:ext>
     </p:extLst>
   </p:cSld>
   <p:clrMapOvr>
-    <a:overrideClrMapping bg1="dk1" tx1="lt1" bg2="dk2" tx2="lt2" accent1="accent1" accent2="accent2" accent3="accent3" accent4="accent4" accent5="accent5" accent6="accent6" hlink="hlink" folHlink="folHlink"/>
+    <a:masterClrMapping/>
   </p:clrMapOvr>
 </p:sldLayout>
 </file>
@@ -475,7 +1908,6 @@
               <a:rPr lang="en-US"/>
               <a:t>Click to edit Master title style</a:t>
             </a:r>
-            <a:endParaRPr lang="en-US" dirty="0"/>
           </a:p>
         </p:txBody>
       </p:sp>
@@ -527,7 +1959,6 @@
               <a:rPr lang="en-US"/>
               <a:t>Fifth level</a:t>
             </a:r>
-            <a:endParaRPr lang="en-US" dirty="0"/>
           </a:p>
         </p:txBody>
       </p:sp>
@@ -548,7 +1979,7 @@
           <a:p>
             <a:fld id="{6EF5D040-31F8-4918-8619-B8E0C517AD2F}" type="datetimeFigureOut">
               <a:rPr lang="en-US" smtClean="0"/>
-              <a:t>2/12/2026</a:t>
+              <a:t>3/5/2026</a:t>
             </a:fld>
             <a:endParaRPr lang="en-US"/>
           </a:p>
@@ -596,10 +2027,41 @@
           </a:p>
         </p:txBody>
       </p:sp>
+      <p:cxnSp>
+        <p:nvCxnSpPr>
+          <p:cNvPr id="26" name="Straight Connector 25"/>
+          <p:cNvCxnSpPr/>
+          <p:nvPr/>
+        </p:nvCxnSpPr>
+        <p:spPr>
+          <a:xfrm>
+            <a:off x="1453896" y="1847088"/>
+            <a:ext cx="9607522" cy="0"/>
+          </a:xfrm>
+          <a:prstGeom prst="line">
+            <a:avLst/>
+          </a:prstGeom>
+          <a:ln w="31750"/>
+        </p:spPr>
+        <p:style>
+          <a:lnRef idx="3">
+            <a:schemeClr val="accent1"/>
+          </a:lnRef>
+          <a:fillRef idx="0">
+            <a:schemeClr val="accent1"/>
+          </a:fillRef>
+          <a:effectRef idx="2">
+            <a:schemeClr val="accent1"/>
+          </a:effectRef>
+          <a:fontRef idx="minor">
+            <a:schemeClr val="tx1"/>
+          </a:fontRef>
+        </p:style>
+      </p:cxnSp>
     </p:spTree>
     <p:extLst>
       <p:ext uri="{BB962C8B-B14F-4D97-AF65-F5344CB8AC3E}">
-        <p14:creationId xmlns:p14="http://schemas.microsoft.com/office/powerpoint/2010/main" val="83710173"/>
+        <p14:creationId xmlns:p14="http://schemas.microsoft.com/office/powerpoint/2010/main" val="3124559920"/>
       </p:ext>
     </p:extLst>
   </p:cSld>
@@ -638,19 +2100,22 @@
         </p:nvSpPr>
         <p:spPr>
           <a:xfrm>
-            <a:off x="8653112" y="937260"/>
-            <a:ext cx="1298608" cy="4983480"/>
+            <a:off x="9439111" y="798973"/>
+            <a:ext cx="1615742" cy="4659889"/>
           </a:xfrm>
         </p:spPr>
         <p:txBody>
           <a:bodyPr vert="eaVert"/>
-          <a:lstStyle/>
+          <a:lstStyle>
+            <a:lvl1pPr algn="l">
+              <a:defRPr/>
+            </a:lvl1pPr>
+          </a:lstStyle>
           <a:p>
             <a:r>
               <a:rPr lang="en-US"/>
               <a:t>Click to edit Master title style</a:t>
             </a:r>
-            <a:endParaRPr lang="en-US" dirty="0"/>
           </a:p>
         </p:txBody>
       </p:sp>
@@ -666,8 +2131,8 @@
         </p:nvSpPr>
         <p:spPr>
           <a:xfrm>
-            <a:off x="2231136" y="937260"/>
-            <a:ext cx="6198489" cy="4983480"/>
+            <a:off x="1444672" y="798973"/>
+            <a:ext cx="7828830" cy="4659889"/>
           </a:xfrm>
         </p:spPr>
         <p:txBody>
@@ -707,7 +2172,6 @@
               <a:rPr lang="en-US"/>
               <a:t>Fifth level</a:t>
             </a:r>
-            <a:endParaRPr lang="en-US" dirty="0"/>
           </a:p>
         </p:txBody>
       </p:sp>
@@ -728,7 +2192,7 @@
           <a:p>
             <a:fld id="{6EF5D040-31F8-4918-8619-B8E0C517AD2F}" type="datetimeFigureOut">
               <a:rPr lang="en-US" smtClean="0"/>
-              <a:t>2/12/2026</a:t>
+              <a:t>3/5/2026</a:t>
             </a:fld>
             <a:endParaRPr lang="en-US"/>
           </a:p>
@@ -776,10 +2240,41 @@
           </a:p>
         </p:txBody>
       </p:sp>
+      <p:cxnSp>
+        <p:nvCxnSpPr>
+          <p:cNvPr id="15" name="Straight Connector 14"/>
+          <p:cNvCxnSpPr/>
+          <p:nvPr/>
+        </p:nvCxnSpPr>
+        <p:spPr>
+          <a:xfrm>
+            <a:off x="9439111" y="798973"/>
+            <a:ext cx="0" cy="4659889"/>
+          </a:xfrm>
+          <a:prstGeom prst="line">
+            <a:avLst/>
+          </a:prstGeom>
+          <a:ln w="31750"/>
+        </p:spPr>
+        <p:style>
+          <a:lnRef idx="3">
+            <a:schemeClr val="accent1"/>
+          </a:lnRef>
+          <a:fillRef idx="0">
+            <a:schemeClr val="accent1"/>
+          </a:fillRef>
+          <a:effectRef idx="2">
+            <a:schemeClr val="accent1"/>
+          </a:effectRef>
+          <a:fontRef idx="minor">
+            <a:schemeClr val="tx1"/>
+          </a:fontRef>
+        </p:style>
+      </p:cxnSp>
     </p:spTree>
     <p:extLst>
       <p:ext uri="{BB962C8B-B14F-4D97-AF65-F5344CB8AC3E}">
-        <p14:creationId xmlns:p14="http://schemas.microsoft.com/office/powerpoint/2010/main" val="406276806"/>
+        <p14:creationId xmlns:p14="http://schemas.microsoft.com/office/powerpoint/2010/main" val="1915633674"/>
       </p:ext>
     </p:extLst>
   </p:cSld>
@@ -825,7 +2320,6 @@
               <a:rPr lang="en-US"/>
               <a:t>Click to edit Master title style</a:t>
             </a:r>
-            <a:endParaRPr lang="en-US" dirty="0"/>
           </a:p>
         </p:txBody>
       </p:sp>
@@ -841,7 +2335,7 @@
         </p:nvSpPr>
         <p:spPr/>
         <p:txBody>
-          <a:bodyPr/>
+          <a:bodyPr anchor="t"/>
           <a:lstStyle/>
           <a:p>
             <a:pPr lvl="0"/>
@@ -877,13 +2371,12 @@
               <a:rPr lang="en-US"/>
               <a:t>Fifth level</a:t>
             </a:r>
-            <a:endParaRPr lang="en-US" dirty="0"/>
-          </a:p>
-        </p:txBody>
-      </p:sp>
-      <p:sp>
-        <p:nvSpPr>
-          <p:cNvPr id="7" name="Date Placeholder 6"/>
+          </a:p>
+        </p:txBody>
+      </p:sp>
+      <p:sp>
+        <p:nvSpPr>
+          <p:cNvPr id="4" name="Date Placeholder 3"/>
           <p:cNvSpPr>
             <a:spLocks noGrp="1"/>
           </p:cNvSpPr>
@@ -898,7 +2391,7 @@
           <a:p>
             <a:fld id="{6EF5D040-31F8-4918-8619-B8E0C517AD2F}" type="datetimeFigureOut">
               <a:rPr lang="en-US" smtClean="0"/>
-              <a:t>2/12/2026</a:t>
+              <a:t>3/5/2026</a:t>
             </a:fld>
             <a:endParaRPr lang="en-US"/>
           </a:p>
@@ -906,7 +2399,7 @@
       </p:sp>
       <p:sp>
         <p:nvSpPr>
-          <p:cNvPr id="8" name="Footer Placeholder 7"/>
+          <p:cNvPr id="5" name="Footer Placeholder 4"/>
           <p:cNvSpPr>
             <a:spLocks noGrp="1"/>
           </p:cNvSpPr>
@@ -925,7 +2418,7 @@
       </p:sp>
       <p:sp>
         <p:nvSpPr>
-          <p:cNvPr id="9" name="Slide Number Placeholder 8"/>
+          <p:cNvPr id="6" name="Slide Number Placeholder 5"/>
           <p:cNvSpPr>
             <a:spLocks noGrp="1"/>
           </p:cNvSpPr>
@@ -946,10 +2439,41 @@
           </a:p>
         </p:txBody>
       </p:sp>
+      <p:cxnSp>
+        <p:nvCxnSpPr>
+          <p:cNvPr id="33" name="Straight Connector 32"/>
+          <p:cNvCxnSpPr/>
+          <p:nvPr/>
+        </p:nvCxnSpPr>
+        <p:spPr>
+          <a:xfrm>
+            <a:off x="1453896" y="1847088"/>
+            <a:ext cx="9607522" cy="0"/>
+          </a:xfrm>
+          <a:prstGeom prst="line">
+            <a:avLst/>
+          </a:prstGeom>
+          <a:ln w="31750"/>
+        </p:spPr>
+        <p:style>
+          <a:lnRef idx="3">
+            <a:schemeClr val="accent1"/>
+          </a:lnRef>
+          <a:fillRef idx="0">
+            <a:schemeClr val="accent1"/>
+          </a:fillRef>
+          <a:effectRef idx="2">
+            <a:schemeClr val="accent1"/>
+          </a:effectRef>
+          <a:fontRef idx="minor">
+            <a:schemeClr val="tx1"/>
+          </a:fontRef>
+        </p:style>
+      </p:cxnSp>
     </p:spTree>
     <p:extLst>
       <p:ext uri="{BB962C8B-B14F-4D97-AF65-F5344CB8AC3E}">
-        <p14:creationId xmlns:p14="http://schemas.microsoft.com/office/powerpoint/2010/main" val="292113265"/>
+        <p14:creationId xmlns:p14="http://schemas.microsoft.com/office/powerpoint/2010/main" val="3238785629"/>
       </p:ext>
     </p:extLst>
   </p:cSld>
@@ -962,14 +2486,6 @@
 <file path=ppt/slideLayouts/slideLayout3.xml><?xml version="1.0" encoding="utf-8"?>
 <p:sldLayout xmlns:a="http://schemas.openxmlformats.org/drawingml/2006/main" xmlns:r="http://schemas.openxmlformats.org/officeDocument/2006/relationships" xmlns:p="http://schemas.openxmlformats.org/presentationml/2006/main" type="secHead" preserve="1">
   <p:cSld name="Section Header">
-    <p:bg>
-      <p:bgPr>
-        <a:solidFill>
-          <a:schemeClr val="accent1"/>
-        </a:solidFill>
-        <a:effectLst/>
-      </p:bgPr>
-    </p:bg>
     <p:spTree>
       <p:nvGrpSpPr>
         <p:cNvPr id="1" name=""/>
@@ -994,31 +2510,19 @@
             <p:ph type="title"/>
           </p:nvPr>
         </p:nvSpPr>
-        <p:spPr bwMode="blackWhite">
+        <p:spPr>
           <a:xfrm>
-            <a:off x="1600200" y="2386744"/>
-            <a:ext cx="8991600" cy="1645920"/>
+            <a:off x="1454239" y="1756130"/>
+            <a:ext cx="8643154" cy="1887950"/>
           </a:xfrm>
-          <a:solidFill>
-            <a:srgbClr val="FFFFFF"/>
-          </a:solidFill>
-          <a:ln w="38100">
-            <a:solidFill>
-              <a:srgbClr val="404040"/>
-            </a:solidFill>
-          </a:ln>
         </p:spPr>
         <p:txBody>
-          <a:bodyPr lIns="274320" rIns="274320" anchor="ctr" anchorCtr="1">
+          <a:bodyPr anchor="b">
             <a:normAutofit/>
           </a:bodyPr>
           <a:lstStyle>
-            <a:lvl1pPr>
-              <a:defRPr sz="3800">
-                <a:solidFill>
-                  <a:srgbClr val="262626"/>
-                </a:solidFill>
-              </a:defRPr>
+            <a:lvl1pPr algn="l">
+              <a:defRPr sz="3600"/>
             </a:lvl1pPr>
           </a:lstStyle>
           <a:p>
@@ -1026,7 +2530,6 @@
               <a:rPr lang="en-US"/>
               <a:t>Click to edit Master title style</a:t>
             </a:r>
-            <a:endParaRPr lang="en-US" dirty="0"/>
           </a:p>
         </p:txBody>
       </p:sp>
@@ -1042,18 +2545,18 @@
         </p:nvSpPr>
         <p:spPr>
           <a:xfrm>
-            <a:off x="2695194" y="4352465"/>
-            <a:ext cx="6801612" cy="1265082"/>
+            <a:off x="1454239" y="3806195"/>
+            <a:ext cx="8630446" cy="1012929"/>
           </a:xfrm>
         </p:spPr>
         <p:txBody>
-          <a:bodyPr anchor="t" anchorCtr="1">
+          <a:bodyPr tIns="91440">
             <a:normAutofit/>
           </a:bodyPr>
           <a:lstStyle>
-            <a:lvl1pPr marL="0" indent="0">
+            <a:lvl1pPr marL="0" indent="0" algn="l">
               <a:buNone/>
-              <a:defRPr sz="2000">
+              <a:defRPr sz="1800">
                 <a:solidFill>
                   <a:schemeClr val="tx1"/>
                 </a:solidFill>
@@ -1061,7 +2564,7 @@
             </a:lvl1pPr>
             <a:lvl2pPr marL="457200" indent="0">
               <a:buNone/>
-              <a:defRPr sz="2000">
+              <a:defRPr sz="1800">
                 <a:solidFill>
                   <a:schemeClr val="tx1">
                     <a:tint val="75000"/>
@@ -1151,7 +2654,7 @@
       </p:sp>
       <p:sp>
         <p:nvSpPr>
-          <p:cNvPr id="7" name="Date Placeholder 6"/>
+          <p:cNvPr id="4" name="Date Placeholder 3"/>
           <p:cNvSpPr>
             <a:spLocks noGrp="1"/>
           </p:cNvSpPr>
@@ -1166,7 +2669,7 @@
           <a:p>
             <a:fld id="{6EF5D040-31F8-4918-8619-B8E0C517AD2F}" type="datetimeFigureOut">
               <a:rPr lang="en-US" smtClean="0"/>
-              <a:t>2/12/2026</a:t>
+              <a:t>3/5/2026</a:t>
             </a:fld>
             <a:endParaRPr lang="en-US"/>
           </a:p>
@@ -1174,7 +2677,7 @@
       </p:sp>
       <p:sp>
         <p:nvSpPr>
-          <p:cNvPr id="8" name="Footer Placeholder 7"/>
+          <p:cNvPr id="5" name="Footer Placeholder 4"/>
           <p:cNvSpPr>
             <a:spLocks noGrp="1"/>
           </p:cNvSpPr>
@@ -1193,7 +2696,7 @@
       </p:sp>
       <p:sp>
         <p:nvSpPr>
-          <p:cNvPr id="9" name="Slide Number Placeholder 8"/>
+          <p:cNvPr id="6" name="Slide Number Placeholder 5"/>
           <p:cNvSpPr>
             <a:spLocks noGrp="1"/>
           </p:cNvSpPr>
@@ -1214,15 +2717,46 @@
           </a:p>
         </p:txBody>
       </p:sp>
+      <p:cxnSp>
+        <p:nvCxnSpPr>
+          <p:cNvPr id="15" name="Straight Connector 14"/>
+          <p:cNvCxnSpPr/>
+          <p:nvPr/>
+        </p:nvCxnSpPr>
+        <p:spPr>
+          <a:xfrm>
+            <a:off x="1454239" y="3804985"/>
+            <a:ext cx="8630446" cy="0"/>
+          </a:xfrm>
+          <a:prstGeom prst="line">
+            <a:avLst/>
+          </a:prstGeom>
+          <a:ln w="31750"/>
+        </p:spPr>
+        <p:style>
+          <a:lnRef idx="3">
+            <a:schemeClr val="accent1"/>
+          </a:lnRef>
+          <a:fillRef idx="0">
+            <a:schemeClr val="accent1"/>
+          </a:fillRef>
+          <a:effectRef idx="2">
+            <a:schemeClr val="accent1"/>
+          </a:effectRef>
+          <a:fontRef idx="minor">
+            <a:schemeClr val="tx1"/>
+          </a:fontRef>
+        </p:style>
+      </p:cxnSp>
     </p:spTree>
     <p:extLst>
       <p:ext uri="{BB962C8B-B14F-4D97-AF65-F5344CB8AC3E}">
-        <p14:creationId xmlns:p14="http://schemas.microsoft.com/office/powerpoint/2010/main" val="562952531"/>
+        <p14:creationId xmlns:p14="http://schemas.microsoft.com/office/powerpoint/2010/main" val="517835823"/>
       </p:ext>
     </p:extLst>
   </p:cSld>
   <p:clrMapOvr>
-    <a:overrideClrMapping bg1="dk1" tx1="lt1" bg2="dk2" tx2="lt2" accent1="accent1" accent2="accent2" accent3="accent3" accent4="accent4" accent5="accent5" accent6="accent6" hlink="hlink" folHlink="folHlink"/>
+    <a:masterClrMapping/>
   </p:clrMapOvr>
 </p:sldLayout>
 </file>
@@ -1254,90 +2788,37 @@
             <p:ph type="title"/>
           </p:nvPr>
         </p:nvSpPr>
-        <p:spPr/>
-        <p:txBody>
-          <a:bodyPr/>
-          <a:lstStyle/>
-          <a:p>
-            <a:r>
-              <a:rPr lang="en-US"/>
-              <a:t>Click to edit Master title style</a:t>
-            </a:r>
-            <a:endParaRPr lang="en-US" dirty="0"/>
-          </a:p>
-        </p:txBody>
-      </p:sp>
-      <p:sp>
-        <p:nvSpPr>
-          <p:cNvPr id="3" name="Content Placeholder 2"/>
-          <p:cNvSpPr>
-            <a:spLocks noGrp="1"/>
-          </p:cNvSpPr>
-          <p:nvPr>
-            <p:ph sz="half" idx="1"/>
-          </p:nvPr>
-        </p:nvSpPr>
         <p:spPr>
           <a:xfrm>
-            <a:off x="1581912" y="2638044"/>
-            <a:ext cx="4271771" cy="3101982"/>
+            <a:off x="1449217" y="804889"/>
+            <a:ext cx="9605635" cy="1059305"/>
           </a:xfrm>
         </p:spPr>
         <p:txBody>
           <a:bodyPr/>
           <a:lstStyle/>
           <a:p>
-            <a:pPr lvl="0"/>
-            <a:r>
-              <a:rPr lang="en-US"/>
-              <a:t>Click to edit Master text styles</a:t>
-            </a:r>
-          </a:p>
-          <a:p>
-            <a:pPr lvl="1"/>
-            <a:r>
-              <a:rPr lang="en-US"/>
-              <a:t>Second level</a:t>
-            </a:r>
-          </a:p>
-          <a:p>
-            <a:pPr lvl="2"/>
-            <a:r>
-              <a:rPr lang="en-US"/>
-              <a:t>Third level</a:t>
-            </a:r>
-          </a:p>
-          <a:p>
-            <a:pPr lvl="3"/>
-            <a:r>
-              <a:rPr lang="en-US"/>
-              <a:t>Fourth level</a:t>
-            </a:r>
-          </a:p>
-          <a:p>
-            <a:pPr lvl="4"/>
-            <a:r>
-              <a:rPr lang="en-US"/>
-              <a:t>Fifth level</a:t>
-            </a:r>
-            <a:endParaRPr lang="en-US" dirty="0"/>
-          </a:p>
-        </p:txBody>
-      </p:sp>
-      <p:sp>
-        <p:nvSpPr>
-          <p:cNvPr id="4" name="Content Placeholder 3"/>
-          <p:cNvSpPr>
-            <a:spLocks noGrp="1"/>
-          </p:cNvSpPr>
-          <p:nvPr>
-            <p:ph sz="half" idx="2"/>
+            <a:r>
+              <a:rPr lang="en-US"/>
+              <a:t>Click to edit Master title style</a:t>
+            </a:r>
+          </a:p>
+        </p:txBody>
+      </p:sp>
+      <p:sp>
+        <p:nvSpPr>
+          <p:cNvPr id="3" name="Content Placeholder 2"/>
+          <p:cNvSpPr>
+            <a:spLocks noGrp="1"/>
+          </p:cNvSpPr>
+          <p:nvPr>
+            <p:ph sz="half" idx="1"/>
           </p:nvPr>
         </p:nvSpPr>
         <p:spPr>
           <a:xfrm>
-            <a:off x="6338315" y="2638044"/>
-            <a:ext cx="4270247" cy="3101982"/>
+            <a:off x="1447331" y="2010878"/>
+            <a:ext cx="4645152" cy="3448595"/>
           </a:xfrm>
         </p:spPr>
         <p:txBody>
@@ -1377,13 +2858,68 @@
               <a:rPr lang="en-US"/>
               <a:t>Fifth level</a:t>
             </a:r>
-            <a:endParaRPr lang="en-US" dirty="0"/>
-          </a:p>
-        </p:txBody>
-      </p:sp>
-      <p:sp>
-        <p:nvSpPr>
-          <p:cNvPr id="8" name="Date Placeholder 7"/>
+          </a:p>
+        </p:txBody>
+      </p:sp>
+      <p:sp>
+        <p:nvSpPr>
+          <p:cNvPr id="4" name="Content Placeholder 3"/>
+          <p:cNvSpPr>
+            <a:spLocks noGrp="1"/>
+          </p:cNvSpPr>
+          <p:nvPr>
+            <p:ph sz="half" idx="2"/>
+          </p:nvPr>
+        </p:nvSpPr>
+        <p:spPr>
+          <a:xfrm>
+            <a:off x="6413771" y="2017343"/>
+            <a:ext cx="4645152" cy="3441520"/>
+          </a:xfrm>
+        </p:spPr>
+        <p:txBody>
+          <a:bodyPr/>
+          <a:lstStyle/>
+          <a:p>
+            <a:pPr lvl="0"/>
+            <a:r>
+              <a:rPr lang="en-US"/>
+              <a:t>Click to edit Master text styles</a:t>
+            </a:r>
+          </a:p>
+          <a:p>
+            <a:pPr lvl="1"/>
+            <a:r>
+              <a:rPr lang="en-US"/>
+              <a:t>Second level</a:t>
+            </a:r>
+          </a:p>
+          <a:p>
+            <a:pPr lvl="2"/>
+            <a:r>
+              <a:rPr lang="en-US"/>
+              <a:t>Third level</a:t>
+            </a:r>
+          </a:p>
+          <a:p>
+            <a:pPr lvl="3"/>
+            <a:r>
+              <a:rPr lang="en-US"/>
+              <a:t>Fourth level</a:t>
+            </a:r>
+          </a:p>
+          <a:p>
+            <a:pPr lvl="4"/>
+            <a:r>
+              <a:rPr lang="en-US"/>
+              <a:t>Fifth level</a:t>
+            </a:r>
+          </a:p>
+        </p:txBody>
+      </p:sp>
+      <p:sp>
+        <p:nvSpPr>
+          <p:cNvPr id="5" name="Date Placeholder 4"/>
           <p:cNvSpPr>
             <a:spLocks noGrp="1"/>
           </p:cNvSpPr>
@@ -1398,7 +2934,7 @@
           <a:p>
             <a:fld id="{6EF5D040-31F8-4918-8619-B8E0C517AD2F}" type="datetimeFigureOut">
               <a:rPr lang="en-US" smtClean="0"/>
-              <a:t>2/12/2026</a:t>
+              <a:t>3/5/2026</a:t>
             </a:fld>
             <a:endParaRPr lang="en-US"/>
           </a:p>
@@ -1406,7 +2942,7 @@
       </p:sp>
       <p:sp>
         <p:nvSpPr>
-          <p:cNvPr id="9" name="Footer Placeholder 8"/>
+          <p:cNvPr id="6" name="Footer Placeholder 5"/>
           <p:cNvSpPr>
             <a:spLocks noGrp="1"/>
           </p:cNvSpPr>
@@ -1425,7 +2961,7 @@
       </p:sp>
       <p:sp>
         <p:nvSpPr>
-          <p:cNvPr id="10" name="Slide Number Placeholder 9"/>
+          <p:cNvPr id="7" name="Slide Number Placeholder 6"/>
           <p:cNvSpPr>
             <a:spLocks noGrp="1"/>
           </p:cNvSpPr>
@@ -1446,10 +2982,41 @@
           </a:p>
         </p:txBody>
       </p:sp>
+      <p:cxnSp>
+        <p:nvCxnSpPr>
+          <p:cNvPr id="35" name="Straight Connector 34"/>
+          <p:cNvCxnSpPr/>
+          <p:nvPr/>
+        </p:nvCxnSpPr>
+        <p:spPr>
+          <a:xfrm>
+            <a:off x="1453896" y="1847088"/>
+            <a:ext cx="9607522" cy="0"/>
+          </a:xfrm>
+          <a:prstGeom prst="line">
+            <a:avLst/>
+          </a:prstGeom>
+          <a:ln w="31750"/>
+        </p:spPr>
+        <p:style>
+          <a:lnRef idx="3">
+            <a:schemeClr val="accent1"/>
+          </a:lnRef>
+          <a:fillRef idx="0">
+            <a:schemeClr val="accent1"/>
+          </a:fillRef>
+          <a:effectRef idx="2">
+            <a:schemeClr val="accent1"/>
+          </a:effectRef>
+          <a:fontRef idx="minor">
+            <a:schemeClr val="tx1"/>
+          </a:fontRef>
+        </p:style>
+      </p:cxnSp>
     </p:spTree>
     <p:extLst>
       <p:ext uri="{BB962C8B-B14F-4D97-AF65-F5344CB8AC3E}">
-        <p14:creationId xmlns:p14="http://schemas.microsoft.com/office/powerpoint/2010/main" val="2184715840"/>
+        <p14:creationId xmlns:p14="http://schemas.microsoft.com/office/powerpoint/2010/main" val="2690704137"/>
       </p:ext>
     </p:extLst>
   </p:cSld>
@@ -1478,38 +3045,66 @@
       </p:grpSpPr>
       <p:sp>
         <p:nvSpPr>
-          <p:cNvPr id="3" name="Text Placeholder 2"/>
-          <p:cNvSpPr>
-            <a:spLocks noGrp="1"/>
-          </p:cNvSpPr>
-          <p:nvPr>
-            <p:ph type="body" idx="1"/>
+          <p:cNvPr id="2" name="Title 1"/>
+          <p:cNvSpPr>
+            <a:spLocks noGrp="1"/>
+          </p:cNvSpPr>
+          <p:nvPr>
+            <p:ph type="title"/>
           </p:nvPr>
         </p:nvSpPr>
         <p:spPr>
           <a:xfrm>
-            <a:off x="1583436" y="2313433"/>
-            <a:ext cx="4270248" cy="704087"/>
+            <a:off x="1447191" y="804163"/>
+            <a:ext cx="9607661" cy="1056319"/>
           </a:xfrm>
         </p:spPr>
         <p:txBody>
-          <a:bodyPr anchor="b" anchorCtr="1">
+          <a:bodyPr/>
+          <a:lstStyle/>
+          <a:p>
+            <a:r>
+              <a:rPr lang="en-US"/>
+              <a:t>Click to edit Master title style</a:t>
+            </a:r>
+          </a:p>
+        </p:txBody>
+      </p:sp>
+      <p:sp>
+        <p:nvSpPr>
+          <p:cNvPr id="3" name="Text Placeholder 2"/>
+          <p:cNvSpPr>
+            <a:spLocks noGrp="1"/>
+          </p:cNvSpPr>
+          <p:nvPr>
+            <p:ph type="body" idx="1"/>
+          </p:nvPr>
+        </p:nvSpPr>
+        <p:spPr>
+          <a:xfrm>
+            <a:off x="1447191" y="2019549"/>
+            <a:ext cx="4645152" cy="801943"/>
+          </a:xfrm>
+        </p:spPr>
+        <p:txBody>
+          <a:bodyPr anchor="b">
             <a:normAutofit/>
           </a:bodyPr>
           <a:lstStyle>
-            <a:lvl1pPr marL="0" indent="0" algn="ctr">
+            <a:lvl1pPr marL="0" indent="0">
+              <a:lnSpc>
+                <a:spcPct val="100000"/>
+              </a:lnSpc>
               <a:buNone/>
-              <a:defRPr sz="1900" b="0" cap="all" spc="100" baseline="0">
+              <a:defRPr sz="2200" b="0" cap="all" baseline="0">
                 <a:solidFill>
-                  <a:schemeClr val="accent2">
-                    <a:lumMod val="75000"/>
-                  </a:schemeClr>
+                  <a:schemeClr val="accent1"/>
                 </a:solidFill>
               </a:defRPr>
             </a:lvl1pPr>
             <a:lvl2pPr marL="457200" indent="0">
               <a:buNone/>
-              <a:defRPr sz="1900" b="1"/>
+              <a:defRPr sz="2000" b="1"/>
             </a:lvl2pPr>
             <a:lvl3pPr marL="914400" indent="0">
               <a:buNone/>
@@ -1561,8 +3156,8 @@
         </p:nvSpPr>
         <p:spPr>
           <a:xfrm>
-            <a:off x="1583436" y="3143250"/>
-            <a:ext cx="4270248" cy="2596776"/>
+            <a:off x="1447191" y="2824269"/>
+            <a:ext cx="4645152" cy="2644457"/>
           </a:xfrm>
         </p:spPr>
         <p:txBody>
@@ -1602,105 +3197,44 @@
               <a:rPr lang="en-US"/>
               <a:t>Fifth level</a:t>
             </a:r>
-            <a:endParaRPr lang="en-US" dirty="0"/>
-          </a:p>
-        </p:txBody>
-      </p:sp>
-      <p:sp>
-        <p:nvSpPr>
-          <p:cNvPr id="6" name="Content Placeholder 5"/>
-          <p:cNvSpPr>
-            <a:spLocks noGrp="1"/>
-          </p:cNvSpPr>
-          <p:nvPr>
-            <p:ph sz="quarter" idx="4"/>
+          </a:p>
+        </p:txBody>
+      </p:sp>
+      <p:sp>
+        <p:nvSpPr>
+          <p:cNvPr id="5" name="Text Placeholder 4"/>
+          <p:cNvSpPr>
+            <a:spLocks noGrp="1"/>
+          </p:cNvSpPr>
+          <p:nvPr>
+            <p:ph type="body" sz="quarter" idx="3"/>
           </p:nvPr>
         </p:nvSpPr>
         <p:spPr>
           <a:xfrm>
-            <a:off x="6338316" y="3143250"/>
-            <a:ext cx="4253484" cy="2596776"/>
+            <a:off x="6412362" y="2023003"/>
+            <a:ext cx="4645152" cy="802237"/>
           </a:xfrm>
         </p:spPr>
         <p:txBody>
-          <a:bodyPr/>
-          <a:lstStyle>
-            <a:lvl5pPr>
-              <a:defRPr/>
-            </a:lvl5pPr>
-          </a:lstStyle>
-          <a:p>
-            <a:pPr lvl="0"/>
-            <a:r>
-              <a:rPr lang="en-US"/>
-              <a:t>Click to edit Master text styles</a:t>
-            </a:r>
-          </a:p>
-          <a:p>
-            <a:pPr lvl="1"/>
-            <a:r>
-              <a:rPr lang="en-US"/>
-              <a:t>Second level</a:t>
-            </a:r>
-          </a:p>
-          <a:p>
-            <a:pPr lvl="2"/>
-            <a:r>
-              <a:rPr lang="en-US"/>
-              <a:t>Third level</a:t>
-            </a:r>
-          </a:p>
-          <a:p>
-            <a:pPr lvl="3"/>
-            <a:r>
-              <a:rPr lang="en-US"/>
-              <a:t>Fourth level</a:t>
-            </a:r>
-          </a:p>
-          <a:p>
-            <a:pPr lvl="4"/>
-            <a:r>
-              <a:rPr lang="en-US"/>
-              <a:t>Fifth level</a:t>
-            </a:r>
-            <a:endParaRPr lang="en-US" dirty="0"/>
-          </a:p>
-        </p:txBody>
-      </p:sp>
-      <p:sp>
-        <p:nvSpPr>
-          <p:cNvPr id="11" name="Text Placeholder 4"/>
-          <p:cNvSpPr>
-            <a:spLocks noGrp="1"/>
-          </p:cNvSpPr>
-          <p:nvPr>
-            <p:ph type="body" sz="quarter" idx="13"/>
-          </p:nvPr>
-        </p:nvSpPr>
-        <p:spPr>
-          <a:xfrm>
-            <a:off x="6338316" y="2313433"/>
-            <a:ext cx="4270248" cy="704087"/>
-          </a:xfrm>
-        </p:spPr>
-        <p:txBody>
-          <a:bodyPr anchor="b" anchorCtr="1">
+          <a:bodyPr anchor="b">
             <a:normAutofit/>
           </a:bodyPr>
           <a:lstStyle>
-            <a:lvl1pPr marL="0" indent="0" algn="ctr">
+            <a:lvl1pPr marL="0" indent="0">
+              <a:lnSpc>
+                <a:spcPct val="100000"/>
+              </a:lnSpc>
               <a:buNone/>
-              <a:defRPr sz="1900" b="0" cap="all" spc="100" baseline="0">
+              <a:defRPr sz="2200" b="0" cap="all" baseline="0">
                 <a:solidFill>
-                  <a:schemeClr val="accent2">
-                    <a:lumMod val="75000"/>
-                  </a:schemeClr>
+                  <a:schemeClr val="accent1"/>
                 </a:solidFill>
               </a:defRPr>
             </a:lvl1pPr>
             <a:lvl2pPr marL="457200" indent="0">
               <a:buNone/>
-              <a:defRPr sz="1900" b="1"/>
+              <a:defRPr sz="2000" b="1"/>
             </a:lvl2pPr>
             <a:lvl3pPr marL="914400" indent="0">
               <a:buNone/>
@@ -1742,6 +3276,62 @@
       </p:sp>
       <p:sp>
         <p:nvSpPr>
+          <p:cNvPr id="6" name="Content Placeholder 5"/>
+          <p:cNvSpPr>
+            <a:spLocks noGrp="1"/>
+          </p:cNvSpPr>
+          <p:nvPr>
+            <p:ph sz="quarter" idx="4"/>
+          </p:nvPr>
+        </p:nvSpPr>
+        <p:spPr>
+          <a:xfrm>
+            <a:off x="6412362" y="2821491"/>
+            <a:ext cx="4645152" cy="2637371"/>
+          </a:xfrm>
+        </p:spPr>
+        <p:txBody>
+          <a:bodyPr/>
+          <a:lstStyle/>
+          <a:p>
+            <a:pPr lvl="0"/>
+            <a:r>
+              <a:rPr lang="en-US"/>
+              <a:t>Click to edit Master text styles</a:t>
+            </a:r>
+          </a:p>
+          <a:p>
+            <a:pPr lvl="1"/>
+            <a:r>
+              <a:rPr lang="en-US"/>
+              <a:t>Second level</a:t>
+            </a:r>
+          </a:p>
+          <a:p>
+            <a:pPr lvl="2"/>
+            <a:r>
+              <a:rPr lang="en-US"/>
+              <a:t>Third level</a:t>
+            </a:r>
+          </a:p>
+          <a:p>
+            <a:pPr lvl="3"/>
+            <a:r>
+              <a:rPr lang="en-US"/>
+              <a:t>Fourth level</a:t>
+            </a:r>
+          </a:p>
+          <a:p>
+            <a:pPr lvl="4"/>
+            <a:r>
+              <a:rPr lang="en-US"/>
+              <a:t>Fifth level</a:t>
+            </a:r>
+          </a:p>
+        </p:txBody>
+      </p:sp>
+      <p:sp>
+        <p:nvSpPr>
           <p:cNvPr id="7" name="Date Placeholder 6"/>
           <p:cNvSpPr>
             <a:spLocks noGrp="1"/>
@@ -1757,7 +3347,7 @@
           <a:p>
             <a:fld id="{6EF5D040-31F8-4918-8619-B8E0C517AD2F}" type="datetimeFigureOut">
               <a:rPr lang="en-US" smtClean="0"/>
-              <a:t>2/12/2026</a:t>
+              <a:t>3/5/2026</a:t>
             </a:fld>
             <a:endParaRPr lang="en-US"/>
           </a:p>
@@ -1805,33 +3395,41 @@
           </a:p>
         </p:txBody>
       </p:sp>
-      <p:sp>
-        <p:nvSpPr>
-          <p:cNvPr id="10" name="Title 9"/>
-          <p:cNvSpPr>
-            <a:spLocks noGrp="1"/>
-          </p:cNvSpPr>
-          <p:nvPr>
-            <p:ph type="title"/>
-          </p:nvPr>
-        </p:nvSpPr>
-        <p:spPr/>
-        <p:txBody>
-          <a:bodyPr/>
-          <a:lstStyle/>
-          <a:p>
-            <a:r>
-              <a:rPr lang="en-US"/>
-              <a:t>Click to edit Master title style</a:t>
-            </a:r>
-            <a:endParaRPr lang="en-US" dirty="0"/>
-          </a:p>
-        </p:txBody>
-      </p:sp>
+      <p:cxnSp>
+        <p:nvCxnSpPr>
+          <p:cNvPr id="29" name="Straight Connector 28"/>
+          <p:cNvCxnSpPr/>
+          <p:nvPr/>
+        </p:nvCxnSpPr>
+        <p:spPr>
+          <a:xfrm>
+            <a:off x="1453896" y="1847088"/>
+            <a:ext cx="9607522" cy="0"/>
+          </a:xfrm>
+          <a:prstGeom prst="line">
+            <a:avLst/>
+          </a:prstGeom>
+          <a:ln w="31750"/>
+        </p:spPr>
+        <p:style>
+          <a:lnRef idx="3">
+            <a:schemeClr val="accent1"/>
+          </a:lnRef>
+          <a:fillRef idx="0">
+            <a:schemeClr val="accent1"/>
+          </a:fillRef>
+          <a:effectRef idx="2">
+            <a:schemeClr val="accent1"/>
+          </a:effectRef>
+          <a:fontRef idx="minor">
+            <a:schemeClr val="tx1"/>
+          </a:fontRef>
+        </p:style>
+      </p:cxnSp>
     </p:spTree>
     <p:extLst>
       <p:ext uri="{BB962C8B-B14F-4D97-AF65-F5344CB8AC3E}">
-        <p14:creationId xmlns:p14="http://schemas.microsoft.com/office/powerpoint/2010/main" val="2574599532"/>
+        <p14:creationId xmlns:p14="http://schemas.microsoft.com/office/powerpoint/2010/main" val="1804260411"/>
       </p:ext>
     </p:extLst>
   </p:cSld>
@@ -1877,7 +3475,6 @@
               <a:rPr lang="en-US"/>
               <a:t>Click to edit Master title style</a:t>
             </a:r>
-            <a:endParaRPr lang="en-US" dirty="0"/>
           </a:p>
         </p:txBody>
       </p:sp>
@@ -1898,7 +3495,7 @@
           <a:p>
             <a:fld id="{6EF5D040-31F8-4918-8619-B8E0C517AD2F}" type="datetimeFigureOut">
               <a:rPr lang="en-US" smtClean="0"/>
-              <a:t>2/12/2026</a:t>
+              <a:t>3/5/2026</a:t>
             </a:fld>
             <a:endParaRPr lang="en-US"/>
           </a:p>
@@ -1946,10 +3543,41 @@
           </a:p>
         </p:txBody>
       </p:sp>
+      <p:cxnSp>
+        <p:nvCxnSpPr>
+          <p:cNvPr id="25" name="Straight Connector 24"/>
+          <p:cNvCxnSpPr/>
+          <p:nvPr/>
+        </p:nvCxnSpPr>
+        <p:spPr>
+          <a:xfrm>
+            <a:off x="1453896" y="1847088"/>
+            <a:ext cx="9607522" cy="0"/>
+          </a:xfrm>
+          <a:prstGeom prst="line">
+            <a:avLst/>
+          </a:prstGeom>
+          <a:ln w="31750"/>
+        </p:spPr>
+        <p:style>
+          <a:lnRef idx="3">
+            <a:schemeClr val="accent1"/>
+          </a:lnRef>
+          <a:fillRef idx="0">
+            <a:schemeClr val="accent1"/>
+          </a:fillRef>
+          <a:effectRef idx="2">
+            <a:schemeClr val="accent1"/>
+          </a:effectRef>
+          <a:fontRef idx="minor">
+            <a:schemeClr val="tx1"/>
+          </a:fontRef>
+        </p:style>
+      </p:cxnSp>
     </p:spTree>
     <p:extLst>
       <p:ext uri="{BB962C8B-B14F-4D97-AF65-F5344CB8AC3E}">
-        <p14:creationId xmlns:p14="http://schemas.microsoft.com/office/powerpoint/2010/main" val="3887048737"/>
+        <p14:creationId xmlns:p14="http://schemas.microsoft.com/office/powerpoint/2010/main" val="2264490794"/>
       </p:ext>
     </p:extLst>
   </p:cSld>
@@ -1993,7 +3621,7 @@
           <a:p>
             <a:fld id="{6EF5D040-31F8-4918-8619-B8E0C517AD2F}" type="datetimeFigureOut">
               <a:rPr lang="en-US" smtClean="0"/>
-              <a:t>2/12/2026</a:t>
+              <a:t>3/5/2026</a:t>
             </a:fld>
             <a:endParaRPr lang="en-US"/>
           </a:p>
@@ -2044,7 +3672,7 @@
     </p:spTree>
     <p:extLst>
       <p:ext uri="{BB962C8B-B14F-4D97-AF65-F5344CB8AC3E}">
-        <p14:creationId xmlns:p14="http://schemas.microsoft.com/office/powerpoint/2010/main" val="827000699"/>
+        <p14:creationId xmlns:p14="http://schemas.microsoft.com/office/powerpoint/2010/main" val="267904905"/>
       </p:ext>
     </p:extLst>
   </p:cSld>
@@ -2073,77 +3701,27 @@
       </p:grpSpPr>
       <p:sp>
         <p:nvSpPr>
-          <p:cNvPr id="26" name="Rectangle 25"/>
-          <p:cNvSpPr/>
-          <p:nvPr/>
+          <p:cNvPr id="2" name="Title 1"/>
+          <p:cNvSpPr>
+            <a:spLocks noGrp="1"/>
+          </p:cNvSpPr>
+          <p:nvPr>
+            <p:ph type="title"/>
+          </p:nvPr>
         </p:nvSpPr>
         <p:spPr>
           <a:xfrm>
-            <a:off x="0" y="0"/>
-            <a:ext cx="6096000" cy="6858000"/>
+            <a:off x="1444671" y="798973"/>
+            <a:ext cx="3273099" cy="2247117"/>
           </a:xfrm>
-          <a:prstGeom prst="rect">
-            <a:avLst/>
-          </a:prstGeom>
-          <a:solidFill>
-            <a:schemeClr val="accent2"/>
-          </a:solidFill>
-          <a:ln>
-            <a:noFill/>
-          </a:ln>
         </p:spPr>
-        <p:style>
-          <a:lnRef idx="2">
-            <a:schemeClr val="accent1">
-              <a:shade val="50000"/>
-            </a:schemeClr>
-          </a:lnRef>
-          <a:fillRef idx="1">
-            <a:schemeClr val="accent1"/>
-          </a:fillRef>
-          <a:effectRef idx="0">
-            <a:schemeClr val="accent1"/>
-          </a:effectRef>
-          <a:fontRef idx="minor">
-            <a:schemeClr val="lt1"/>
-          </a:fontRef>
-        </p:style>
-      </p:sp>
-      <p:sp>
-        <p:nvSpPr>
-          <p:cNvPr id="2" name="Title 1"/>
-          <p:cNvSpPr>
-            <a:spLocks noGrp="1"/>
-          </p:cNvSpPr>
-          <p:nvPr>
-            <p:ph type="title"/>
-          </p:nvPr>
-        </p:nvSpPr>
-        <p:spPr bwMode="blackWhite">
-          <a:xfrm>
-            <a:off x="804672" y="2243828"/>
-            <a:ext cx="4486656" cy="1141497"/>
-          </a:xfrm>
-          <a:solidFill>
-            <a:srgbClr val="FFFFFF"/>
-          </a:solidFill>
-          <a:ln>
-            <a:solidFill>
-              <a:srgbClr val="404040"/>
-            </a:solidFill>
-          </a:ln>
-        </p:spPr>
-        <p:txBody>
-          <a:bodyPr anchor="ctr" anchorCtr="1">
+        <p:txBody>
+          <a:bodyPr anchor="b">
             <a:normAutofit/>
           </a:bodyPr>
           <a:lstStyle>
-            <a:lvl1pPr>
-              <a:defRPr sz="2200">
-                <a:solidFill>
-                  <a:srgbClr val="262626"/>
-                </a:solidFill>
-              </a:defRPr>
+            <a:lvl1pPr algn="l">
+              <a:defRPr sz="2400"/>
             </a:lvl1pPr>
           </a:lstStyle>
           <a:p>
@@ -2151,7 +3729,6 @@
               <a:rPr lang="en-US"/>
               <a:t>Click to edit Master title style</a:t>
             </a:r>
-            <a:endParaRPr lang="en-US" dirty="0"/>
           </a:p>
         </p:txBody>
       </p:sp>
@@ -2167,63 +3744,13 @@
         </p:nvSpPr>
         <p:spPr>
           <a:xfrm>
-            <a:off x="6736080" y="804672"/>
-            <a:ext cx="4815840" cy="5248656"/>
+            <a:off x="5043714" y="798974"/>
+            <a:ext cx="6012470" cy="4658826"/>
           </a:xfrm>
         </p:spPr>
         <p:txBody>
-          <a:bodyPr>
-            <a:normAutofit/>
-          </a:bodyPr>
-          <a:lstStyle>
-            <a:lvl1pPr>
-              <a:defRPr sz="1900">
-                <a:solidFill>
-                  <a:schemeClr val="tx1"/>
-                </a:solidFill>
-              </a:defRPr>
-            </a:lvl1pPr>
-            <a:lvl2pPr>
-              <a:defRPr sz="1600">
-                <a:solidFill>
-                  <a:schemeClr val="tx1"/>
-                </a:solidFill>
-              </a:defRPr>
-            </a:lvl2pPr>
-            <a:lvl3pPr>
-              <a:defRPr sz="1600">
-                <a:solidFill>
-                  <a:schemeClr val="tx1"/>
-                </a:solidFill>
-              </a:defRPr>
-            </a:lvl3pPr>
-            <a:lvl4pPr>
-              <a:defRPr sz="1600">
-                <a:solidFill>
-                  <a:schemeClr val="tx1"/>
-                </a:solidFill>
-              </a:defRPr>
-            </a:lvl4pPr>
-            <a:lvl5pPr>
-              <a:defRPr sz="1600">
-                <a:solidFill>
-                  <a:schemeClr val="tx1"/>
-                </a:solidFill>
-              </a:defRPr>
-            </a:lvl5pPr>
-            <a:lvl6pPr>
-              <a:defRPr sz="1600"/>
-            </a:lvl6pPr>
-            <a:lvl7pPr>
-              <a:defRPr sz="1600"/>
-            </a:lvl7pPr>
-            <a:lvl8pPr>
-              <a:defRPr sz="1600"/>
-            </a:lvl8pPr>
-            <a:lvl9pPr>
-              <a:defRPr sz="1600"/>
-            </a:lvl9pPr>
-          </a:lstStyle>
+          <a:bodyPr anchor="ctr"/>
+          <a:lstStyle/>
           <a:p>
             <a:pPr lvl="0"/>
             <a:r>
@@ -2258,7 +3785,6 @@
               <a:rPr lang="en-US"/>
               <a:t>Fifth level</a:t>
             </a:r>
-            <a:endParaRPr lang="en-US" dirty="0"/>
           </a:p>
         </p:txBody>
       </p:sp>
@@ -2274,22 +3800,16 @@
         </p:nvSpPr>
         <p:spPr>
           <a:xfrm>
-            <a:off x="1115568" y="3549918"/>
-            <a:ext cx="3794760" cy="2194036"/>
+            <a:off x="1444671" y="3205491"/>
+            <a:ext cx="3275013" cy="2248181"/>
           </a:xfrm>
         </p:spPr>
         <p:txBody>
-          <a:bodyPr anchor="t" anchorCtr="1">
-            <a:normAutofit/>
-          </a:bodyPr>
+          <a:bodyPr/>
           <a:lstStyle>
-            <a:lvl1pPr marL="0" indent="0" algn="ctr">
+            <a:lvl1pPr marL="0" indent="0" algn="l">
               <a:buNone/>
-              <a:defRPr sz="1500">
-                <a:solidFill>
-                  <a:srgbClr val="FFFFFF"/>
-                </a:solidFill>
-              </a:defRPr>
+              <a:defRPr sz="1600"/>
             </a:lvl1pPr>
             <a:lvl2pPr marL="457200" indent="0">
               <a:buNone/>
@@ -2335,7 +3855,7 @@
       </p:sp>
       <p:sp>
         <p:nvSpPr>
-          <p:cNvPr id="9" name="Date Placeholder 8"/>
+          <p:cNvPr id="5" name="Date Placeholder 4"/>
           <p:cNvSpPr>
             <a:spLocks noGrp="1"/>
           </p:cNvSpPr>
@@ -2350,7 +3870,7 @@
           <a:p>
             <a:fld id="{6EF5D040-31F8-4918-8619-B8E0C517AD2F}" type="datetimeFigureOut">
               <a:rPr lang="en-US" smtClean="0"/>
-              <a:t>2/12/2026</a:t>
+              <a:t>3/5/2026</a:t>
             </a:fld>
             <a:endParaRPr lang="en-US"/>
           </a:p>
@@ -2358,7 +3878,7 @@
       </p:sp>
       <p:sp>
         <p:nvSpPr>
-          <p:cNvPr id="10" name="Footer Placeholder 9"/>
+          <p:cNvPr id="6" name="Footer Placeholder 5"/>
           <p:cNvSpPr>
             <a:spLocks noGrp="1"/>
           </p:cNvSpPr>
@@ -2366,25 +3886,10 @@
             <p:ph type="ftr" sz="quarter" idx="11"/>
           </p:nvPr>
         </p:nvSpPr>
-        <p:spPr>
-          <a:xfrm>
-            <a:off x="804672" y="6236208"/>
-            <a:ext cx="5124797" cy="320040"/>
-          </a:xfrm>
-        </p:spPr>
+        <p:spPr/>
         <p:txBody>
           <a:bodyPr/>
-          <a:lstStyle>
-            <a:lvl1pPr>
-              <a:defRPr>
-                <a:solidFill>
-                  <a:srgbClr val="FFFFFF">
-                    <a:alpha val="70000"/>
-                  </a:srgbClr>
-                </a:solidFill>
-              </a:defRPr>
-            </a:lvl1pPr>
-          </a:lstStyle>
+          <a:lstStyle/>
           <a:p>
             <a:endParaRPr lang="en-US"/>
           </a:p>
@@ -2392,7 +3897,7 @@
       </p:sp>
       <p:sp>
         <p:nvSpPr>
-          <p:cNvPr id="11" name="Slide Number Placeholder 10"/>
+          <p:cNvPr id="7" name="Slide Number Placeholder 6"/>
           <p:cNvSpPr>
             <a:spLocks noGrp="1"/>
           </p:cNvSpPr>
@@ -2413,10 +3918,41 @@
           </a:p>
         </p:txBody>
       </p:sp>
+      <p:cxnSp>
+        <p:nvCxnSpPr>
+          <p:cNvPr id="17" name="Straight Connector 16"/>
+          <p:cNvCxnSpPr/>
+          <p:nvPr/>
+        </p:nvCxnSpPr>
+        <p:spPr>
+          <a:xfrm>
+            <a:off x="1448280" y="3205491"/>
+            <a:ext cx="3269490" cy="0"/>
+          </a:xfrm>
+          <a:prstGeom prst="line">
+            <a:avLst/>
+          </a:prstGeom>
+          <a:ln w="31750"/>
+        </p:spPr>
+        <p:style>
+          <a:lnRef idx="3">
+            <a:schemeClr val="accent1"/>
+          </a:lnRef>
+          <a:fillRef idx="0">
+            <a:schemeClr val="accent1"/>
+          </a:fillRef>
+          <a:effectRef idx="2">
+            <a:schemeClr val="accent1"/>
+          </a:effectRef>
+          <a:fontRef idx="minor">
+            <a:schemeClr val="tx1"/>
+          </a:fontRef>
+        </p:style>
+      </p:cxnSp>
     </p:spTree>
     <p:extLst>
       <p:ext uri="{BB962C8B-B14F-4D97-AF65-F5344CB8AC3E}">
-        <p14:creationId xmlns:p14="http://schemas.microsoft.com/office/powerpoint/2010/main" val="2700243232"/>
+        <p14:creationId xmlns:p14="http://schemas.microsoft.com/office/powerpoint/2010/main" val="3769099571"/>
       </p:ext>
     </p:extLst>
   </p:cSld>
@@ -2443,79 +3979,163 @@
           <a:chExt cx="0" cy="0"/>
         </a:xfrm>
       </p:grpSpPr>
-      <p:sp>
-        <p:nvSpPr>
-          <p:cNvPr id="18" name="Rectangle 17"/>
-          <p:cNvSpPr/>
+      <p:grpSp>
+        <p:nvGrpSpPr>
+          <p:cNvPr id="8" name="Group 7"/>
+          <p:cNvGrpSpPr/>
           <p:nvPr/>
+        </p:nvGrpSpPr>
+        <p:grpSpPr>
+          <a:xfrm>
+            <a:off x="7477387" y="482170"/>
+            <a:ext cx="4074533" cy="5149101"/>
+            <a:chOff x="7477387" y="482170"/>
+            <a:chExt cx="4074533" cy="5149101"/>
+          </a:xfrm>
+        </p:grpSpPr>
+        <p:sp>
+          <p:nvSpPr>
+            <p:cNvPr id="18" name="Rectangle 17"/>
+            <p:cNvSpPr/>
+            <p:nvPr/>
+          </p:nvSpPr>
+          <p:spPr bwMode="black">
+            <a:xfrm>
+              <a:off x="7477387" y="482170"/>
+              <a:ext cx="4074533" cy="5149101"/>
+            </a:xfrm>
+            <a:prstGeom prst="rect">
+              <a:avLst/>
+            </a:prstGeom>
+            <a:gradFill>
+              <a:gsLst>
+                <a:gs pos="0">
+                  <a:srgbClr val="000001"/>
+                </a:gs>
+                <a:gs pos="100000">
+                  <a:srgbClr val="191919"/>
+                </a:gs>
+              </a:gsLst>
+            </a:gradFill>
+            <a:ln w="76200" cmpd="sng">
+              <a:noFill/>
+              <a:miter lim="800000"/>
+            </a:ln>
+            <a:effectLst>
+              <a:outerShdw blurRad="127000" dist="228600" dir="4740000" sx="98000" sy="98000" algn="tl" rotWithShape="0">
+                <a:srgbClr val="000000">
+                  <a:alpha val="34000"/>
+                </a:srgbClr>
+              </a:outerShdw>
+            </a:effectLst>
+            <a:scene3d>
+              <a:camera prst="orthographicFront"/>
+              <a:lightRig rig="threePt" dir="t"/>
+            </a:scene3d>
+            <a:sp3d>
+              <a:bevelT w="152400" h="50800" prst="softRound"/>
+            </a:sp3d>
+          </p:spPr>
+          <p:style>
+            <a:lnRef idx="1">
+              <a:schemeClr val="accent1"/>
+            </a:lnRef>
+            <a:fillRef idx="3">
+              <a:schemeClr val="accent1"/>
+            </a:fillRef>
+            <a:effectRef idx="2">
+              <a:schemeClr val="accent1"/>
+            </a:effectRef>
+            <a:fontRef idx="minor">
+              <a:schemeClr val="lt1"/>
+            </a:fontRef>
+          </p:style>
+        </p:sp>
+        <p:sp>
+          <p:nvSpPr>
+            <p:cNvPr id="19" name="Rectangle 18"/>
+            <p:cNvSpPr/>
+            <p:nvPr/>
+          </p:nvSpPr>
+          <p:spPr bwMode="blackWhite">
+            <a:xfrm>
+              <a:off x="7790446" y="812506"/>
+              <a:ext cx="3450289" cy="4466452"/>
+            </a:xfrm>
+            <a:prstGeom prst="rect">
+              <a:avLst/>
+            </a:prstGeom>
+            <a:gradFill>
+              <a:gsLst>
+                <a:gs pos="0">
+                  <a:srgbClr val="DADADA"/>
+                </a:gs>
+                <a:gs pos="100000">
+                  <a:srgbClr val="FFFFFE"/>
+                </a:gs>
+              </a:gsLst>
+              <a:lin ang="16200000" scaled="0"/>
+            </a:gradFill>
+            <a:ln w="50800" cmpd="sng">
+              <a:solidFill>
+                <a:srgbClr val="191919"/>
+              </a:solidFill>
+              <a:miter lim="800000"/>
+            </a:ln>
+            <a:effectLst>
+              <a:innerShdw blurRad="63500" dist="88900" dir="14100000">
+                <a:srgbClr val="000000">
+                  <a:alpha val="30000"/>
+                </a:srgbClr>
+              </a:innerShdw>
+            </a:effectLst>
+            <a:scene3d>
+              <a:camera prst="orthographicFront"/>
+              <a:lightRig rig="threePt" dir="t"/>
+            </a:scene3d>
+            <a:sp3d>
+              <a:bevelT prst="relaxedInset"/>
+            </a:sp3d>
+          </p:spPr>
+          <p:style>
+            <a:lnRef idx="1">
+              <a:schemeClr val="accent1"/>
+            </a:lnRef>
+            <a:fillRef idx="3">
+              <a:schemeClr val="accent1"/>
+            </a:fillRef>
+            <a:effectRef idx="2">
+              <a:schemeClr val="accent1"/>
+            </a:effectRef>
+            <a:fontRef idx="minor">
+              <a:schemeClr val="lt1"/>
+            </a:fontRef>
+          </p:style>
+        </p:sp>
+      </p:grpSp>
+      <p:sp>
+        <p:nvSpPr>
+          <p:cNvPr id="2" name="Title 1"/>
+          <p:cNvSpPr>
+            <a:spLocks noGrp="1"/>
+          </p:cNvSpPr>
+          <p:nvPr>
+            <p:ph type="title"/>
+          </p:nvPr>
         </p:nvSpPr>
         <p:spPr>
           <a:xfrm>
-            <a:off x="0" y="0"/>
-            <a:ext cx="6095999" cy="6858000"/>
+            <a:off x="1451206" y="1129513"/>
+            <a:ext cx="5532328" cy="1830584"/>
           </a:xfrm>
-          <a:prstGeom prst="rect">
-            <a:avLst/>
-          </a:prstGeom>
-          <a:solidFill>
-            <a:schemeClr val="accent2"/>
-          </a:solidFill>
-          <a:ln>
-            <a:noFill/>
-          </a:ln>
         </p:spPr>
-        <p:style>
-          <a:lnRef idx="2">
-            <a:schemeClr val="accent1">
-              <a:shade val="50000"/>
-            </a:schemeClr>
-          </a:lnRef>
-          <a:fillRef idx="1">
-            <a:schemeClr val="accent1"/>
-          </a:fillRef>
-          <a:effectRef idx="0">
-            <a:schemeClr val="accent1"/>
-          </a:effectRef>
-          <a:fontRef idx="minor">
-            <a:schemeClr val="lt1"/>
-          </a:fontRef>
-        </p:style>
-      </p:sp>
-      <p:sp>
-        <p:nvSpPr>
-          <p:cNvPr id="2" name="Title 1"/>
-          <p:cNvSpPr>
-            <a:spLocks noGrp="1"/>
-          </p:cNvSpPr>
-          <p:nvPr>
-            <p:ph type="title"/>
-          </p:nvPr>
-        </p:nvSpPr>
-        <p:spPr bwMode="blackWhite">
-          <a:xfrm>
-            <a:off x="808523" y="2243828"/>
-            <a:ext cx="4494998" cy="1134640"/>
-          </a:xfrm>
-          <a:solidFill>
-            <a:srgbClr val="FFFFFF"/>
-          </a:solidFill>
-          <a:ln>
-            <a:solidFill>
-              <a:srgbClr val="404040"/>
-            </a:solidFill>
-          </a:ln>
-        </p:spPr>
-        <p:txBody>
-          <a:bodyPr anchor="ctr" anchorCtr="1">
-            <a:noAutofit/>
+        <p:txBody>
+          <a:bodyPr anchor="b">
+            <a:normAutofit/>
           </a:bodyPr>
           <a:lstStyle>
             <a:lvl1pPr>
-              <a:defRPr sz="2200">
-                <a:solidFill>
-                  <a:srgbClr val="262626"/>
-                </a:solidFill>
-              </a:defRPr>
+              <a:defRPr sz="3200"/>
             </a:lvl1pPr>
           </a:lstStyle>
           <a:p>
@@ -2523,7 +4143,6 @@
               <a:rPr lang="en-US"/>
               <a:t>Click to edit Master title style</a:t>
             </a:r>
-            <a:endParaRPr lang="en-US" dirty="0"/>
           </a:p>
         </p:txBody>
       </p:sp>
@@ -2539,28 +4158,26 @@
         </p:nvSpPr>
         <p:spPr>
           <a:xfrm>
-            <a:off x="6095999" y="0"/>
-            <a:ext cx="6102097" cy="6858000"/>
+            <a:off x="8124389" y="1122542"/>
+            <a:ext cx="2791171" cy="3866327"/>
           </a:xfrm>
           <a:solidFill>
             <a:schemeClr val="bg1">
-              <a:lumMod val="75000"/>
+              <a:lumMod val="85000"/>
             </a:schemeClr>
           </a:solidFill>
+          <a:ln w="9525" cap="sq">
+            <a:noFill/>
+            <a:miter lim="800000"/>
+          </a:ln>
+          <a:effectLst/>
         </p:spPr>
         <p:txBody>
           <a:bodyPr anchor="t"/>
           <a:lstStyle>
-            <a:lvl1pPr marL="0" indent="0">
+            <a:lvl1pPr marL="0" indent="0" algn="ctr">
               <a:buNone/>
-              <a:defRPr sz="3200">
-                <a:solidFill>
-                  <a:schemeClr val="bg1">
-                    <a:lumMod val="85000"/>
-                    <a:lumOff val="15000"/>
-                  </a:schemeClr>
-                </a:solidFill>
-              </a:defRPr>
+              <a:defRPr sz="3200"/>
             </a:lvl1pPr>
             <a:lvl2pPr marL="457200" indent="0">
               <a:buNone/>
@@ -2600,7 +4217,6 @@
               <a:rPr lang="en-US"/>
               <a:t>Click icon to add picture</a:t>
             </a:r>
-            <a:endParaRPr lang="en-US" dirty="0"/>
           </a:p>
         </p:txBody>
       </p:sp>
@@ -2616,22 +4232,18 @@
         </p:nvSpPr>
         <p:spPr>
           <a:xfrm>
-            <a:off x="1115568" y="3549918"/>
-            <a:ext cx="3794760" cy="2194037"/>
+            <a:off x="1450329" y="3145992"/>
+            <a:ext cx="5524404" cy="2003742"/>
           </a:xfrm>
         </p:spPr>
         <p:txBody>
-          <a:bodyPr anchor="t" anchorCtr="1">
+          <a:bodyPr>
             <a:normAutofit/>
           </a:bodyPr>
           <a:lstStyle>
-            <a:lvl1pPr marL="0" indent="0" algn="ctr">
+            <a:lvl1pPr marL="0" indent="0" algn="l">
               <a:buNone/>
-              <a:defRPr sz="1500">
-                <a:solidFill>
-                  <a:srgbClr val="FFFFFF"/>
-                </a:solidFill>
-              </a:defRPr>
+              <a:defRPr sz="1800"/>
             </a:lvl1pPr>
             <a:lvl2pPr marL="457200" indent="0">
               <a:buNone/>
@@ -2677,7 +4289,7 @@
       </p:sp>
       <p:sp>
         <p:nvSpPr>
-          <p:cNvPr id="8" name="Date Placeholder 7"/>
+          <p:cNvPr id="5" name="Date Placeholder 4"/>
           <p:cNvSpPr>
             <a:spLocks noGrp="1"/>
           </p:cNvSpPr>
@@ -2685,29 +4297,23 @@
             <p:ph type="dt" sz="half" idx="10"/>
           </p:nvPr>
         </p:nvSpPr>
-        <p:spPr/>
+        <p:spPr>
+          <a:xfrm>
+            <a:off x="1447382" y="5469856"/>
+            <a:ext cx="5527351" cy="320123"/>
+          </a:xfrm>
+        </p:spPr>
         <p:txBody>
           <a:bodyPr/>
           <a:lstStyle>
-            <a:lvl1pPr>
-              <a:defRPr>
-                <a:solidFill>
-                  <a:srgbClr val="FFFFFF"/>
-                </a:solidFill>
-                <a:effectLst>
-                  <a:outerShdw blurRad="50800" dist="38100" dir="2700000" algn="tl" rotWithShape="0">
-                    <a:prstClr val="black">
-                      <a:alpha val="43000"/>
-                    </a:prstClr>
-                  </a:outerShdw>
-                </a:effectLst>
-              </a:defRPr>
+            <a:lvl1pPr algn="l">
+              <a:defRPr/>
             </a:lvl1pPr>
           </a:lstStyle>
           <a:p>
             <a:fld id="{6EF5D040-31F8-4918-8619-B8E0C517AD2F}" type="datetimeFigureOut">
               <a:rPr lang="en-US" smtClean="0"/>
-              <a:t>2/12/2026</a:t>
+              <a:t>3/5/2026</a:t>
             </a:fld>
             <a:endParaRPr lang="en-US"/>
           </a:p>
@@ -2715,7 +4321,7 @@
       </p:sp>
       <p:sp>
         <p:nvSpPr>
-          <p:cNvPr id="9" name="Footer Placeholder 8"/>
+          <p:cNvPr id="6" name="Footer Placeholder 5"/>
           <p:cNvSpPr>
             <a:spLocks noGrp="1"/>
           </p:cNvSpPr>
@@ -2725,23 +4331,13 @@
         </p:nvSpPr>
         <p:spPr>
           <a:xfrm>
-            <a:off x="804672" y="6236208"/>
-            <a:ext cx="5124797" cy="320040"/>
+            <a:off x="1447382" y="318640"/>
+            <a:ext cx="5541004" cy="320931"/>
           </a:xfrm>
         </p:spPr>
         <p:txBody>
           <a:bodyPr/>
-          <a:lstStyle>
-            <a:lvl1pPr>
-              <a:defRPr>
-                <a:solidFill>
-                  <a:srgbClr val="FFFFFF">
-                    <a:alpha val="70000"/>
-                  </a:srgbClr>
-                </a:solidFill>
-              </a:defRPr>
-            </a:lvl1pPr>
-          </a:lstStyle>
+          <a:lstStyle/>
           <a:p>
             <a:endParaRPr lang="en-US"/>
           </a:p>
@@ -2749,7 +4345,7 @@
       </p:sp>
       <p:sp>
         <p:nvSpPr>
-          <p:cNvPr id="10" name="Slide Number Placeholder 9"/>
+          <p:cNvPr id="7" name="Slide Number Placeholder 6"/>
           <p:cNvSpPr>
             <a:spLocks noGrp="1"/>
           </p:cNvSpPr>
@@ -2770,10 +4366,41 @@
           </a:p>
         </p:txBody>
       </p:sp>
+      <p:cxnSp>
+        <p:nvCxnSpPr>
+          <p:cNvPr id="31" name="Straight Connector 30"/>
+          <p:cNvCxnSpPr/>
+          <p:nvPr/>
+        </p:nvCxnSpPr>
+        <p:spPr>
+          <a:xfrm>
+            <a:off x="1447382" y="3143605"/>
+            <a:ext cx="5527351" cy="0"/>
+          </a:xfrm>
+          <a:prstGeom prst="line">
+            <a:avLst/>
+          </a:prstGeom>
+          <a:ln w="31750"/>
+        </p:spPr>
+        <p:style>
+          <a:lnRef idx="3">
+            <a:schemeClr val="accent1"/>
+          </a:lnRef>
+          <a:fillRef idx="0">
+            <a:schemeClr val="accent1"/>
+          </a:fillRef>
+          <a:effectRef idx="2">
+            <a:schemeClr val="accent1"/>
+          </a:effectRef>
+          <a:fontRef idx="minor">
+            <a:schemeClr val="tx1"/>
+          </a:fontRef>
+        </p:style>
+      </p:cxnSp>
     </p:spTree>
     <p:extLst>
       <p:ext uri="{BB962C8B-B14F-4D97-AF65-F5344CB8AC3E}">
-        <p14:creationId xmlns:p14="http://schemas.microsoft.com/office/powerpoint/2010/main" val="2592657659"/>
+        <p14:creationId xmlns:p14="http://schemas.microsoft.com/office/powerpoint/2010/main" val="2834663261"/>
       </p:ext>
     </p:extLst>
   </p:cSld>
@@ -2787,14 +4414,9 @@
 <p:sldMaster xmlns:a="http://schemas.openxmlformats.org/drawingml/2006/main" xmlns:r="http://schemas.openxmlformats.org/officeDocument/2006/relationships" xmlns:p="http://schemas.openxmlformats.org/presentationml/2006/main">
   <p:cSld>
     <p:bg>
-      <p:bgPr>
-        <a:solidFill>
-          <a:schemeClr val="bg1">
-            <a:lumMod val="95000"/>
-          </a:schemeClr>
-        </a:solidFill>
-        <a:effectLst/>
-      </p:bgPr>
+      <p:bgRef idx="1003">
+        <a:schemeClr val="bg2"/>
+      </p:bgRef>
     </p:bg>
     <p:spTree>
       <p:nvGrpSpPr>
@@ -2812,135 +4434,209 @@
       </p:grpSpPr>
       <p:sp>
         <p:nvSpPr>
-          <p:cNvPr id="2" name="Title Placeholder 1"/>
-          <p:cNvSpPr>
-            <a:spLocks noGrp="1"/>
-          </p:cNvSpPr>
-          <p:nvPr>
-            <p:ph type="title"/>
-          </p:nvPr>
-        </p:nvSpPr>
-        <p:spPr bwMode="black">
+          <p:cNvPr id="8" name="Rectangle 7"/>
+          <p:cNvSpPr/>
+          <p:nvPr/>
+        </p:nvSpPr>
+        <p:spPr>
           <a:xfrm>
-            <a:off x="2231136" y="964692"/>
-            <a:ext cx="7729728" cy="1188720"/>
+            <a:off x="0" y="2019476"/>
+            <a:ext cx="12192000" cy="4105941"/>
           </a:xfrm>
           <a:prstGeom prst="rect">
             <a:avLst/>
           </a:prstGeom>
-          <a:solidFill>
-            <a:srgbClr val="FFFFFF"/>
-          </a:solidFill>
-          <a:ln w="31750" cap="sq">
-            <a:solidFill>
-              <a:srgbClr val="404040"/>
-            </a:solidFill>
-            <a:miter lim="800000"/>
+          <a:gradFill flip="none" rotWithShape="1">
+            <a:gsLst>
+              <a:gs pos="0">
+                <a:schemeClr val="bg2">
+                  <a:alpha val="0"/>
+                </a:schemeClr>
+              </a:gs>
+              <a:gs pos="100000">
+                <a:schemeClr val="bg2"/>
+              </a:gs>
+            </a:gsLst>
+            <a:lin ang="5400000" scaled="0"/>
+            <a:tileRect/>
+          </a:gradFill>
+          <a:ln>
+            <a:noFill/>
           </a:ln>
         </p:spPr>
-        <p:txBody>
-          <a:bodyPr vert="horz" lIns="182880" tIns="182880" rIns="182880" bIns="182880" rtlCol="0" anchor="ctr">
-            <a:normAutofit/>
-          </a:bodyPr>
-          <a:lstStyle/>
-          <a:p>
-            <a:r>
-              <a:rPr lang="en-US"/>
-              <a:t>Click to edit Master title style</a:t>
-            </a:r>
-            <a:endParaRPr lang="en-US" dirty="0"/>
-          </a:p>
-        </p:txBody>
-      </p:sp>
-      <p:sp>
-        <p:nvSpPr>
-          <p:cNvPr id="3" name="Text Placeholder 2"/>
-          <p:cNvSpPr>
-            <a:spLocks noGrp="1"/>
-          </p:cNvSpPr>
-          <p:nvPr>
-            <p:ph type="body" idx="1"/>
-          </p:nvPr>
-        </p:nvSpPr>
-        <p:spPr>
+        <p:style>
+          <a:lnRef idx="2">
+            <a:schemeClr val="accent1">
+              <a:shade val="50000"/>
+            </a:schemeClr>
+          </a:lnRef>
+          <a:fillRef idx="1">
+            <a:schemeClr val="accent1"/>
+          </a:fillRef>
+          <a:effectRef idx="0">
+            <a:schemeClr val="accent1"/>
+          </a:effectRef>
+          <a:fontRef idx="minor">
+            <a:schemeClr val="lt1"/>
+          </a:fontRef>
+        </p:style>
+        <p:txBody>
+          <a:bodyPr/>
+          <a:lstStyle/>
+          <a:p>
+            <a:endParaRPr lang="en-US"/>
+          </a:p>
+        </p:txBody>
+      </p:sp>
+      <p:pic>
+        <p:nvPicPr>
+          <p:cNvPr id="7" name="Picture 6"/>
+          <p:cNvPicPr>
+            <a:picLocks noChangeAspect="1"/>
+          </p:cNvPicPr>
+          <p:nvPr/>
+        </p:nvPicPr>
+        <p:blipFill rotWithShape="1">
+          <a:blip r:embed="rId13">
+            <a:extLst>
+              <a:ext uri="{28A0092B-C50C-407E-A947-70E740481C1C}">
+                <a14:useLocalDpi xmlns:a14="http://schemas.microsoft.com/office/drawing/2010/main" val="0"/>
+              </a:ext>
+            </a:extLst>
+          </a:blip>
+          <a:srcRect t="1538" b="-1538"/>
+          <a:stretch/>
+        </p:blipFill>
+        <p:spPr bwMode="black">
           <a:xfrm>
-            <a:off x="2231136" y="2638044"/>
-            <a:ext cx="7729728" cy="3101983"/>
+            <a:off x="0" y="6126480"/>
+            <a:ext cx="12192000" cy="742950"/>
           </a:xfrm>
           <a:prstGeom prst="rect">
             <a:avLst/>
           </a:prstGeom>
         </p:spPr>
-        <p:txBody>
-          <a:bodyPr vert="horz" lIns="91440" tIns="45720" rIns="91440" bIns="45720" rtlCol="0">
-            <a:normAutofit/>
-          </a:bodyPr>
-          <a:lstStyle/>
-          <a:p>
-            <a:pPr lvl="0"/>
-            <a:r>
-              <a:rPr lang="en-US"/>
-              <a:t>Click to edit Master text styles</a:t>
-            </a:r>
-          </a:p>
-          <a:p>
-            <a:pPr lvl="1"/>
-            <a:r>
-              <a:rPr lang="en-US"/>
-              <a:t>Second level</a:t>
-            </a:r>
-          </a:p>
-          <a:p>
-            <a:pPr lvl="2"/>
-            <a:r>
-              <a:rPr lang="en-US"/>
-              <a:t>Third level</a:t>
-            </a:r>
-          </a:p>
-          <a:p>
-            <a:pPr lvl="3"/>
-            <a:r>
-              <a:rPr lang="en-US"/>
-              <a:t>Fourth level</a:t>
-            </a:r>
-          </a:p>
-          <a:p>
-            <a:pPr lvl="4"/>
-            <a:r>
-              <a:rPr lang="en-US"/>
-              <a:t>Fifth level</a:t>
-            </a:r>
-            <a:endParaRPr lang="en-US" dirty="0"/>
-          </a:p>
-        </p:txBody>
-      </p:sp>
-      <p:sp>
-        <p:nvSpPr>
-          <p:cNvPr id="4" name="Date Placeholder 3"/>
-          <p:cNvSpPr>
-            <a:spLocks noGrp="1"/>
-          </p:cNvSpPr>
-          <p:nvPr>
-            <p:ph type="dt" sz="half" idx="2"/>
+      </p:pic>
+      <p:sp>
+        <p:nvSpPr>
+          <p:cNvPr id="2" name="Title Placeholder 1"/>
+          <p:cNvSpPr>
+            <a:spLocks noGrp="1"/>
+          </p:cNvSpPr>
+          <p:nvPr>
+            <p:ph type="title"/>
           </p:nvPr>
         </p:nvSpPr>
         <p:spPr>
           <a:xfrm>
-            <a:off x="7821429" y="6238816"/>
-            <a:ext cx="2753746" cy="323968"/>
+            <a:off x="1451579" y="804519"/>
+            <a:ext cx="9603275" cy="1049235"/>
           </a:xfrm>
           <a:prstGeom prst="rect">
             <a:avLst/>
           </a:prstGeom>
         </p:spPr>
         <p:txBody>
+          <a:bodyPr vert="horz" lIns="91440" tIns="45720" rIns="91440" bIns="45720" rtlCol="0" anchor="t">
+            <a:normAutofit/>
+          </a:bodyPr>
+          <a:lstStyle/>
+          <a:p>
+            <a:r>
+              <a:rPr lang="en-US"/>
+              <a:t>Click to edit Master title style</a:t>
+            </a:r>
+          </a:p>
+        </p:txBody>
+      </p:sp>
+      <p:sp>
+        <p:nvSpPr>
+          <p:cNvPr id="3" name="Text Placeholder 2"/>
+          <p:cNvSpPr>
+            <a:spLocks noGrp="1"/>
+          </p:cNvSpPr>
+          <p:nvPr>
+            <p:ph type="body" idx="1"/>
+          </p:nvPr>
+        </p:nvSpPr>
+        <p:spPr>
+          <a:xfrm>
+            <a:off x="1451579" y="2015732"/>
+            <a:ext cx="9603275" cy="3450613"/>
+          </a:xfrm>
+          <a:prstGeom prst="rect">
+            <a:avLst/>
+          </a:prstGeom>
+        </p:spPr>
+        <p:txBody>
+          <a:bodyPr vert="horz" lIns="91440" tIns="45720" rIns="91440" bIns="45720" rtlCol="0">
+            <a:normAutofit/>
+          </a:bodyPr>
+          <a:lstStyle/>
+          <a:p>
+            <a:pPr lvl="0"/>
+            <a:r>
+              <a:rPr lang="en-US"/>
+              <a:t>Click to edit Master text styles</a:t>
+            </a:r>
+          </a:p>
+          <a:p>
+            <a:pPr lvl="1"/>
+            <a:r>
+              <a:rPr lang="en-US"/>
+              <a:t>Second level</a:t>
+            </a:r>
+          </a:p>
+          <a:p>
+            <a:pPr lvl="2"/>
+            <a:r>
+              <a:rPr lang="en-US"/>
+              <a:t>Third level</a:t>
+            </a:r>
+          </a:p>
+          <a:p>
+            <a:pPr lvl="3"/>
+            <a:r>
+              <a:rPr lang="en-US"/>
+              <a:t>Fourth level</a:t>
+            </a:r>
+          </a:p>
+          <a:p>
+            <a:pPr lvl="4"/>
+            <a:r>
+              <a:rPr lang="en-US"/>
+              <a:t>Fifth level</a:t>
+            </a:r>
+          </a:p>
+        </p:txBody>
+      </p:sp>
+      <p:sp>
+        <p:nvSpPr>
+          <p:cNvPr id="4" name="Date Placeholder 3"/>
+          <p:cNvSpPr>
+            <a:spLocks noGrp="1"/>
+          </p:cNvSpPr>
+          <p:nvPr>
+            <p:ph type="dt" sz="half" idx="2"/>
+          </p:nvPr>
+        </p:nvSpPr>
+        <p:spPr>
+          <a:xfrm>
+            <a:off x="7554138" y="330370"/>
+            <a:ext cx="3500715" cy="309201"/>
+          </a:xfrm>
+          <a:prstGeom prst="rect">
+            <a:avLst/>
+          </a:prstGeom>
+        </p:spPr>
+        <p:txBody>
           <a:bodyPr vert="horz" lIns="91440" tIns="45720" rIns="91440" bIns="45720" rtlCol="0" anchor="ctr"/>
           <a:lstStyle>
             <a:lvl1pPr algn="r">
-              <a:defRPr sz="1050">
+              <a:defRPr sz="1000">
                 <a:solidFill>
                   <a:schemeClr val="tx1">
-                    <a:alpha val="70000"/>
+                    <a:tint val="75000"/>
                   </a:schemeClr>
                 </a:solidFill>
               </a:defRPr>
@@ -2949,7 +4645,7 @@
           <a:p>
             <a:fld id="{6EF5D040-31F8-4918-8619-B8E0C517AD2F}" type="datetimeFigureOut">
               <a:rPr lang="en-US" smtClean="0"/>
-              <a:t>2/12/2026</a:t>
+              <a:t>3/5/2026</a:t>
             </a:fld>
             <a:endParaRPr lang="en-US"/>
           </a:p>
@@ -2967,8 +4663,8 @@
         </p:nvSpPr>
         <p:spPr>
           <a:xfrm>
-            <a:off x="1600200" y="6236208"/>
-            <a:ext cx="5901189" cy="320040"/>
+            <a:off x="1451579" y="329307"/>
+            <a:ext cx="5938836" cy="309201"/>
           </a:xfrm>
           <a:prstGeom prst="rect">
             <a:avLst/>
@@ -2978,10 +4674,10 @@
           <a:bodyPr vert="horz" lIns="91440" tIns="45720" rIns="91440" bIns="45720" rtlCol="0" anchor="ctr"/>
           <a:lstStyle>
             <a:lvl1pPr algn="l">
-              <a:defRPr sz="1050">
+              <a:defRPr sz="1000">
                 <a:solidFill>
                   <a:schemeClr val="tx1">
-                    <a:alpha val="70000"/>
+                    <a:tint val="75000"/>
                   </a:schemeClr>
                 </a:solidFill>
               </a:defRPr>
@@ -3004,27 +4700,20 @@
         </p:nvSpPr>
         <p:spPr>
           <a:xfrm>
-            <a:off x="10758922" y="6217920"/>
-            <a:ext cx="365760" cy="365760"/>
+            <a:off x="480060" y="798973"/>
+            <a:ext cx="811019" cy="503578"/>
           </a:xfrm>
-          <a:prstGeom prst="ellipse">
+          <a:prstGeom prst="rect">
             <a:avLst/>
           </a:prstGeom>
-          <a:solidFill>
-            <a:srgbClr val="1D1D1D">
-              <a:alpha val="70000"/>
-            </a:srgbClr>
-          </a:solidFill>
         </p:spPr>
         <p:txBody>
-          <a:bodyPr vert="horz" lIns="18288" tIns="45720" rIns="18288" bIns="45720" rtlCol="0" anchor="ctr">
-            <a:noAutofit/>
-          </a:bodyPr>
+          <a:bodyPr vert="horz" lIns="91440" tIns="45720" rIns="91440" bIns="45720" rtlCol="0" anchor="t"/>
           <a:lstStyle>
-            <a:lvl1pPr algn="ctr">
-              <a:defRPr sz="1100" spc="0" baseline="0">
+            <a:lvl1pPr algn="r">
+              <a:defRPr sz="2800">
                 <a:solidFill>
-                  <a:srgbClr val="FFFFFF"/>
+                  <a:schemeClr val="accent1"/>
                 </a:solidFill>
               </a:defRPr>
             </a:lvl1pPr>
@@ -3038,30 +4727,67 @@
           </a:p>
         </p:txBody>
       </p:sp>
+      <p:cxnSp>
+        <p:nvCxnSpPr>
+          <p:cNvPr id="10" name="Straight Connector 9"/>
+          <p:cNvCxnSpPr/>
+          <p:nvPr/>
+        </p:nvCxnSpPr>
+        <p:spPr>
+          <a:xfrm>
+            <a:off x="0" y="6128413"/>
+            <a:ext cx="12192000" cy="0"/>
+          </a:xfrm>
+          <a:prstGeom prst="line">
+            <a:avLst/>
+          </a:prstGeom>
+          <a:ln w="12700">
+            <a:solidFill>
+              <a:srgbClr val="000001">
+                <a:alpha val="20000"/>
+              </a:srgbClr>
+            </a:solidFill>
+          </a:ln>
+        </p:spPr>
+        <p:style>
+          <a:lnRef idx="1">
+            <a:schemeClr val="accent1"/>
+          </a:lnRef>
+          <a:fillRef idx="0">
+            <a:schemeClr val="accent1"/>
+          </a:fillRef>
+          <a:effectRef idx="0">
+            <a:schemeClr val="accent1"/>
+          </a:effectRef>
+          <a:fontRef idx="minor">
+            <a:schemeClr val="tx1"/>
+          </a:fontRef>
+        </p:style>
+      </p:cxnSp>
     </p:spTree>
     <p:extLst>
       <p:ext uri="{BB962C8B-B14F-4D97-AF65-F5344CB8AC3E}">
-        <p14:creationId xmlns:p14="http://schemas.microsoft.com/office/powerpoint/2010/main" val="3771905174"/>
+        <p14:creationId xmlns:p14="http://schemas.microsoft.com/office/powerpoint/2010/main" val="4195095423"/>
       </p:ext>
     </p:extLst>
   </p:cSld>
   <p:clrMap bg1="lt1" tx1="dk1" bg2="lt2" tx2="dk2" accent1="accent1" accent2="accent2" accent3="accent3" accent4="accent4" accent5="accent5" accent6="accent6" hlink="hlink" folHlink="folHlink"/>
   <p:sldLayoutIdLst>
-    <p:sldLayoutId id="2147483661" r:id="rId1"/>
-    <p:sldLayoutId id="2147483662" r:id="rId2"/>
-    <p:sldLayoutId id="2147483663" r:id="rId3"/>
-    <p:sldLayoutId id="2147483664" r:id="rId4"/>
-    <p:sldLayoutId id="2147483665" r:id="rId5"/>
-    <p:sldLayoutId id="2147483666" r:id="rId6"/>
-    <p:sldLayoutId id="2147483667" r:id="rId7"/>
-    <p:sldLayoutId id="2147483668" r:id="rId8"/>
-    <p:sldLayoutId id="2147483669" r:id="rId9"/>
-    <p:sldLayoutId id="2147483670" r:id="rId10"/>
-    <p:sldLayoutId id="2147483671" r:id="rId11"/>
+    <p:sldLayoutId id="2147483673" r:id="rId1"/>
+    <p:sldLayoutId id="2147483674" r:id="rId2"/>
+    <p:sldLayoutId id="2147483675" r:id="rId3"/>
+    <p:sldLayoutId id="2147483676" r:id="rId4"/>
+    <p:sldLayoutId id="2147483677" r:id="rId5"/>
+    <p:sldLayoutId id="2147483678" r:id="rId6"/>
+    <p:sldLayoutId id="2147483679" r:id="rId7"/>
+    <p:sldLayoutId id="2147483680" r:id="rId8"/>
+    <p:sldLayoutId id="2147483681" r:id="rId9"/>
+    <p:sldLayoutId id="2147483682" r:id="rId10"/>
+    <p:sldLayoutId id="2147483683" r:id="rId11"/>
   </p:sldLayoutIdLst>
   <p:txStyles>
     <p:titleStyle>
-      <a:lvl1pPr algn="ctr" defTabSz="914400" rtl="0" eaLnBrk="1" latinLnBrk="0" hangingPunct="1">
+      <a:lvl1pPr algn="l" defTabSz="914400" rtl="0" eaLnBrk="1" latinLnBrk="0" hangingPunct="1">
         <a:lnSpc>
           <a:spcPct val="90000"/>
         </a:lnSpc>
@@ -3069,10 +4795,11 @@
           <a:spcPct val="0"/>
         </a:spcBef>
         <a:buNone/>
-        <a:defRPr sz="2800" kern="1200" cap="all" spc="200" baseline="0">
+        <a:defRPr sz="3200" b="0" i="0" kern="1200" cap="all">
           <a:solidFill>
-            <a:srgbClr val="262626"/>
+            <a:schemeClr val="tx1"/>
           </a:solidFill>
+          <a:effectLst/>
           <a:latin typeface="+mj-lt"/>
           <a:ea typeface="+mj-ea"/>
           <a:cs typeface="+mj-cs"/>
@@ -3082,203 +4809,206 @@
     <p:bodyStyle>
       <a:lvl1pPr marL="228600" indent="-228600" algn="l" defTabSz="914400" rtl="0" eaLnBrk="1" latinLnBrk="0" hangingPunct="1">
         <a:lnSpc>
-          <a:spcPct val="100000"/>
+          <a:spcPct val="120000"/>
         </a:lnSpc>
         <a:spcBef>
           <a:spcPts val="1000"/>
         </a:spcBef>
         <a:buClr>
-          <a:schemeClr val="accent2"/>
+          <a:schemeClr val="accent1"/>
         </a:buClr>
+        <a:buSzPct val="100000"/>
         <a:buFont typeface="Arial" panose="020B0604020202020204" pitchFamily="34" charset="0"/>
         <a:buChar char="•"/>
-        <a:defRPr sz="1800" kern="1200">
+        <a:defRPr sz="2000" kern="1200">
           <a:solidFill>
-            <a:schemeClr val="tx1">
-              <a:lumMod val="85000"/>
-              <a:lumOff val="15000"/>
-            </a:schemeClr>
+            <a:schemeClr val="tx1"/>
           </a:solidFill>
+          <a:effectLst/>
           <a:latin typeface="+mn-lt"/>
           <a:ea typeface="+mn-ea"/>
           <a:cs typeface="+mn-cs"/>
         </a:defRPr>
       </a:lvl1pPr>
-      <a:lvl2pPr marL="457200" indent="-228600" algn="l" defTabSz="914400" rtl="0" eaLnBrk="1" latinLnBrk="0" hangingPunct="1">
+      <a:lvl2pPr marL="685800" indent="-228600" algn="l" defTabSz="914400" rtl="0" eaLnBrk="1" latinLnBrk="0" hangingPunct="1">
         <a:lnSpc>
-          <a:spcPct val="100000"/>
+          <a:spcPct val="120000"/>
         </a:lnSpc>
         <a:spcBef>
-          <a:spcPts val="1000"/>
+          <a:spcPts val="500"/>
         </a:spcBef>
         <a:buClr>
-          <a:schemeClr val="accent2"/>
+          <a:schemeClr val="accent1"/>
         </a:buClr>
+        <a:buSzPct val="100000"/>
         <a:buFont typeface="Arial" panose="020B0604020202020204" pitchFamily="34" charset="0"/>
         <a:buChar char="•"/>
-        <a:defRPr sz="1600" kern="1200">
+        <a:defRPr sz="1800" kern="1200" cap="none" baseline="0">
           <a:solidFill>
-            <a:schemeClr val="tx1">
-              <a:lumMod val="85000"/>
-              <a:lumOff val="15000"/>
-            </a:schemeClr>
+            <a:schemeClr val="tx1"/>
           </a:solidFill>
+          <a:effectLst/>
           <a:latin typeface="+mn-lt"/>
           <a:ea typeface="+mn-ea"/>
           <a:cs typeface="+mn-cs"/>
         </a:defRPr>
       </a:lvl2pPr>
-      <a:lvl3pPr marL="685800" indent="-228600" algn="l" defTabSz="914400" rtl="0" eaLnBrk="1" latinLnBrk="0" hangingPunct="1">
+      <a:lvl3pPr marL="1143000" indent="-228600" algn="l" defTabSz="914400" rtl="0" eaLnBrk="1" latinLnBrk="0" hangingPunct="1">
         <a:lnSpc>
-          <a:spcPct val="100000"/>
+          <a:spcPct val="120000"/>
         </a:lnSpc>
         <a:spcBef>
-          <a:spcPts val="1000"/>
+          <a:spcPts val="500"/>
         </a:spcBef>
         <a:buClr>
-          <a:schemeClr val="accent2"/>
+          <a:schemeClr val="accent1"/>
         </a:buClr>
-        <a:buFont typeface="Arial" panose="020B0604020202020204" pitchFamily="34" charset="0"/>
-        <a:buChar char="•"/>
-        <a:defRPr sz="1600" kern="1200">
-          <a:solidFill>
-            <a:schemeClr val="tx1">
-              <a:lumMod val="85000"/>
-              <a:lumOff val="15000"/>
-            </a:schemeClr>
-          </a:solidFill>
-          <a:latin typeface="+mn-lt"/>
-          <a:ea typeface="+mn-ea"/>
-          <a:cs typeface="+mn-cs"/>
-        </a:defRPr>
-      </a:lvl3pPr>
-      <a:lvl4pPr marL="914400" indent="-228600" algn="l" defTabSz="914400" rtl="0" eaLnBrk="1" latinLnBrk="0" hangingPunct="1">
-        <a:lnSpc>
-          <a:spcPct val="100000"/>
-        </a:lnSpc>
-        <a:spcBef>
-          <a:spcPts val="1000"/>
-        </a:spcBef>
-        <a:buClr>
-          <a:schemeClr val="accent2"/>
-        </a:buClr>
-        <a:buFont typeface="Arial" panose="020B0604020202020204" pitchFamily="34" charset="0"/>
-        <a:buChar char="•"/>
-        <a:defRPr sz="1600" kern="1200">
-          <a:solidFill>
-            <a:schemeClr val="tx1">
-              <a:lumMod val="85000"/>
-              <a:lumOff val="15000"/>
-            </a:schemeClr>
-          </a:solidFill>
-          <a:latin typeface="+mn-lt"/>
-          <a:ea typeface="+mn-ea"/>
-          <a:cs typeface="+mn-cs"/>
-        </a:defRPr>
-      </a:lvl4pPr>
-      <a:lvl5pPr marL="1143000" indent="-228600" algn="l" defTabSz="914400" rtl="0" eaLnBrk="1" latinLnBrk="0" hangingPunct="1">
-        <a:lnSpc>
-          <a:spcPct val="100000"/>
-        </a:lnSpc>
-        <a:spcBef>
-          <a:spcPts val="1000"/>
-        </a:spcBef>
-        <a:buClr>
-          <a:schemeClr val="accent2"/>
-        </a:buClr>
-        <a:buFont typeface="Arial" panose="020B0604020202020204" pitchFamily="34" charset="0"/>
-        <a:buChar char="•"/>
-        <a:defRPr sz="1600" kern="1200">
-          <a:solidFill>
-            <a:schemeClr val="tx1">
-              <a:lumMod val="85000"/>
-              <a:lumOff val="15000"/>
-            </a:schemeClr>
-          </a:solidFill>
-          <a:latin typeface="+mn-lt"/>
-          <a:ea typeface="+mn-ea"/>
-          <a:cs typeface="+mn-cs"/>
-        </a:defRPr>
-      </a:lvl5pPr>
-      <a:lvl6pPr marL="1312863" indent="-228600" algn="l" defTabSz="914400" rtl="0" eaLnBrk="1" latinLnBrk="0" hangingPunct="1">
-        <a:lnSpc>
-          <a:spcPct val="100000"/>
-        </a:lnSpc>
-        <a:spcBef>
-          <a:spcPts val="1000"/>
-        </a:spcBef>
-        <a:buClr>
-          <a:schemeClr val="accent2"/>
-        </a:buClr>
+        <a:buSzPct val="100000"/>
         <a:buFont typeface="Arial" panose="020B0604020202020204" pitchFamily="34" charset="0"/>
         <a:buChar char="•"/>
         <a:defRPr sz="1600" kern="1200">
           <a:solidFill>
             <a:schemeClr val="tx1"/>
           </a:solidFill>
+          <a:effectLst/>
+          <a:latin typeface="+mn-lt"/>
+          <a:ea typeface="+mn-ea"/>
+          <a:cs typeface="+mn-cs"/>
+        </a:defRPr>
+      </a:lvl3pPr>
+      <a:lvl4pPr marL="1600200" indent="-228600" algn="l" defTabSz="914400" rtl="0" eaLnBrk="1" latinLnBrk="0" hangingPunct="1">
+        <a:lnSpc>
+          <a:spcPct val="120000"/>
+        </a:lnSpc>
+        <a:spcBef>
+          <a:spcPts val="500"/>
+        </a:spcBef>
+        <a:buClr>
+          <a:schemeClr val="accent1"/>
+        </a:buClr>
+        <a:buSzPct val="100000"/>
+        <a:buFont typeface="Arial" panose="020B0604020202020204" pitchFamily="34" charset="0"/>
+        <a:buChar char="•"/>
+        <a:defRPr sz="1400" kern="1200" cap="none" baseline="0">
+          <a:solidFill>
+            <a:schemeClr val="tx1"/>
+          </a:solidFill>
+          <a:effectLst/>
+          <a:latin typeface="+mn-lt"/>
+          <a:ea typeface="+mn-ea"/>
+          <a:cs typeface="+mn-cs"/>
+        </a:defRPr>
+      </a:lvl4pPr>
+      <a:lvl5pPr marL="2057400" indent="-228600" algn="l" defTabSz="914400" rtl="0" eaLnBrk="1" latinLnBrk="0" hangingPunct="1">
+        <a:lnSpc>
+          <a:spcPct val="120000"/>
+        </a:lnSpc>
+        <a:spcBef>
+          <a:spcPts val="500"/>
+        </a:spcBef>
+        <a:buClr>
+          <a:schemeClr val="accent1"/>
+        </a:buClr>
+        <a:buSzPct val="100000"/>
+        <a:buFont typeface="Arial" panose="020B0604020202020204" pitchFamily="34" charset="0"/>
+        <a:buChar char="•"/>
+        <a:defRPr sz="1200" kern="1200">
+          <a:solidFill>
+            <a:schemeClr val="tx1"/>
+          </a:solidFill>
+          <a:effectLst/>
+          <a:latin typeface="+mn-lt"/>
+          <a:ea typeface="+mn-ea"/>
+          <a:cs typeface="+mn-cs"/>
+        </a:defRPr>
+      </a:lvl5pPr>
+      <a:lvl6pPr marL="2514600" indent="-228600" algn="l" defTabSz="914400" rtl="0" eaLnBrk="1" latinLnBrk="0" hangingPunct="1">
+        <a:lnSpc>
+          <a:spcPct val="120000"/>
+        </a:lnSpc>
+        <a:spcBef>
+          <a:spcPts val="500"/>
+        </a:spcBef>
+        <a:buClr>
+          <a:schemeClr val="accent1"/>
+        </a:buClr>
+        <a:buSzPct val="100000"/>
+        <a:buFont typeface="Arial" panose="020B0604020202020204" pitchFamily="34" charset="0"/>
+        <a:buChar char="•"/>
+        <a:defRPr sz="1200" kern="1200">
+          <a:solidFill>
+            <a:schemeClr val="tx1"/>
+          </a:solidFill>
+          <a:effectLst/>
           <a:latin typeface="+mn-lt"/>
           <a:ea typeface="+mn-ea"/>
           <a:cs typeface="+mn-cs"/>
         </a:defRPr>
       </a:lvl6pPr>
-      <a:lvl7pPr marL="1484313" indent="-228600" algn="l" defTabSz="914400" rtl="0" eaLnBrk="1" latinLnBrk="0" hangingPunct="1">
+      <a:lvl7pPr marL="2971800" indent="-228600" algn="l" defTabSz="914400" rtl="0" eaLnBrk="1" latinLnBrk="0" hangingPunct="1">
         <a:lnSpc>
-          <a:spcPct val="100000"/>
+          <a:spcPct val="120000"/>
         </a:lnSpc>
         <a:spcBef>
-          <a:spcPts val="1000"/>
+          <a:spcPts val="500"/>
         </a:spcBef>
         <a:buClr>
-          <a:schemeClr val="accent2"/>
+          <a:schemeClr val="accent1"/>
         </a:buClr>
+        <a:buSzPct val="100000"/>
         <a:buFont typeface="Arial" panose="020B0604020202020204" pitchFamily="34" charset="0"/>
         <a:buChar char="•"/>
-        <a:defRPr sz="1600" kern="1200">
+        <a:defRPr sz="1200" kern="1200">
           <a:solidFill>
             <a:schemeClr val="tx1"/>
           </a:solidFill>
+          <a:effectLst/>
           <a:latin typeface="+mn-lt"/>
           <a:ea typeface="+mn-ea"/>
           <a:cs typeface="+mn-cs"/>
         </a:defRPr>
       </a:lvl7pPr>
-      <a:lvl8pPr marL="1657350" indent="-228600" algn="l" defTabSz="914400" rtl="0" eaLnBrk="1" latinLnBrk="0" hangingPunct="1">
+      <a:lvl8pPr marL="3429000" indent="-228600" algn="l" defTabSz="914400" rtl="0" eaLnBrk="1" latinLnBrk="0" hangingPunct="1">
         <a:lnSpc>
-          <a:spcPct val="100000"/>
+          <a:spcPct val="120000"/>
         </a:lnSpc>
         <a:spcBef>
-          <a:spcPts val="1000"/>
+          <a:spcPts val="500"/>
         </a:spcBef>
         <a:buClr>
-          <a:schemeClr val="accent2"/>
+          <a:schemeClr val="accent1"/>
         </a:buClr>
+        <a:buSzPct val="100000"/>
         <a:buFont typeface="Arial" panose="020B0604020202020204" pitchFamily="34" charset="0"/>
         <a:buChar char="•"/>
-        <a:defRPr sz="1600" kern="1200" baseline="0">
+        <a:defRPr sz="1200" kern="1200" baseline="0">
           <a:solidFill>
             <a:schemeClr val="tx1"/>
           </a:solidFill>
+          <a:effectLst/>
           <a:latin typeface="+mn-lt"/>
           <a:ea typeface="+mn-ea"/>
           <a:cs typeface="+mn-cs"/>
         </a:defRPr>
       </a:lvl8pPr>
-      <a:lvl9pPr marL="1882775" indent="-228600" algn="l" defTabSz="914400" rtl="0" eaLnBrk="1" latinLnBrk="0" hangingPunct="1">
+      <a:lvl9pPr marL="3886200" indent="-228600" algn="l" defTabSz="914400" rtl="0" eaLnBrk="1" latinLnBrk="0" hangingPunct="1">
         <a:lnSpc>
-          <a:spcPct val="100000"/>
+          <a:spcPct val="120000"/>
         </a:lnSpc>
         <a:spcBef>
-          <a:spcPts val="1000"/>
+          <a:spcPts val="500"/>
         </a:spcBef>
         <a:buClr>
-          <a:schemeClr val="accent2"/>
+          <a:schemeClr val="accent1"/>
         </a:buClr>
+        <a:buSzPct val="100000"/>
         <a:buFont typeface="Arial" panose="020B0604020202020204" pitchFamily="34" charset="0"/>
         <a:buChar char="•"/>
-        <a:defRPr sz="1600" kern="1200" baseline="0">
+        <a:defRPr sz="1200" kern="1200" baseline="0">
           <a:solidFill>
             <a:schemeClr val="tx1"/>
           </a:solidFill>
+          <a:effectLst/>
           <a:latin typeface="+mn-lt"/>
           <a:ea typeface="+mn-ea"/>
           <a:cs typeface="+mn-cs"/>
@@ -3419,11 +5149,13 @@
         </p:nvSpPr>
         <p:spPr/>
         <p:txBody>
-          <a:bodyPr/>
-          <a:lstStyle/>
-          <a:p>
-            <a:r>
-              <a:rPr lang="en-US" dirty="0"/>
+          <a:bodyPr>
+            <a:normAutofit fontScale="90000"/>
+          </a:bodyPr>
+          <a:lstStyle/>
+          <a:p>
+            <a:r>
+              <a:rPr lang="en-US"/>
               <a:t>Research Paper Presentation – Group 15</a:t>
             </a:r>
           </a:p>
@@ -3447,26 +5179,28 @@
         </p:nvSpPr>
         <p:spPr/>
         <p:txBody>
-          <a:bodyPr/>
-          <a:lstStyle/>
-          <a:p>
-            <a:r>
-              <a:rPr lang="en-US" dirty="0"/>
+          <a:bodyPr vert="horz" lIns="91440" tIns="45720" rIns="91440" bIns="45720" rtlCol="0" anchor="t">
+            <a:normAutofit/>
+          </a:bodyPr>
+          <a:lstStyle/>
+          <a:p>
+            <a:r>
+              <a:rPr lang="en-US"/>
               <a:t>Joe Ferguson, Ali El </a:t>
             </a:r>
             <a:r>
-              <a:rPr lang="en-US" dirty="0" err="1"/>
-              <a:t>Homayassi</a:t>
-            </a:r>
-            <a:r>
-              <a:rPr lang="en-US" dirty="0"/>
+              <a:rPr lang="en-US" err="1"/>
+              <a:t>Homayssi</a:t>
+            </a:r>
+            <a:r>
+              <a:rPr lang="en-US"/>
               <a:t>, Garrett Gerver,  Anas Khairy, Ameya Saraf, Jason </a:t>
             </a:r>
             <a:r>
-              <a:rPr lang="en-US" dirty="0" err="1"/>
+              <a:rPr lang="en-US" err="1"/>
               <a:t>Bellerjeau</a:t>
             </a:r>
-            <a:endParaRPr lang="en-US" dirty="0"/>
+            <a:endParaRPr lang="en-US"/>
           </a:p>
         </p:txBody>
       </p:sp>
@@ -3474,6 +5208,1703 @@
     <p:extLst>
       <p:ext uri="{BB962C8B-B14F-4D97-AF65-F5344CB8AC3E}">
         <p14:creationId xmlns:p14="http://schemas.microsoft.com/office/powerpoint/2010/main" val="1741922381"/>
+      </p:ext>
+    </p:extLst>
+  </p:cSld>
+  <p:clrMapOvr>
+    <a:masterClrMapping/>
+  </p:clrMapOvr>
+</p:sld>
+</file>
+
+<file path=ppt/slides/slide10.xml><?xml version="1.0" encoding="utf-8"?>
+<p:sld xmlns:a="http://schemas.openxmlformats.org/drawingml/2006/main" xmlns:r="http://schemas.openxmlformats.org/officeDocument/2006/relationships" xmlns:p="http://schemas.openxmlformats.org/presentationml/2006/main">
+  <p:cSld>
+    <p:spTree>
+      <p:nvGrpSpPr>
+        <p:cNvPr id="1" name=""/>
+        <p:cNvGrpSpPr/>
+        <p:nvPr/>
+      </p:nvGrpSpPr>
+      <p:grpSpPr>
+        <a:xfrm>
+          <a:off x="0" y="0"/>
+          <a:ext cx="0" cy="0"/>
+          <a:chOff x="0" y="0"/>
+          <a:chExt cx="0" cy="0"/>
+        </a:xfrm>
+      </p:grpSpPr>
+      <p:sp>
+        <p:nvSpPr>
+          <p:cNvPr id="2" name="Title 1">
+            <a:extLst>
+              <a:ext uri="{FF2B5EF4-FFF2-40B4-BE49-F238E27FC236}">
+                <a16:creationId xmlns:a16="http://schemas.microsoft.com/office/drawing/2014/main" id="{2F62DDB8-2F62-EED1-2222-D52F987BF33F}"/>
+              </a:ext>
+            </a:extLst>
+          </p:cNvPr>
+          <p:cNvSpPr>
+            <a:spLocks noGrp="1"/>
+          </p:cNvSpPr>
+          <p:nvPr>
+            <p:ph type="title"/>
+          </p:nvPr>
+        </p:nvSpPr>
+        <p:spPr/>
+        <p:txBody>
+          <a:bodyPr/>
+          <a:lstStyle/>
+          <a:p>
+            <a:r>
+              <a:rPr lang="en-US"/>
+              <a:t>Method – Step 2 – Clustering Related Reviews</a:t>
+            </a:r>
+          </a:p>
+        </p:txBody>
+      </p:sp>
+      <p:sp>
+        <p:nvSpPr>
+          <p:cNvPr id="3" name="Content Placeholder 2">
+            <a:extLst>
+              <a:ext uri="{FF2B5EF4-FFF2-40B4-BE49-F238E27FC236}">
+                <a16:creationId xmlns:a16="http://schemas.microsoft.com/office/drawing/2014/main" id="{608C4F5C-9279-1AF2-DBD1-12CA5133496A}"/>
+              </a:ext>
+            </a:extLst>
+          </p:cNvPr>
+          <p:cNvSpPr>
+            <a:spLocks noGrp="1"/>
+          </p:cNvSpPr>
+          <p:nvPr>
+            <p:ph idx="1"/>
+          </p:nvPr>
+        </p:nvSpPr>
+        <p:spPr/>
+        <p:txBody>
+          <a:bodyPr/>
+          <a:lstStyle/>
+          <a:p>
+            <a:r>
+              <a:rPr lang="en-US"/>
+              <a:t>Only use the informative classifications from previous step (no “others”)</a:t>
+            </a:r>
+          </a:p>
+          <a:p>
+            <a:endParaRPr lang="en-US"/>
+          </a:p>
+          <a:p>
+            <a:r>
+              <a:rPr lang="en-US"/>
+              <a:t>Clustering done by applying DBSCAN, which utilizes the distance between reviews computed using Vector Space Model</a:t>
+            </a:r>
+          </a:p>
+          <a:p>
+            <a:pPr lvl="1"/>
+            <a:r>
+              <a:rPr lang="en-US"/>
+              <a:t>Two-parameters here: Minimum Number of Points for a cluster to form, Maximum Distance between points to consider them part of the same cluster</a:t>
+            </a:r>
+          </a:p>
+        </p:txBody>
+      </p:sp>
+      <p:pic>
+        <p:nvPicPr>
+          <p:cNvPr id="5" name="Picture 4">
+            <a:extLst>
+              <a:ext uri="{FF2B5EF4-FFF2-40B4-BE49-F238E27FC236}">
+                <a16:creationId xmlns:a16="http://schemas.microsoft.com/office/drawing/2014/main" id="{1866F6E6-D8F9-D485-EEB9-88FA1E2DE7CC}"/>
+              </a:ext>
+            </a:extLst>
+          </p:cNvPr>
+          <p:cNvPicPr>
+            <a:picLocks noChangeAspect="1"/>
+          </p:cNvPicPr>
+          <p:nvPr/>
+        </p:nvPicPr>
+        <p:blipFill>
+          <a:blip r:embed="rId2"/>
+          <a:srcRect r="1682"/>
+          <a:stretch>
+            <a:fillRect/>
+          </a:stretch>
+        </p:blipFill>
+        <p:spPr>
+          <a:xfrm>
+            <a:off x="4147061" y="4713599"/>
+            <a:ext cx="3897877" cy="2052856"/>
+          </a:xfrm>
+          <a:prstGeom prst="rect">
+            <a:avLst/>
+          </a:prstGeom>
+        </p:spPr>
+      </p:pic>
+      <p:sp>
+        <p:nvSpPr>
+          <p:cNvPr id="6" name="TextBox 5">
+            <a:extLst>
+              <a:ext uri="{FF2B5EF4-FFF2-40B4-BE49-F238E27FC236}">
+                <a16:creationId xmlns:a16="http://schemas.microsoft.com/office/drawing/2014/main" id="{C4192FC7-6511-B90F-412D-17C8729608A9}"/>
+              </a:ext>
+            </a:extLst>
+          </p:cNvPr>
+          <p:cNvSpPr txBox="1"/>
+          <p:nvPr/>
+        </p:nvSpPr>
+        <p:spPr>
+          <a:xfrm>
+            <a:off x="8044938" y="5839400"/>
+            <a:ext cx="2652793" cy="276999"/>
+          </a:xfrm>
+          <a:prstGeom prst="rect">
+            <a:avLst/>
+          </a:prstGeom>
+          <a:noFill/>
+        </p:spPr>
+        <p:txBody>
+          <a:bodyPr wrap="square" rtlCol="0">
+            <a:spAutoFit/>
+          </a:bodyPr>
+          <a:lstStyle/>
+          <a:p>
+            <a:r>
+              <a:rPr lang="en-US" sz="1200" i="1">
+                <a:solidFill>
+                  <a:schemeClr val="bg1">
+                    <a:lumMod val="50000"/>
+                  </a:schemeClr>
+                </a:solidFill>
+              </a:rPr>
+              <a:t>Example DBSCAN</a:t>
+            </a:r>
+          </a:p>
+        </p:txBody>
+      </p:sp>
+    </p:spTree>
+    <p:extLst>
+      <p:ext uri="{BB962C8B-B14F-4D97-AF65-F5344CB8AC3E}">
+        <p14:creationId xmlns:p14="http://schemas.microsoft.com/office/powerpoint/2010/main" val="3741326513"/>
+      </p:ext>
+    </p:extLst>
+  </p:cSld>
+  <p:clrMapOvr>
+    <a:masterClrMapping/>
+  </p:clrMapOvr>
+</p:sld>
+</file>
+
+<file path=ppt/slides/slide11.xml><?xml version="1.0" encoding="utf-8"?>
+<p:sld xmlns:a="http://schemas.openxmlformats.org/drawingml/2006/main" xmlns:r="http://schemas.openxmlformats.org/officeDocument/2006/relationships" xmlns:p="http://schemas.openxmlformats.org/presentationml/2006/main">
+  <p:cSld>
+    <p:spTree>
+      <p:nvGrpSpPr>
+        <p:cNvPr id="1" name=""/>
+        <p:cNvGrpSpPr/>
+        <p:nvPr/>
+      </p:nvGrpSpPr>
+      <p:grpSpPr>
+        <a:xfrm>
+          <a:off x="0" y="0"/>
+          <a:ext cx="0" cy="0"/>
+          <a:chOff x="0" y="0"/>
+          <a:chExt cx="0" cy="0"/>
+        </a:xfrm>
+      </p:grpSpPr>
+      <p:sp>
+        <p:nvSpPr>
+          <p:cNvPr id="2" name="Title 1">
+            <a:extLst>
+              <a:ext uri="{FF2B5EF4-FFF2-40B4-BE49-F238E27FC236}">
+                <a16:creationId xmlns:a16="http://schemas.microsoft.com/office/drawing/2014/main" id="{CF50709A-2BAC-9481-B9CB-EED734C529EE}"/>
+              </a:ext>
+            </a:extLst>
+          </p:cNvPr>
+          <p:cNvSpPr>
+            <a:spLocks noGrp="1"/>
+          </p:cNvSpPr>
+          <p:nvPr>
+            <p:ph type="title"/>
+          </p:nvPr>
+        </p:nvSpPr>
+        <p:spPr/>
+        <p:txBody>
+          <a:bodyPr/>
+          <a:lstStyle/>
+          <a:p>
+            <a:r>
+              <a:rPr lang="en-US"/>
+              <a:t>Method – Step 3 – Prioritizing Review clusters</a:t>
+            </a:r>
+          </a:p>
+        </p:txBody>
+      </p:sp>
+      <p:sp>
+        <p:nvSpPr>
+          <p:cNvPr id="3" name="Content Placeholder 2">
+            <a:extLst>
+              <a:ext uri="{FF2B5EF4-FFF2-40B4-BE49-F238E27FC236}">
+                <a16:creationId xmlns:a16="http://schemas.microsoft.com/office/drawing/2014/main" id="{B1585CD1-4C07-4C26-BAD2-02F84944702A}"/>
+              </a:ext>
+            </a:extLst>
+          </p:cNvPr>
+          <p:cNvSpPr>
+            <a:spLocks noGrp="1"/>
+          </p:cNvSpPr>
+          <p:nvPr>
+            <p:ph idx="1"/>
+          </p:nvPr>
+        </p:nvSpPr>
+        <p:spPr/>
+        <p:txBody>
+          <a:bodyPr>
+            <a:normAutofit fontScale="92500" lnSpcReduction="10000"/>
+          </a:bodyPr>
+          <a:lstStyle/>
+          <a:p>
+            <a:r>
+              <a:rPr lang="en-US"/>
+              <a:t>Binary Classification – Is review high or low priority?</a:t>
+            </a:r>
+          </a:p>
+          <a:p>
+            <a:pPr lvl="1"/>
+            <a:r>
+              <a:rPr lang="en-US"/>
+              <a:t>Uses Random Forest Again</a:t>
+            </a:r>
+          </a:p>
+          <a:p>
+            <a:pPr lvl="1"/>
+            <a:endParaRPr lang="en-US"/>
+          </a:p>
+          <a:p>
+            <a:r>
+              <a:rPr lang="en-US"/>
+              <a:t>Features: </a:t>
+            </a:r>
+          </a:p>
+          <a:p>
+            <a:pPr marL="571500" lvl="1" indent="-342900">
+              <a:buFont typeface="+mj-lt"/>
+              <a:buAutoNum type="arabicPeriod"/>
+            </a:pPr>
+            <a:r>
+              <a:rPr lang="en-US"/>
+              <a:t>Number of Reviews (# in cluster)</a:t>
+            </a:r>
+          </a:p>
+          <a:p>
+            <a:pPr marL="571500" lvl="1" indent="-342900">
+              <a:buFont typeface="+mj-lt"/>
+              <a:buAutoNum type="arabicPeriod"/>
+            </a:pPr>
+            <a:r>
+              <a:rPr lang="en-US"/>
+              <a:t>Average Rating of Cluster</a:t>
+            </a:r>
+          </a:p>
+          <a:p>
+            <a:pPr marL="571500" lvl="1" indent="-342900">
+              <a:buFont typeface="+mj-lt"/>
+              <a:buAutoNum type="arabicPeriod"/>
+            </a:pPr>
+            <a:r>
+              <a:rPr lang="en-US"/>
+              <a:t>Difference between Average rating of Cluster and average rating of the app</a:t>
+            </a:r>
+          </a:p>
+          <a:p>
+            <a:pPr marL="571500" lvl="1" indent="-342900">
+              <a:buFont typeface="+mj-lt"/>
+              <a:buAutoNum type="arabicPeriod"/>
+            </a:pPr>
+            <a:r>
+              <a:rPr lang="en-US"/>
+              <a:t>Average Difference of the ratings assigned by users in the Cluster who reviewed older versions</a:t>
+            </a:r>
+          </a:p>
+          <a:p>
+            <a:pPr marL="571500" lvl="1" indent="-342900">
+              <a:buFont typeface="+mj-lt"/>
+              <a:buAutoNum type="arabicPeriod"/>
+            </a:pPr>
+            <a:r>
+              <a:rPr lang="en-US"/>
+              <a:t>Number of hardware devices in Cluster</a:t>
+            </a:r>
+          </a:p>
+        </p:txBody>
+      </p:sp>
+    </p:spTree>
+    <p:extLst>
+      <p:ext uri="{BB962C8B-B14F-4D97-AF65-F5344CB8AC3E}">
+        <p14:creationId xmlns:p14="http://schemas.microsoft.com/office/powerpoint/2010/main" val="2539389966"/>
+      </p:ext>
+    </p:extLst>
+  </p:cSld>
+  <p:clrMapOvr>
+    <a:masterClrMapping/>
+  </p:clrMapOvr>
+</p:sld>
+</file>
+
+<file path=ppt/slides/slide12.xml><?xml version="1.0" encoding="utf-8"?>
+<p:sld xmlns:a="http://schemas.openxmlformats.org/drawingml/2006/main" xmlns:r="http://schemas.openxmlformats.org/officeDocument/2006/relationships" xmlns:p="http://schemas.openxmlformats.org/presentationml/2006/main">
+  <p:cSld>
+    <p:spTree>
+      <p:nvGrpSpPr>
+        <p:cNvPr id="1" name=""/>
+        <p:cNvGrpSpPr/>
+        <p:nvPr/>
+      </p:nvGrpSpPr>
+      <p:grpSpPr>
+        <a:xfrm>
+          <a:off x="0" y="0"/>
+          <a:ext cx="0" cy="0"/>
+          <a:chOff x="0" y="0"/>
+          <a:chExt cx="0" cy="0"/>
+        </a:xfrm>
+      </p:grpSpPr>
+      <p:sp>
+        <p:nvSpPr>
+          <p:cNvPr id="2" name="Title 1">
+            <a:extLst>
+              <a:ext uri="{FF2B5EF4-FFF2-40B4-BE49-F238E27FC236}">
+                <a16:creationId xmlns:a16="http://schemas.microsoft.com/office/drawing/2014/main" id="{AC7512B7-7B55-7B43-C005-6987AC29E451}"/>
+              </a:ext>
+            </a:extLst>
+          </p:cNvPr>
+          <p:cNvSpPr>
+            <a:spLocks noGrp="1"/>
+          </p:cNvSpPr>
+          <p:nvPr>
+            <p:ph type="title"/>
+          </p:nvPr>
+        </p:nvSpPr>
+        <p:spPr/>
+        <p:txBody>
+          <a:bodyPr/>
+          <a:lstStyle/>
+          <a:p>
+            <a:r>
+              <a:rPr lang="en-US"/>
+              <a:t>Method – Step 3 – Prioritizing Review clusters</a:t>
+            </a:r>
+          </a:p>
+        </p:txBody>
+      </p:sp>
+      <p:pic>
+        <p:nvPicPr>
+          <p:cNvPr id="5" name="Content Placeholder 4">
+            <a:extLst>
+              <a:ext uri="{FF2B5EF4-FFF2-40B4-BE49-F238E27FC236}">
+                <a16:creationId xmlns:a16="http://schemas.microsoft.com/office/drawing/2014/main" id="{8C7CC620-40AD-FDD5-5B8D-A2F0E0AC6599}"/>
+              </a:ext>
+            </a:extLst>
+          </p:cNvPr>
+          <p:cNvPicPr>
+            <a:picLocks noGrp="1" noChangeAspect="1"/>
+          </p:cNvPicPr>
+          <p:nvPr>
+            <p:ph idx="1"/>
+          </p:nvPr>
+        </p:nvPicPr>
+        <p:blipFill>
+          <a:blip r:embed="rId2"/>
+          <a:stretch>
+            <a:fillRect/>
+          </a:stretch>
+        </p:blipFill>
+        <p:spPr>
+          <a:xfrm>
+            <a:off x="1106385" y="2657475"/>
+            <a:ext cx="9979230" cy="2898919"/>
+          </a:xfrm>
+          <a:prstGeom prst="rect">
+            <a:avLst/>
+          </a:prstGeom>
+        </p:spPr>
+      </p:pic>
+      <p:sp>
+        <p:nvSpPr>
+          <p:cNvPr id="6" name="TextBox 5">
+            <a:extLst>
+              <a:ext uri="{FF2B5EF4-FFF2-40B4-BE49-F238E27FC236}">
+                <a16:creationId xmlns:a16="http://schemas.microsoft.com/office/drawing/2014/main" id="{5487ED87-F6A7-6B77-1C3A-E00A97080A9F}"/>
+              </a:ext>
+            </a:extLst>
+          </p:cNvPr>
+          <p:cNvSpPr txBox="1"/>
+          <p:nvPr/>
+        </p:nvSpPr>
+        <p:spPr>
+          <a:xfrm>
+            <a:off x="4769603" y="5754808"/>
+            <a:ext cx="2652793" cy="276999"/>
+          </a:xfrm>
+          <a:prstGeom prst="rect">
+            <a:avLst/>
+          </a:prstGeom>
+          <a:noFill/>
+        </p:spPr>
+        <p:txBody>
+          <a:bodyPr wrap="square" rtlCol="0">
+            <a:spAutoFit/>
+          </a:bodyPr>
+          <a:lstStyle/>
+          <a:p>
+            <a:r>
+              <a:rPr lang="en-US" sz="1200" i="1">
+                <a:solidFill>
+                  <a:schemeClr val="bg1">
+                    <a:lumMod val="50000"/>
+                  </a:schemeClr>
+                </a:solidFill>
+              </a:rPr>
+              <a:t>Example Regression Tree when prioritizing</a:t>
+            </a:r>
+          </a:p>
+        </p:txBody>
+      </p:sp>
+    </p:spTree>
+    <p:extLst>
+      <p:ext uri="{BB962C8B-B14F-4D97-AF65-F5344CB8AC3E}">
+        <p14:creationId xmlns:p14="http://schemas.microsoft.com/office/powerpoint/2010/main" val="596634680"/>
+      </p:ext>
+    </p:extLst>
+  </p:cSld>
+  <p:clrMapOvr>
+    <a:masterClrMapping/>
+  </p:clrMapOvr>
+</p:sld>
+</file>
+
+<file path=ppt/slides/slide13.xml><?xml version="1.0" encoding="utf-8"?>
+<p:sld xmlns:a="http://schemas.openxmlformats.org/drawingml/2006/main" xmlns:r="http://schemas.openxmlformats.org/officeDocument/2006/relationships" xmlns:p="http://schemas.openxmlformats.org/presentationml/2006/main">
+  <p:cSld>
+    <p:spTree>
+      <p:nvGrpSpPr>
+        <p:cNvPr id="1" name=""/>
+        <p:cNvGrpSpPr/>
+        <p:nvPr/>
+      </p:nvGrpSpPr>
+      <p:grpSpPr>
+        <a:xfrm>
+          <a:off x="0" y="0"/>
+          <a:ext cx="0" cy="0"/>
+          <a:chOff x="0" y="0"/>
+          <a:chExt cx="0" cy="0"/>
+        </a:xfrm>
+      </p:grpSpPr>
+      <p:sp>
+        <p:nvSpPr>
+          <p:cNvPr id="2" name="Title 1">
+            <a:extLst>
+              <a:ext uri="{FF2B5EF4-FFF2-40B4-BE49-F238E27FC236}">
+                <a16:creationId xmlns:a16="http://schemas.microsoft.com/office/drawing/2014/main" id="{D1D8C650-1EA4-81D8-ED1B-455385CFCC5A}"/>
+              </a:ext>
+            </a:extLst>
+          </p:cNvPr>
+          <p:cNvSpPr>
+            <a:spLocks noGrp="1"/>
+          </p:cNvSpPr>
+          <p:nvPr>
+            <p:ph type="title"/>
+          </p:nvPr>
+        </p:nvSpPr>
+        <p:spPr/>
+        <p:txBody>
+          <a:bodyPr/>
+          <a:lstStyle/>
+          <a:p>
+            <a:r>
+              <a:rPr lang="en-US"/>
+              <a:t>CLAP - UI</a:t>
+            </a:r>
+          </a:p>
+        </p:txBody>
+      </p:sp>
+      <p:pic>
+        <p:nvPicPr>
+          <p:cNvPr id="5" name="Content Placeholder 4">
+            <a:extLst>
+              <a:ext uri="{FF2B5EF4-FFF2-40B4-BE49-F238E27FC236}">
+                <a16:creationId xmlns:a16="http://schemas.microsoft.com/office/drawing/2014/main" id="{A8BB1C0B-2576-58A7-01A2-A36B96300EE0}"/>
+              </a:ext>
+            </a:extLst>
+          </p:cNvPr>
+          <p:cNvPicPr>
+            <a:picLocks noGrp="1" noChangeAspect="1"/>
+          </p:cNvPicPr>
+          <p:nvPr>
+            <p:ph idx="1"/>
+          </p:nvPr>
+        </p:nvPicPr>
+        <p:blipFill>
+          <a:blip r:embed="rId2"/>
+          <a:stretch>
+            <a:fillRect/>
+          </a:stretch>
+        </p:blipFill>
+        <p:spPr>
+          <a:xfrm>
+            <a:off x="3998174" y="2016125"/>
+            <a:ext cx="4509977" cy="3449638"/>
+          </a:xfrm>
+          <a:prstGeom prst="rect">
+            <a:avLst/>
+          </a:prstGeom>
+        </p:spPr>
+      </p:pic>
+    </p:spTree>
+    <p:extLst>
+      <p:ext uri="{BB962C8B-B14F-4D97-AF65-F5344CB8AC3E}">
+        <p14:creationId xmlns:p14="http://schemas.microsoft.com/office/powerpoint/2010/main" val="3420494535"/>
+      </p:ext>
+    </p:extLst>
+  </p:cSld>
+  <p:clrMapOvr>
+    <a:masterClrMapping/>
+  </p:clrMapOvr>
+</p:sld>
+</file>
+
+<file path=ppt/slides/slide14.xml><?xml version="1.0" encoding="utf-8"?>
+<p:sld xmlns:a="http://schemas.openxmlformats.org/drawingml/2006/main" xmlns:r="http://schemas.openxmlformats.org/officeDocument/2006/relationships" xmlns:p="http://schemas.openxmlformats.org/presentationml/2006/main">
+  <p:cSld>
+    <p:spTree>
+      <p:nvGrpSpPr>
+        <p:cNvPr id="1" name="">
+          <a:extLst>
+            <a:ext uri="{FF2B5EF4-FFF2-40B4-BE49-F238E27FC236}">
+              <a16:creationId xmlns:a16="http://schemas.microsoft.com/office/drawing/2014/main" id="{5C12A56E-D3B1-FE6E-8C77-F103FB590689}"/>
+            </a:ext>
+          </a:extLst>
+        </p:cNvPr>
+        <p:cNvGrpSpPr/>
+        <p:nvPr/>
+      </p:nvGrpSpPr>
+      <p:grpSpPr>
+        <a:xfrm>
+          <a:off x="0" y="0"/>
+          <a:ext cx="0" cy="0"/>
+          <a:chOff x="0" y="0"/>
+          <a:chExt cx="0" cy="0"/>
+        </a:xfrm>
+      </p:grpSpPr>
+      <p:sp>
+        <p:nvSpPr>
+          <p:cNvPr id="2" name="Title 1">
+            <a:extLst>
+              <a:ext uri="{FF2B5EF4-FFF2-40B4-BE49-F238E27FC236}">
+                <a16:creationId xmlns:a16="http://schemas.microsoft.com/office/drawing/2014/main" id="{6E9D1834-4204-F95E-5530-1A36CD25F82E}"/>
+              </a:ext>
+            </a:extLst>
+          </p:cNvPr>
+          <p:cNvSpPr>
+            <a:spLocks noGrp="1"/>
+          </p:cNvSpPr>
+          <p:nvPr>
+            <p:ph type="title"/>
+          </p:nvPr>
+        </p:nvSpPr>
+        <p:spPr/>
+        <p:txBody>
+          <a:bodyPr/>
+          <a:lstStyle/>
+          <a:p>
+            <a:r>
+              <a:rPr lang="en-US"/>
+              <a:t>results</a:t>
+            </a:r>
+          </a:p>
+        </p:txBody>
+      </p:sp>
+      <p:sp>
+        <p:nvSpPr>
+          <p:cNvPr id="3" name="Content Placeholder 2">
+            <a:extLst>
+              <a:ext uri="{FF2B5EF4-FFF2-40B4-BE49-F238E27FC236}">
+                <a16:creationId xmlns:a16="http://schemas.microsoft.com/office/drawing/2014/main" id="{8403CEEA-219A-FDE6-14F9-E31B0E0F74E0}"/>
+              </a:ext>
+            </a:extLst>
+          </p:cNvPr>
+          <p:cNvSpPr>
+            <a:spLocks noGrp="1"/>
+          </p:cNvSpPr>
+          <p:nvPr>
+            <p:ph idx="1"/>
+          </p:nvPr>
+        </p:nvSpPr>
+        <p:spPr>
+          <a:xfrm>
+            <a:off x="3161225" y="2257044"/>
+            <a:ext cx="5858344" cy="4020865"/>
+          </a:xfrm>
+        </p:spPr>
+        <p:txBody>
+          <a:bodyPr vert="horz" lIns="91440" tIns="45720" rIns="91440" bIns="45720" rtlCol="0" anchor="t">
+            <a:normAutofit/>
+          </a:bodyPr>
+          <a:lstStyle/>
+          <a:p>
+            <a:pPr marL="0" indent="0" algn="ctr">
+              <a:buNone/>
+            </a:pPr>
+            <a:r>
+              <a:rPr lang="en-US" sz="2000"/>
+              <a:t>To</a:t>
+            </a:r>
+            <a:r>
+              <a:rPr lang="en-US" sz="2000">
+                <a:ea typeface="+mn-lt"/>
+                <a:cs typeface="+mn-lt"/>
+              </a:rPr>
+              <a:t> answer research questions, the author listed the objects used to further conduct their research.</a:t>
+            </a:r>
+          </a:p>
+          <a:p>
+            <a:pPr marL="0" indent="0">
+              <a:buNone/>
+            </a:pPr>
+            <a:br>
+              <a:rPr lang="en-US">
+                <a:ea typeface="+mn-lt"/>
+                <a:cs typeface="+mn-lt"/>
+              </a:rPr>
+            </a:br>
+            <a:br>
+              <a:rPr lang="en-US">
+                <a:ea typeface="+mn-lt"/>
+                <a:cs typeface="+mn-lt"/>
+              </a:rPr>
+            </a:br>
+            <a:endParaRPr lang="en-US"/>
+          </a:p>
+        </p:txBody>
+      </p:sp>
+      <p:pic>
+        <p:nvPicPr>
+          <p:cNvPr id="5" name="Picture 4" descr="A close-up of a paper&#10;&#10;AI-generated content may be incorrect.">
+            <a:extLst>
+              <a:ext uri="{FF2B5EF4-FFF2-40B4-BE49-F238E27FC236}">
+                <a16:creationId xmlns:a16="http://schemas.microsoft.com/office/drawing/2014/main" id="{F1B2BE95-BF9B-A38D-1357-7FEDB72E5321}"/>
+              </a:ext>
+            </a:extLst>
+          </p:cNvPr>
+          <p:cNvPicPr>
+            <a:picLocks noChangeAspect="1"/>
+          </p:cNvPicPr>
+          <p:nvPr/>
+        </p:nvPicPr>
+        <p:blipFill>
+          <a:blip r:embed="rId2"/>
+          <a:stretch>
+            <a:fillRect/>
+          </a:stretch>
+        </p:blipFill>
+        <p:spPr>
+          <a:xfrm>
+            <a:off x="1207994" y="3423397"/>
+            <a:ext cx="9776009" cy="2241175"/>
+          </a:xfrm>
+          <a:prstGeom prst="rect">
+            <a:avLst/>
+          </a:prstGeom>
+        </p:spPr>
+      </p:pic>
+    </p:spTree>
+    <p:extLst>
+      <p:ext uri="{BB962C8B-B14F-4D97-AF65-F5344CB8AC3E}">
+        <p14:creationId xmlns:p14="http://schemas.microsoft.com/office/powerpoint/2010/main" val="3105816496"/>
+      </p:ext>
+    </p:extLst>
+  </p:cSld>
+  <p:clrMapOvr>
+    <a:masterClrMapping/>
+  </p:clrMapOvr>
+</p:sld>
+</file>
+
+<file path=ppt/slides/slide15.xml><?xml version="1.0" encoding="utf-8"?>
+<p:sld xmlns:a="http://schemas.openxmlformats.org/drawingml/2006/main" xmlns:r="http://schemas.openxmlformats.org/officeDocument/2006/relationships" xmlns:p="http://schemas.openxmlformats.org/presentationml/2006/main">
+  <p:cSld>
+    <p:spTree>
+      <p:nvGrpSpPr>
+        <p:cNvPr id="1" name=""/>
+        <p:cNvGrpSpPr/>
+        <p:nvPr/>
+      </p:nvGrpSpPr>
+      <p:grpSpPr>
+        <a:xfrm>
+          <a:off x="0" y="0"/>
+          <a:ext cx="0" cy="0"/>
+          <a:chOff x="0" y="0"/>
+          <a:chExt cx="0" cy="0"/>
+        </a:xfrm>
+      </p:grpSpPr>
+      <p:sp>
+        <p:nvSpPr>
+          <p:cNvPr id="2" name="Title 1">
+            <a:extLst>
+              <a:ext uri="{FF2B5EF4-FFF2-40B4-BE49-F238E27FC236}">
+                <a16:creationId xmlns:a16="http://schemas.microsoft.com/office/drawing/2014/main" id="{B2B1A80C-97C8-FD4E-768B-3D29D4BEDC2C}"/>
+              </a:ext>
+            </a:extLst>
+          </p:cNvPr>
+          <p:cNvSpPr>
+            <a:spLocks noGrp="1"/>
+          </p:cNvSpPr>
+          <p:nvPr>
+            <p:ph type="title"/>
+          </p:nvPr>
+        </p:nvSpPr>
+        <p:spPr/>
+        <p:txBody>
+          <a:bodyPr/>
+          <a:lstStyle/>
+          <a:p>
+            <a:r>
+              <a:rPr lang="en-US"/>
+              <a:t>Rq 1 – Classification Accuracy</a:t>
+            </a:r>
+          </a:p>
+        </p:txBody>
+      </p:sp>
+      <p:sp>
+        <p:nvSpPr>
+          <p:cNvPr id="3" name="Content Placeholder 2">
+            <a:extLst>
+              <a:ext uri="{FF2B5EF4-FFF2-40B4-BE49-F238E27FC236}">
+                <a16:creationId xmlns:a16="http://schemas.microsoft.com/office/drawing/2014/main" id="{5D1521FA-7F31-C3DF-A99D-FA91508766F7}"/>
+              </a:ext>
+            </a:extLst>
+          </p:cNvPr>
+          <p:cNvSpPr>
+            <a:spLocks noGrp="1"/>
+          </p:cNvSpPr>
+          <p:nvPr>
+            <p:ph idx="1"/>
+          </p:nvPr>
+        </p:nvSpPr>
+        <p:spPr>
+          <a:xfrm>
+            <a:off x="348548" y="2559603"/>
+            <a:ext cx="5264433" cy="4144129"/>
+          </a:xfrm>
+        </p:spPr>
+        <p:txBody>
+          <a:bodyPr vert="horz" lIns="91440" tIns="45720" rIns="91440" bIns="45720" rtlCol="0" anchor="t">
+            <a:normAutofit fontScale="85000" lnSpcReduction="10000"/>
+          </a:bodyPr>
+          <a:lstStyle/>
+          <a:p>
+            <a:r>
+              <a:rPr lang="en-US"/>
+              <a:t>Research Question: </a:t>
+            </a:r>
+            <a:r>
+              <a:rPr lang="en-US">
+                <a:ea typeface="+mn-lt"/>
+                <a:cs typeface="+mn-lt"/>
+              </a:rPr>
+              <a:t>How accurate is CLAP in classifying user reviews in the considered categories?</a:t>
+            </a:r>
+          </a:p>
+          <a:p>
+            <a:r>
+              <a:rPr lang="en-US">
+                <a:ea typeface="+mn-lt"/>
+                <a:cs typeface="+mn-lt"/>
+              </a:rPr>
+              <a:t>Using 1000 manually labeled reviews and applying text preprocessing techniques, performance improved from 70% to an overall accuracy of 86%.</a:t>
+            </a:r>
+          </a:p>
+          <a:p>
+            <a:r>
+              <a:rPr lang="en-US">
+                <a:ea typeface="+mn-lt"/>
+                <a:cs typeface="+mn-lt"/>
+              </a:rPr>
+              <a:t>CLAP is reliable in terms of distinguishing between bug reports, feature requests, and other reviews</a:t>
+            </a:r>
+          </a:p>
+          <a:p>
+            <a:pPr marL="0" indent="0">
+              <a:buNone/>
+            </a:pPr>
+            <a:br>
+              <a:rPr lang="en-US">
+                <a:ea typeface="+mn-lt"/>
+                <a:cs typeface="+mn-lt"/>
+              </a:rPr>
+            </a:br>
+            <a:br>
+              <a:rPr lang="en-US">
+                <a:ea typeface="+mn-lt"/>
+                <a:cs typeface="+mn-lt"/>
+              </a:rPr>
+            </a:br>
+            <a:endParaRPr lang="en-US"/>
+          </a:p>
+        </p:txBody>
+      </p:sp>
+      <p:pic>
+        <p:nvPicPr>
+          <p:cNvPr id="4" name="Picture 3">
+            <a:extLst>
+              <a:ext uri="{FF2B5EF4-FFF2-40B4-BE49-F238E27FC236}">
+                <a16:creationId xmlns:a16="http://schemas.microsoft.com/office/drawing/2014/main" id="{79A1117C-AD45-B857-C25B-33FB381FB410}"/>
+              </a:ext>
+            </a:extLst>
+          </p:cNvPr>
+          <p:cNvPicPr>
+            <a:picLocks noChangeAspect="1"/>
+          </p:cNvPicPr>
+          <p:nvPr/>
+        </p:nvPicPr>
+        <p:blipFill>
+          <a:blip r:embed="rId2"/>
+          <a:stretch>
+            <a:fillRect/>
+          </a:stretch>
+        </p:blipFill>
+        <p:spPr>
+          <a:xfrm>
+            <a:off x="5611907" y="2391337"/>
+            <a:ext cx="6246159" cy="3688975"/>
+          </a:xfrm>
+          <a:prstGeom prst="rect">
+            <a:avLst/>
+          </a:prstGeom>
+        </p:spPr>
+      </p:pic>
+    </p:spTree>
+    <p:extLst>
+      <p:ext uri="{BB962C8B-B14F-4D97-AF65-F5344CB8AC3E}">
+        <p14:creationId xmlns:p14="http://schemas.microsoft.com/office/powerpoint/2010/main" val="3621439300"/>
+      </p:ext>
+    </p:extLst>
+  </p:cSld>
+  <p:clrMapOvr>
+    <a:masterClrMapping/>
+  </p:clrMapOvr>
+</p:sld>
+</file>
+
+<file path=ppt/slides/slide16.xml><?xml version="1.0" encoding="utf-8"?>
+<p:sld xmlns:a="http://schemas.openxmlformats.org/drawingml/2006/main" xmlns:r="http://schemas.openxmlformats.org/officeDocument/2006/relationships" xmlns:p="http://schemas.openxmlformats.org/presentationml/2006/main">
+  <p:cSld>
+    <p:spTree>
+      <p:nvGrpSpPr>
+        <p:cNvPr id="1" name="">
+          <a:extLst>
+            <a:ext uri="{FF2B5EF4-FFF2-40B4-BE49-F238E27FC236}">
+              <a16:creationId xmlns:a16="http://schemas.microsoft.com/office/drawing/2014/main" id="{C0B674C8-DB18-B810-734F-E74A98D90BF4}"/>
+            </a:ext>
+          </a:extLst>
+        </p:cNvPr>
+        <p:cNvGrpSpPr/>
+        <p:nvPr/>
+      </p:nvGrpSpPr>
+      <p:grpSpPr>
+        <a:xfrm>
+          <a:off x="0" y="0"/>
+          <a:ext cx="0" cy="0"/>
+          <a:chOff x="0" y="0"/>
+          <a:chExt cx="0" cy="0"/>
+        </a:xfrm>
+      </p:grpSpPr>
+      <p:sp>
+        <p:nvSpPr>
+          <p:cNvPr id="2" name="Title 1">
+            <a:extLst>
+              <a:ext uri="{FF2B5EF4-FFF2-40B4-BE49-F238E27FC236}">
+                <a16:creationId xmlns:a16="http://schemas.microsoft.com/office/drawing/2014/main" id="{F9E2BB49-A389-DED3-062A-4BD369B5A44C}"/>
+              </a:ext>
+            </a:extLst>
+          </p:cNvPr>
+          <p:cNvSpPr>
+            <a:spLocks noGrp="1"/>
+          </p:cNvSpPr>
+          <p:nvPr>
+            <p:ph type="title"/>
+          </p:nvPr>
+        </p:nvSpPr>
+        <p:spPr/>
+        <p:txBody>
+          <a:bodyPr/>
+          <a:lstStyle/>
+          <a:p>
+            <a:r>
+              <a:rPr lang="en-US"/>
+              <a:t>Rq 2 – clustering quality</a:t>
+            </a:r>
+          </a:p>
+        </p:txBody>
+      </p:sp>
+      <p:sp>
+        <p:nvSpPr>
+          <p:cNvPr id="3" name="Content Placeholder 2">
+            <a:extLst>
+              <a:ext uri="{FF2B5EF4-FFF2-40B4-BE49-F238E27FC236}">
+                <a16:creationId xmlns:a16="http://schemas.microsoft.com/office/drawing/2014/main" id="{1389D8CB-1B32-ADF8-8C77-67C0968008E0}"/>
+              </a:ext>
+            </a:extLst>
+          </p:cNvPr>
+          <p:cNvSpPr>
+            <a:spLocks noGrp="1"/>
+          </p:cNvSpPr>
+          <p:nvPr>
+            <p:ph idx="1"/>
+          </p:nvPr>
+        </p:nvSpPr>
+        <p:spPr>
+          <a:xfrm>
+            <a:off x="348548" y="2559603"/>
+            <a:ext cx="5264433" cy="4144129"/>
+          </a:xfrm>
+        </p:spPr>
+        <p:txBody>
+          <a:bodyPr vert="horz" lIns="91440" tIns="45720" rIns="91440" bIns="45720" rtlCol="0" anchor="t">
+            <a:normAutofit fontScale="85000" lnSpcReduction="20000"/>
+          </a:bodyPr>
+          <a:lstStyle/>
+          <a:p>
+            <a:r>
+              <a:rPr lang="en-US"/>
+              <a:t>Research Question:</a:t>
+            </a:r>
+            <a:r>
+              <a:rPr lang="en-US">
+                <a:ea typeface="+mn-lt"/>
+                <a:cs typeface="+mn-lt"/>
+              </a:rPr>
+              <a:t> How meaningful are the clusters of reviews generated by CLAP? </a:t>
+            </a:r>
+          </a:p>
+          <a:p>
+            <a:r>
+              <a:rPr lang="en-US">
+                <a:ea typeface="+mn-lt"/>
+                <a:cs typeface="+mn-lt"/>
+              </a:rPr>
+              <a:t>Experienced developers manually clustered a set of bug reports/features (called an Oracle).</a:t>
+            </a:r>
+          </a:p>
+          <a:p>
+            <a:r>
+              <a:rPr lang="en-US">
+                <a:ea typeface="+mn-lt"/>
+                <a:cs typeface="+mn-lt"/>
+              </a:rPr>
+              <a:t>Those clusters were used alongside clusters produced by CLAP to tune the epsilon parameter for step 2, and achieved an 87% similarity for feature requests and an overall similarity of 77%.</a:t>
+            </a:r>
+          </a:p>
+          <a:p>
+            <a:endParaRPr lang="en-US">
+              <a:ea typeface="+mn-lt"/>
+              <a:cs typeface="+mn-lt"/>
+            </a:endParaRPr>
+          </a:p>
+          <a:p>
+            <a:pPr marL="0" indent="0">
+              <a:buNone/>
+            </a:pPr>
+            <a:endParaRPr lang="en-US">
+              <a:ea typeface="+mn-lt"/>
+              <a:cs typeface="+mn-lt"/>
+            </a:endParaRPr>
+          </a:p>
+          <a:p>
+            <a:pPr marL="0" indent="0">
+              <a:buNone/>
+            </a:pPr>
+            <a:br>
+              <a:rPr lang="en-US">
+                <a:ea typeface="+mn-lt"/>
+                <a:cs typeface="+mn-lt"/>
+              </a:rPr>
+            </a:br>
+            <a:br>
+              <a:rPr lang="en-US">
+                <a:ea typeface="+mn-lt"/>
+                <a:cs typeface="+mn-lt"/>
+              </a:rPr>
+            </a:br>
+            <a:endParaRPr lang="en-US"/>
+          </a:p>
+        </p:txBody>
+      </p:sp>
+      <p:pic>
+        <p:nvPicPr>
+          <p:cNvPr id="5" name="Picture 4" descr="A table with numbers and text&#10;&#10;AI-generated content may be incorrect.">
+            <a:extLst>
+              <a:ext uri="{FF2B5EF4-FFF2-40B4-BE49-F238E27FC236}">
+                <a16:creationId xmlns:a16="http://schemas.microsoft.com/office/drawing/2014/main" id="{325E7108-81FD-1F8F-A4E5-084266844926}"/>
+              </a:ext>
+            </a:extLst>
+          </p:cNvPr>
+          <p:cNvPicPr>
+            <a:picLocks noChangeAspect="1"/>
+          </p:cNvPicPr>
+          <p:nvPr/>
+        </p:nvPicPr>
+        <p:blipFill>
+          <a:blip r:embed="rId2"/>
+          <a:stretch>
+            <a:fillRect/>
+          </a:stretch>
+        </p:blipFill>
+        <p:spPr>
+          <a:xfrm>
+            <a:off x="5869641" y="4737287"/>
+            <a:ext cx="6145305" cy="1798544"/>
+          </a:xfrm>
+          <a:prstGeom prst="rect">
+            <a:avLst/>
+          </a:prstGeom>
+        </p:spPr>
+      </p:pic>
+      <p:pic>
+        <p:nvPicPr>
+          <p:cNvPr id="6" name="Picture 5" descr="A graph with lines and dots&#10;&#10;AI-generated content may be incorrect.">
+            <a:extLst>
+              <a:ext uri="{FF2B5EF4-FFF2-40B4-BE49-F238E27FC236}">
+                <a16:creationId xmlns:a16="http://schemas.microsoft.com/office/drawing/2014/main" id="{2ADCD0B9-FF07-FFBB-6F81-E98562E2E4EA}"/>
+              </a:ext>
+            </a:extLst>
+          </p:cNvPr>
+          <p:cNvPicPr>
+            <a:picLocks noChangeAspect="1"/>
+          </p:cNvPicPr>
+          <p:nvPr/>
+        </p:nvPicPr>
+        <p:blipFill>
+          <a:blip r:embed="rId3"/>
+          <a:stretch>
+            <a:fillRect/>
+          </a:stretch>
+        </p:blipFill>
+        <p:spPr>
+          <a:xfrm>
+            <a:off x="7739903" y="2387974"/>
+            <a:ext cx="2415989" cy="2070848"/>
+          </a:xfrm>
+          <a:prstGeom prst="rect">
+            <a:avLst/>
+          </a:prstGeom>
+        </p:spPr>
+      </p:pic>
+    </p:spTree>
+    <p:extLst>
+      <p:ext uri="{BB962C8B-B14F-4D97-AF65-F5344CB8AC3E}">
+        <p14:creationId xmlns:p14="http://schemas.microsoft.com/office/powerpoint/2010/main" val="2409727910"/>
+      </p:ext>
+    </p:extLst>
+  </p:cSld>
+  <p:clrMapOvr>
+    <a:masterClrMapping/>
+  </p:clrMapOvr>
+</p:sld>
+</file>
+
+<file path=ppt/slides/slide17.xml><?xml version="1.0" encoding="utf-8"?>
+<p:sld xmlns:a="http://schemas.openxmlformats.org/drawingml/2006/main" xmlns:r="http://schemas.openxmlformats.org/officeDocument/2006/relationships" xmlns:p="http://schemas.openxmlformats.org/presentationml/2006/main">
+  <p:cSld>
+    <p:spTree>
+      <p:nvGrpSpPr>
+        <p:cNvPr id="1" name="">
+          <a:extLst>
+            <a:ext uri="{FF2B5EF4-FFF2-40B4-BE49-F238E27FC236}">
+              <a16:creationId xmlns:a16="http://schemas.microsoft.com/office/drawing/2014/main" id="{BFC1F3FA-9A8D-BEEF-2EAF-19B5046BF933}"/>
+            </a:ext>
+          </a:extLst>
+        </p:cNvPr>
+        <p:cNvGrpSpPr/>
+        <p:nvPr/>
+      </p:nvGrpSpPr>
+      <p:grpSpPr>
+        <a:xfrm>
+          <a:off x="0" y="0"/>
+          <a:ext cx="0" cy="0"/>
+          <a:chOff x="0" y="0"/>
+          <a:chExt cx="0" cy="0"/>
+        </a:xfrm>
+      </p:grpSpPr>
+      <p:sp>
+        <p:nvSpPr>
+          <p:cNvPr id="2" name="Title 1">
+            <a:extLst>
+              <a:ext uri="{FF2B5EF4-FFF2-40B4-BE49-F238E27FC236}">
+                <a16:creationId xmlns:a16="http://schemas.microsoft.com/office/drawing/2014/main" id="{04B88FFD-6F1F-5944-4D62-FB191B005180}"/>
+              </a:ext>
+            </a:extLst>
+          </p:cNvPr>
+          <p:cNvSpPr>
+            <a:spLocks noGrp="1"/>
+          </p:cNvSpPr>
+          <p:nvPr>
+            <p:ph type="title"/>
+          </p:nvPr>
+        </p:nvSpPr>
+        <p:spPr/>
+        <p:txBody>
+          <a:bodyPr/>
+          <a:lstStyle/>
+          <a:p>
+            <a:r>
+              <a:rPr lang="en-US"/>
+              <a:t>Rq 3 – prioritization accuracy</a:t>
+            </a:r>
+          </a:p>
+        </p:txBody>
+      </p:sp>
+      <p:sp>
+        <p:nvSpPr>
+          <p:cNvPr id="3" name="Content Placeholder 2">
+            <a:extLst>
+              <a:ext uri="{FF2B5EF4-FFF2-40B4-BE49-F238E27FC236}">
+                <a16:creationId xmlns:a16="http://schemas.microsoft.com/office/drawing/2014/main" id="{A5396FEA-DB69-3B35-F5EE-C1C8DF87795B}"/>
+              </a:ext>
+            </a:extLst>
+          </p:cNvPr>
+          <p:cNvSpPr>
+            <a:spLocks noGrp="1"/>
+          </p:cNvSpPr>
+          <p:nvPr>
+            <p:ph idx="1"/>
+          </p:nvPr>
+        </p:nvSpPr>
+        <p:spPr>
+          <a:xfrm>
+            <a:off x="348548" y="2559603"/>
+            <a:ext cx="5264433" cy="4726834"/>
+          </a:xfrm>
+        </p:spPr>
+        <p:txBody>
+          <a:bodyPr vert="horz" lIns="91440" tIns="45720" rIns="91440" bIns="45720" rtlCol="0" anchor="t">
+            <a:normAutofit fontScale="85000" lnSpcReduction="20000"/>
+          </a:bodyPr>
+          <a:lstStyle/>
+          <a:p>
+            <a:r>
+              <a:rPr lang="en-US"/>
+              <a:t>Research Question:</a:t>
+            </a:r>
+            <a:r>
+              <a:rPr lang="en-US">
+                <a:ea typeface="+mn-lt"/>
+                <a:cs typeface="+mn-lt"/>
+              </a:rPr>
+              <a:t> How accurate is the new features / bug fixing prioritization recommended by CLAP?</a:t>
+            </a:r>
+            <a:endParaRPr lang="en-US"/>
+          </a:p>
+          <a:p>
+            <a:r>
+              <a:rPr lang="en-US">
+                <a:ea typeface="+mn-lt"/>
+                <a:cs typeface="+mn-lt"/>
+              </a:rPr>
+              <a:t>They used an Android user reviews dataset to make another Oracle of varying levels of priority</a:t>
+            </a:r>
+          </a:p>
+          <a:p>
+            <a:r>
+              <a:rPr lang="en-US">
+                <a:ea typeface="+mn-lt"/>
+                <a:cs typeface="+mn-lt"/>
+              </a:rPr>
+              <a:t>For manually corrected categorization and clustering, CLAP achieved an accuracy of 87% and 80% for bugs and features respectively.</a:t>
+            </a:r>
+            <a:endParaRPr lang="en-US"/>
+          </a:p>
+          <a:p>
+            <a:r>
+              <a:rPr lang="en-US">
+                <a:ea typeface="+mn-lt"/>
+                <a:cs typeface="+mn-lt"/>
+              </a:rPr>
+              <a:t>In a fully automated setting, the accuracy stuck around the 70% mark.</a:t>
+            </a:r>
+          </a:p>
+          <a:p>
+            <a:endParaRPr lang="en-US">
+              <a:ea typeface="+mn-lt"/>
+              <a:cs typeface="+mn-lt"/>
+            </a:endParaRPr>
+          </a:p>
+          <a:p>
+            <a:pPr marL="0" indent="0">
+              <a:buNone/>
+            </a:pPr>
+            <a:endParaRPr lang="en-US">
+              <a:ea typeface="+mn-lt"/>
+              <a:cs typeface="+mn-lt"/>
+            </a:endParaRPr>
+          </a:p>
+          <a:p>
+            <a:pPr marL="0" indent="0">
+              <a:buNone/>
+            </a:pPr>
+            <a:br>
+              <a:rPr lang="en-US">
+                <a:ea typeface="+mn-lt"/>
+                <a:cs typeface="+mn-lt"/>
+              </a:rPr>
+            </a:br>
+            <a:br>
+              <a:rPr lang="en-US">
+                <a:ea typeface="+mn-lt"/>
+                <a:cs typeface="+mn-lt"/>
+              </a:rPr>
+            </a:br>
+            <a:endParaRPr lang="en-US">
+              <a:ea typeface="+mn-lt"/>
+              <a:cs typeface="+mn-lt"/>
+            </a:endParaRPr>
+          </a:p>
+        </p:txBody>
+      </p:sp>
+      <p:pic>
+        <p:nvPicPr>
+          <p:cNvPr id="4" name="Picture 3" descr="A table with text and numbers&#10;&#10;AI-generated content may be incorrect.">
+            <a:extLst>
+              <a:ext uri="{FF2B5EF4-FFF2-40B4-BE49-F238E27FC236}">
+                <a16:creationId xmlns:a16="http://schemas.microsoft.com/office/drawing/2014/main" id="{0D9147D9-0AA5-EA19-66A7-F4D087F27659}"/>
+              </a:ext>
+            </a:extLst>
+          </p:cNvPr>
+          <p:cNvPicPr>
+            <a:picLocks noChangeAspect="1"/>
+          </p:cNvPicPr>
+          <p:nvPr/>
+        </p:nvPicPr>
+        <p:blipFill>
+          <a:blip r:embed="rId2"/>
+          <a:stretch>
+            <a:fillRect/>
+          </a:stretch>
+        </p:blipFill>
+        <p:spPr>
+          <a:xfrm>
+            <a:off x="5791200" y="3058646"/>
+            <a:ext cx="5943600" cy="2264708"/>
+          </a:xfrm>
+          <a:prstGeom prst="rect">
+            <a:avLst/>
+          </a:prstGeom>
+        </p:spPr>
+      </p:pic>
+    </p:spTree>
+    <p:extLst>
+      <p:ext uri="{BB962C8B-B14F-4D97-AF65-F5344CB8AC3E}">
+        <p14:creationId xmlns:p14="http://schemas.microsoft.com/office/powerpoint/2010/main" val="2044678048"/>
+      </p:ext>
+    </p:extLst>
+  </p:cSld>
+  <p:clrMapOvr>
+    <a:masterClrMapping/>
+  </p:clrMapOvr>
+</p:sld>
+</file>
+
+<file path=ppt/slides/slide18.xml><?xml version="1.0" encoding="utf-8"?>
+<p:sld xmlns:a="http://schemas.openxmlformats.org/drawingml/2006/main" xmlns:r="http://schemas.openxmlformats.org/officeDocument/2006/relationships" xmlns:p="http://schemas.openxmlformats.org/presentationml/2006/main">
+  <p:cSld>
+    <p:spTree>
+      <p:nvGrpSpPr>
+        <p:cNvPr id="1" name="">
+          <a:extLst>
+            <a:ext uri="{FF2B5EF4-FFF2-40B4-BE49-F238E27FC236}">
+              <a16:creationId xmlns:a16="http://schemas.microsoft.com/office/drawing/2014/main" id="{094165B0-048E-1B66-E9CD-307A1CB9BABC}"/>
+            </a:ext>
+          </a:extLst>
+        </p:cNvPr>
+        <p:cNvGrpSpPr/>
+        <p:nvPr/>
+      </p:nvGrpSpPr>
+      <p:grpSpPr>
+        <a:xfrm>
+          <a:off x="0" y="0"/>
+          <a:ext cx="0" cy="0"/>
+          <a:chOff x="0" y="0"/>
+          <a:chExt cx="0" cy="0"/>
+        </a:xfrm>
+      </p:grpSpPr>
+      <p:sp>
+        <p:nvSpPr>
+          <p:cNvPr id="2" name="Title 1">
+            <a:extLst>
+              <a:ext uri="{FF2B5EF4-FFF2-40B4-BE49-F238E27FC236}">
+                <a16:creationId xmlns:a16="http://schemas.microsoft.com/office/drawing/2014/main" id="{C1132972-FE7D-680A-D634-D41E34ECA654}"/>
+              </a:ext>
+            </a:extLst>
+          </p:cNvPr>
+          <p:cNvSpPr>
+            <a:spLocks noGrp="1"/>
+          </p:cNvSpPr>
+          <p:nvPr>
+            <p:ph type="title"/>
+          </p:nvPr>
+        </p:nvSpPr>
+        <p:spPr/>
+        <p:txBody>
+          <a:bodyPr/>
+          <a:lstStyle/>
+          <a:p>
+            <a:r>
+              <a:rPr lang="en-US"/>
+              <a:t>Rq 4 - applicability</a:t>
+            </a:r>
+          </a:p>
+        </p:txBody>
+      </p:sp>
+      <p:sp>
+        <p:nvSpPr>
+          <p:cNvPr id="3" name="Content Placeholder 2">
+            <a:extLst>
+              <a:ext uri="{FF2B5EF4-FFF2-40B4-BE49-F238E27FC236}">
+                <a16:creationId xmlns:a16="http://schemas.microsoft.com/office/drawing/2014/main" id="{24C296AD-018D-C004-7F46-B18EDBFAF70A}"/>
+              </a:ext>
+            </a:extLst>
+          </p:cNvPr>
+          <p:cNvSpPr>
+            <a:spLocks noGrp="1"/>
+          </p:cNvSpPr>
+          <p:nvPr>
+            <p:ph idx="1"/>
+          </p:nvPr>
+        </p:nvSpPr>
+        <p:spPr>
+          <a:xfrm>
+            <a:off x="583872" y="2559603"/>
+            <a:ext cx="6004021" cy="5175069"/>
+          </a:xfrm>
+        </p:spPr>
+        <p:txBody>
+          <a:bodyPr vert="horz" lIns="91440" tIns="45720" rIns="91440" bIns="45720" rtlCol="0" anchor="t">
+            <a:normAutofit fontScale="55000" lnSpcReduction="20000"/>
+          </a:bodyPr>
+          <a:lstStyle/>
+          <a:p>
+            <a:r>
+              <a:rPr lang="en-US" sz="2900"/>
+              <a:t>Research Question:</a:t>
+            </a:r>
+            <a:r>
+              <a:rPr lang="en-US" sz="2900">
+                <a:ea typeface="+mn-lt"/>
+                <a:cs typeface="+mn-lt"/>
+              </a:rPr>
+              <a:t> Would actual developers use CLAP for release planning?</a:t>
+            </a:r>
+          </a:p>
+          <a:p>
+            <a:r>
+              <a:rPr lang="en-US" sz="2900">
+                <a:ea typeface="+mn-lt"/>
+                <a:cs typeface="+mn-lt"/>
+              </a:rPr>
+              <a:t>The authors interviewed project managers from 3 different software companies that develop Android apps. They all worked with a demo of CLAP using Twitter and Facebook reviews to avoid bias.</a:t>
+            </a:r>
+          </a:p>
+          <a:p>
+            <a:r>
+              <a:rPr lang="en-US" sz="2900"/>
+              <a:t>4 </a:t>
+            </a:r>
+            <a:r>
+              <a:rPr lang="en-US" sz="2900" err="1"/>
+              <a:t>ke</a:t>
+            </a:r>
+            <a:r>
+              <a:rPr lang="en-US" sz="2900"/>
+              <a:t>y questions were asked</a:t>
+            </a:r>
+          </a:p>
+          <a:p>
+            <a:r>
+              <a:rPr lang="en-US" sz="2900"/>
+              <a:t>As a result, all project managers concluded the questions with "yes" or "absolutely yes". One of them stated that their company doesn't use user reviews.</a:t>
+            </a:r>
+          </a:p>
+          <a:p>
+            <a:endParaRPr lang="en-US" sz="2900">
+              <a:ea typeface="+mn-lt"/>
+              <a:cs typeface="+mn-lt"/>
+            </a:endParaRPr>
+          </a:p>
+          <a:p>
+            <a:endParaRPr lang="en-US" sz="2900">
+              <a:ea typeface="+mn-lt"/>
+              <a:cs typeface="+mn-lt"/>
+            </a:endParaRPr>
+          </a:p>
+          <a:p>
+            <a:endParaRPr lang="en-US" sz="2900">
+              <a:ea typeface="+mn-lt"/>
+              <a:cs typeface="+mn-lt"/>
+            </a:endParaRPr>
+          </a:p>
+          <a:p>
+            <a:pPr marL="0" indent="0">
+              <a:buNone/>
+            </a:pPr>
+            <a:endParaRPr lang="en-US" sz="2900">
+              <a:ea typeface="+mn-lt"/>
+              <a:cs typeface="+mn-lt"/>
+            </a:endParaRPr>
+          </a:p>
+          <a:p>
+            <a:pPr marL="0" indent="0">
+              <a:buNone/>
+            </a:pPr>
+            <a:br>
+              <a:rPr lang="en-US">
+                <a:ea typeface="+mn-lt"/>
+                <a:cs typeface="+mn-lt"/>
+              </a:rPr>
+            </a:br>
+            <a:br>
+              <a:rPr lang="en-US">
+                <a:ea typeface="+mn-lt"/>
+                <a:cs typeface="+mn-lt"/>
+              </a:rPr>
+            </a:br>
+            <a:endParaRPr lang="en-US" sz="2900"/>
+          </a:p>
+        </p:txBody>
+      </p:sp>
+      <p:pic>
+        <p:nvPicPr>
+          <p:cNvPr id="6" name="Picture 5" descr="A white text on a black background&#10;&#10;AI-generated content may be incorrect.">
+            <a:extLst>
+              <a:ext uri="{FF2B5EF4-FFF2-40B4-BE49-F238E27FC236}">
+                <a16:creationId xmlns:a16="http://schemas.microsoft.com/office/drawing/2014/main" id="{971BB413-ECCA-190B-ED3A-BAA1B085B717}"/>
+              </a:ext>
+            </a:extLst>
+          </p:cNvPr>
+          <p:cNvPicPr>
+            <a:picLocks noChangeAspect="1"/>
+          </p:cNvPicPr>
+          <p:nvPr/>
+        </p:nvPicPr>
+        <p:blipFill>
+          <a:blip r:embed="rId2"/>
+          <a:stretch>
+            <a:fillRect/>
+          </a:stretch>
+        </p:blipFill>
+        <p:spPr>
+          <a:xfrm>
+            <a:off x="7228074" y="2284599"/>
+            <a:ext cx="4257675" cy="3476625"/>
+          </a:xfrm>
+          <a:prstGeom prst="rect">
+            <a:avLst/>
+          </a:prstGeom>
+        </p:spPr>
+      </p:pic>
+    </p:spTree>
+    <p:extLst>
+      <p:ext uri="{BB962C8B-B14F-4D97-AF65-F5344CB8AC3E}">
+        <p14:creationId xmlns:p14="http://schemas.microsoft.com/office/powerpoint/2010/main" val="961948761"/>
+      </p:ext>
+    </p:extLst>
+  </p:cSld>
+  <p:clrMapOvr>
+    <a:masterClrMapping/>
+  </p:clrMapOvr>
+</p:sld>
+</file>
+
+<file path=ppt/slides/slide19.xml><?xml version="1.0" encoding="utf-8"?>
+<p:sld xmlns:a="http://schemas.openxmlformats.org/drawingml/2006/main" xmlns:r="http://schemas.openxmlformats.org/officeDocument/2006/relationships" xmlns:p="http://schemas.openxmlformats.org/presentationml/2006/main">
+  <p:cSld>
+    <p:spTree>
+      <p:nvGrpSpPr>
+        <p:cNvPr id="1" name=""/>
+        <p:cNvGrpSpPr/>
+        <p:nvPr/>
+      </p:nvGrpSpPr>
+      <p:grpSpPr>
+        <a:xfrm>
+          <a:off x="0" y="0"/>
+          <a:ext cx="0" cy="0"/>
+          <a:chOff x="0" y="0"/>
+          <a:chExt cx="0" cy="0"/>
+        </a:xfrm>
+      </p:grpSpPr>
+      <p:sp>
+        <p:nvSpPr>
+          <p:cNvPr id="2" name="Title 1">
+            <a:extLst>
+              <a:ext uri="{FF2B5EF4-FFF2-40B4-BE49-F238E27FC236}">
+                <a16:creationId xmlns:a16="http://schemas.microsoft.com/office/drawing/2014/main" id="{3D5BA892-02D8-864D-D202-65F6026E81B3}"/>
+              </a:ext>
+            </a:extLst>
+          </p:cNvPr>
+          <p:cNvSpPr>
+            <a:spLocks noGrp="1"/>
+          </p:cNvSpPr>
+          <p:nvPr>
+            <p:ph type="title"/>
+          </p:nvPr>
+        </p:nvSpPr>
+        <p:spPr>
+          <a:xfrm>
+            <a:off x="1451579" y="905002"/>
+            <a:ext cx="9603275" cy="1049235"/>
+          </a:xfrm>
+        </p:spPr>
+        <p:txBody>
+          <a:bodyPr/>
+          <a:lstStyle/>
+          <a:p>
+            <a:r>
+              <a:rPr lang="en-US"/>
+              <a:t>conclusion</a:t>
+            </a:r>
+          </a:p>
+        </p:txBody>
+      </p:sp>
+      <p:sp>
+        <p:nvSpPr>
+          <p:cNvPr id="3" name="Content Placeholder 2">
+            <a:extLst>
+              <a:ext uri="{FF2B5EF4-FFF2-40B4-BE49-F238E27FC236}">
+                <a16:creationId xmlns:a16="http://schemas.microsoft.com/office/drawing/2014/main" id="{4D9622CD-30FC-5D1F-3F24-C987E4671236}"/>
+              </a:ext>
+            </a:extLst>
+          </p:cNvPr>
+          <p:cNvSpPr>
+            <a:spLocks noGrp="1"/>
+          </p:cNvSpPr>
+          <p:nvPr>
+            <p:ph idx="1"/>
+          </p:nvPr>
+        </p:nvSpPr>
+        <p:spPr>
+          <a:xfrm>
+            <a:off x="1451579" y="1853755"/>
+            <a:ext cx="9603275" cy="4199726"/>
+          </a:xfrm>
+        </p:spPr>
+        <p:txBody>
+          <a:bodyPr>
+            <a:normAutofit fontScale="92500" lnSpcReduction="20000"/>
+          </a:bodyPr>
+          <a:lstStyle/>
+          <a:p>
+            <a:r>
+              <a:rPr lang="en-US"/>
+              <a:t>The paper introduces </a:t>
+            </a:r>
+            <a:r>
+              <a:rPr lang="en-US" b="1"/>
+              <a:t>CLAP</a:t>
+            </a:r>
+            <a:r>
+              <a:rPr lang="en-US"/>
+              <a:t>, a model that helps developers analyze large numbers of mobile app reviews.</a:t>
+            </a:r>
+          </a:p>
+          <a:p>
+            <a:r>
+              <a:rPr lang="en-US"/>
+              <a:t>CLAP improves existing approaches by </a:t>
+            </a:r>
+            <a:r>
+              <a:rPr lang="en-US" b="1"/>
+              <a:t>classifying reviews, clustering related feedback, and prioritizing </a:t>
+            </a:r>
+            <a:r>
+              <a:rPr lang="en-US"/>
+              <a:t>which bugs or features should be addressed first.</a:t>
+            </a:r>
+          </a:p>
+          <a:p>
+            <a:r>
+              <a:rPr lang="en-US"/>
+              <a:t>The evaluation showed strong performance, with </a:t>
+            </a:r>
+            <a:r>
+              <a:rPr lang="en-US" b="1"/>
+              <a:t>86% classification accuracy</a:t>
+            </a:r>
+            <a:r>
+              <a:rPr lang="en-US"/>
+              <a:t>, </a:t>
+            </a:r>
+            <a:r>
+              <a:rPr lang="en-US" b="1"/>
+              <a:t>77% meaningful clustering</a:t>
+            </a:r>
+            <a:r>
+              <a:rPr lang="en-US"/>
+              <a:t>, and </a:t>
+            </a:r>
+            <a:r>
+              <a:rPr lang="en-US" b="1"/>
+              <a:t>72% recommendation accuracy</a:t>
+            </a:r>
+            <a:r>
+              <a:rPr lang="en-US"/>
+              <a:t>.</a:t>
+            </a:r>
+          </a:p>
+          <a:p>
+            <a:r>
+              <a:rPr lang="en-US"/>
+              <a:t>Feedback from industry developers was positive, suggesting the tool could support real release planning.</a:t>
+            </a:r>
+          </a:p>
+          <a:p>
+            <a:pPr fontAlgn="base"/>
+            <a:r>
+              <a:rPr lang="en-US"/>
+              <a:t>They discuss future work as:</a:t>
+            </a:r>
+          </a:p>
+          <a:p>
+            <a:pPr lvl="1" fontAlgn="base">
+              <a:buFont typeface="Courier New" panose="02070309020205020404" pitchFamily="49" charset="0"/>
+              <a:buChar char="o"/>
+            </a:pPr>
+            <a:r>
+              <a:rPr lang="en-US"/>
+              <a:t>Mining reviews from similar, competition apps as well as the target app </a:t>
+            </a:r>
+          </a:p>
+          <a:p>
+            <a:pPr lvl="1" fontAlgn="base">
+              <a:buFont typeface="Courier New" panose="02070309020205020404" pitchFamily="49" charset="0"/>
+              <a:buChar char="o"/>
+            </a:pPr>
+            <a:r>
+              <a:rPr lang="en-US"/>
+              <a:t>Multi-store support </a:t>
+            </a:r>
+          </a:p>
+          <a:p>
+            <a:pPr lvl="1" fontAlgn="base">
+              <a:buFont typeface="Courier New" panose="02070309020205020404" pitchFamily="49" charset="0"/>
+              <a:buChar char="o"/>
+            </a:pPr>
+            <a:r>
+              <a:rPr lang="en-US"/>
+              <a:t>Automatic translation to English to overcome language limitation </a:t>
+            </a:r>
+          </a:p>
+          <a:p>
+            <a:endParaRPr lang="en-US"/>
+          </a:p>
+        </p:txBody>
+      </p:sp>
+    </p:spTree>
+    <p:extLst>
+      <p:ext uri="{BB962C8B-B14F-4D97-AF65-F5344CB8AC3E}">
+        <p14:creationId xmlns:p14="http://schemas.microsoft.com/office/powerpoint/2010/main" val="3944135579"/>
       </p:ext>
     </p:extLst>
   </p:cSld>
@@ -3522,7 +6953,7 @@
           <a:lstStyle/>
           <a:p>
             <a:r>
-              <a:rPr lang="en-US" dirty="0"/>
+              <a:rPr lang="en-US"/>
               <a:t>Introduction</a:t>
             </a:r>
           </a:p>
@@ -3546,70 +6977,185 @@
         </p:nvSpPr>
         <p:spPr/>
         <p:txBody>
-          <a:bodyPr/>
-          <a:lstStyle/>
-          <a:p>
-            <a:r>
-              <a:rPr lang="en-US" dirty="0"/>
-              <a:t>We will be covering Release Panning Of Mobile Apps Based on User Reviews by Lorenzo Villarroel, Gabriele </a:t>
-            </a:r>
-            <a:r>
-              <a:rPr lang="en-US" dirty="0" err="1"/>
+          <a:bodyPr vert="horz" lIns="91440" tIns="45720" rIns="91440" bIns="45720" rtlCol="0" anchor="t">
+            <a:normAutofit fontScale="77500" lnSpcReduction="20000"/>
+          </a:bodyPr>
+          <a:lstStyle/>
+          <a:p>
+            <a:r>
+              <a:rPr lang="en-US"/>
+              <a:t>Release Planning Of Mobile Apps Based on User Reviews by Lorenzo Villarroel, Gabriele </a:t>
+            </a:r>
+            <a:r>
+              <a:rPr lang="en-US" err="1"/>
               <a:t>Bavota</a:t>
             </a:r>
             <a:r>
-              <a:rPr lang="en-US" dirty="0"/>
+              <a:rPr lang="en-US"/>
               <a:t>, Barbara Russo, Rocoo Oliveto, Massimiliano Di Penta</a:t>
             </a:r>
           </a:p>
           <a:p>
-            <a:endParaRPr lang="en-US" dirty="0"/>
-          </a:p>
-          <a:p>
-            <a:r>
-              <a:rPr lang="en-US" dirty="0"/>
-              <a:t>They introduce CLAP (</a:t>
-            </a:r>
-            <a:r>
-              <a:rPr lang="en-US" b="1" dirty="0"/>
+            <a:r>
+              <a:rPr lang="en-US">
+                <a:ea typeface="+mn-lt"/>
+                <a:cs typeface="+mn-lt"/>
+              </a:rPr>
+              <a:t>This paper introduces CLAP (</a:t>
+            </a:r>
+            <a:r>
+              <a:rPr lang="en-US" b="1">
+                <a:ea typeface="+mn-lt"/>
+                <a:cs typeface="+mn-lt"/>
+              </a:rPr>
               <a:t>C</a:t>
             </a:r>
             <a:r>
-              <a:rPr lang="en-US" dirty="0"/>
+              <a:rPr lang="en-US">
+                <a:ea typeface="+mn-lt"/>
+                <a:cs typeface="+mn-lt"/>
+              </a:rPr>
               <a:t>rowd </a:t>
             </a:r>
             <a:r>
-              <a:rPr lang="en-US" b="1" dirty="0"/>
+              <a:rPr lang="en-US" b="1">
+                <a:ea typeface="+mn-lt"/>
+                <a:cs typeface="+mn-lt"/>
+              </a:rPr>
               <a:t>L</a:t>
             </a:r>
             <a:r>
-              <a:rPr lang="en-US" dirty="0"/>
+              <a:rPr lang="en-US">
+                <a:ea typeface="+mn-lt"/>
+                <a:cs typeface="+mn-lt"/>
+              </a:rPr>
               <a:t>istener for </a:t>
             </a:r>
             <a:r>
-              <a:rPr lang="en-US" dirty="0" err="1"/>
+              <a:rPr lang="en-US" err="1">
+                <a:ea typeface="+mn-lt"/>
+                <a:cs typeface="+mn-lt"/>
+              </a:rPr>
               <a:t>rele</a:t>
             </a:r>
             <a:r>
-              <a:rPr lang="en-US" b="1" dirty="0" err="1"/>
+              <a:rPr lang="en-US" b="1" err="1">
+                <a:ea typeface="+mn-lt"/>
+                <a:cs typeface="+mn-lt"/>
+              </a:rPr>
               <a:t>A</a:t>
             </a:r>
             <a:r>
-              <a:rPr lang="en-US" dirty="0" err="1"/>
+              <a:rPr lang="en-US" err="1">
+                <a:ea typeface="+mn-lt"/>
+                <a:cs typeface="+mn-lt"/>
+              </a:rPr>
               <a:t>se</a:t>
             </a:r>
             <a:r>
-              <a:rPr lang="en-US" dirty="0"/>
+              <a:rPr lang="en-US">
+                <a:ea typeface="+mn-lt"/>
+                <a:cs typeface="+mn-lt"/>
+              </a:rPr>
               <a:t> </a:t>
             </a:r>
             <a:r>
-              <a:rPr lang="en-US" b="1" dirty="0"/>
+              <a:rPr lang="en-US" b="1">
+                <a:ea typeface="+mn-lt"/>
+                <a:cs typeface="+mn-lt"/>
+              </a:rPr>
               <a:t>P</a:t>
             </a:r>
             <a:r>
-              <a:rPr lang="en-US" dirty="0"/>
+              <a:rPr lang="en-US">
+                <a:ea typeface="+mn-lt"/>
+                <a:cs typeface="+mn-lt"/>
+              </a:rPr>
               <a:t>lanning)</a:t>
             </a:r>
+          </a:p>
+          <a:p>
+            <a:pPr lvl="1">
+              <a:buFont typeface="Courier New" panose="020B0604020202020204" pitchFamily="34" charset="0"/>
+              <a:buChar char="o"/>
+            </a:pPr>
+            <a:r>
+              <a:rPr lang="en-US">
+                <a:ea typeface="+mn-lt"/>
+                <a:cs typeface="+mn-lt"/>
+              </a:rPr>
+              <a:t>An automated tool designed to help developers plan their next mobile app release by importing and mining user reviews.</a:t>
+            </a:r>
+            <a:endParaRPr lang="en-US"/>
+          </a:p>
+          <a:p>
+            <a:r>
+              <a:rPr lang="en-US">
+                <a:ea typeface="+mn-lt"/>
+                <a:cs typeface="+mn-lt"/>
+              </a:rPr>
+              <a:t>The approach categorizes user reviews into three specific buckets: </a:t>
+            </a:r>
+          </a:p>
+          <a:p>
+            <a:pPr lvl="1">
+              <a:buFont typeface="Courier New" panose="020B0604020202020204" pitchFamily="34" charset="0"/>
+              <a:buChar char="o"/>
+            </a:pPr>
+            <a:r>
+              <a:rPr lang="en-US">
+                <a:ea typeface="+mn-lt"/>
+                <a:cs typeface="+mn-lt"/>
+              </a:rPr>
+              <a:t>Bug reports</a:t>
+            </a:r>
+          </a:p>
+          <a:p>
+            <a:pPr lvl="1">
+              <a:buFont typeface="Courier New" panose="020B0604020202020204" pitchFamily="34" charset="0"/>
+              <a:buChar char="o"/>
+            </a:pPr>
+            <a:r>
+              <a:rPr lang="en-US">
+                <a:ea typeface="+mn-lt"/>
+                <a:cs typeface="+mn-lt"/>
+              </a:rPr>
+              <a:t>Suggestions for new features </a:t>
+            </a:r>
+          </a:p>
+          <a:p>
+            <a:pPr lvl="1">
+              <a:buFont typeface="Courier New" panose="020B0604020202020204" pitchFamily="34" charset="0"/>
+              <a:buChar char="o"/>
+            </a:pPr>
+            <a:r>
+              <a:rPr lang="en-US">
+                <a:ea typeface="+mn-lt"/>
+                <a:cs typeface="+mn-lt"/>
+              </a:rPr>
+              <a:t>Other.</a:t>
+            </a:r>
+            <a:endParaRPr lang="en-US"/>
+          </a:p>
+          <a:p>
+            <a:r>
+              <a:rPr lang="en-US">
+                <a:ea typeface="+mn-lt"/>
+                <a:cs typeface="+mn-lt"/>
+              </a:rPr>
+              <a:t>Clusters related reviews together, such as grouping all reviews that report the exact same bug.</a:t>
+            </a:r>
+            <a:endParaRPr lang="en-US"/>
+          </a:p>
+          <a:p>
+            <a:r>
+              <a:rPr lang="en-US">
+                <a:ea typeface="+mn-lt"/>
+                <a:cs typeface="+mn-lt"/>
+              </a:rPr>
+              <a:t>Automatically prioritizes these clusters, recommending to developers which bugs or features should be addressed in the subsequent app release.</a:t>
+            </a:r>
+            <a:endParaRPr lang="en-US"/>
           </a:p>
         </p:txBody>
       </p:sp>
@@ -3665,7 +7211,7 @@
           <a:lstStyle/>
           <a:p>
             <a:r>
-              <a:rPr lang="en-US" dirty="0"/>
+              <a:rPr lang="en-US"/>
               <a:t>Introduction – Software Engineering Problem</a:t>
             </a:r>
           </a:p>
@@ -3689,9 +7235,55 @@
         </p:nvSpPr>
         <p:spPr/>
         <p:txBody>
-          <a:bodyPr/>
-          <a:lstStyle/>
-          <a:p>
+          <a:bodyPr vert="horz" lIns="91440" tIns="45720" rIns="91440" bIns="45720" rtlCol="0" anchor="t">
+            <a:normAutofit fontScale="85000" lnSpcReduction="20000"/>
+          </a:bodyPr>
+          <a:lstStyle/>
+          <a:p>
+            <a:r>
+              <a:rPr lang="en-US">
+                <a:ea typeface="+mn-lt"/>
+                <a:cs typeface="+mn-lt"/>
+              </a:rPr>
+              <a:t>To stay competitive, developers must constantly improve their apps by fixing critical bugs and implementing desired features.</a:t>
+            </a:r>
+            <a:endParaRPr lang="en-US"/>
+          </a:p>
+          <a:p>
+            <a:r>
+              <a:rPr lang="en-US">
+                <a:ea typeface="+mn-lt"/>
+                <a:cs typeface="+mn-lt"/>
+              </a:rPr>
+              <a:t>App store user reviews are a precious source of information for this, as they explain what users like, dislike, and want.</a:t>
+            </a:r>
+          </a:p>
+          <a:p>
+            <a:r>
+              <a:rPr lang="en-US">
+                <a:ea typeface="+mn-lt"/>
+                <a:cs typeface="+mn-lt"/>
+              </a:rPr>
+              <a:t>Manually analyzing these reviews is not doable because popular apps often receive hundreds of reviews per day.</a:t>
+            </a:r>
+          </a:p>
+          <a:p>
+            <a:r>
+              <a:rPr lang="en-US">
+                <a:ea typeface="+mn-lt"/>
+                <a:cs typeface="+mn-lt"/>
+              </a:rPr>
+              <a:t>Developers experience information overload and struggle to manually extract actionable requirements from this massive volume of unstructured text.</a:t>
+            </a:r>
+          </a:p>
+          <a:p>
+            <a:r>
+              <a:rPr lang="en-US">
+                <a:ea typeface="+mn-lt"/>
+                <a:cs typeface="+mn-lt"/>
+              </a:rPr>
+              <a:t>While previous tools could sort "informative" from "non-informative" reviews, they lacked the ability to specifically separate bug reports from feature requests or learn from past release history to prioritize them.</a:t>
+            </a:r>
             <a:endParaRPr lang="en-US"/>
           </a:p>
         </p:txBody>
@@ -3748,14 +7340,9 @@
           <a:lstStyle/>
           <a:p>
             <a:r>
-              <a:rPr lang="en-US" dirty="0"/>
-              <a:t>Introduction – Why is </a:t>
-            </a:r>
-            <a:r>
-              <a:rPr lang="en-US"/>
-              <a:t>it important</a:t>
-            </a:r>
-            <a:endParaRPr lang="en-US" dirty="0"/>
+              <a:rPr lang="en-US"/>
+              <a:t>Introduction – Why is it important</a:t>
+            </a:r>
           </a:p>
         </p:txBody>
       </p:sp>
@@ -3777,10 +7364,62 @@
         </p:nvSpPr>
         <p:spPr/>
         <p:txBody>
-          <a:bodyPr/>
-          <a:lstStyle/>
-          <a:p>
-            <a:endParaRPr lang="en-US" dirty="0"/>
+          <a:bodyPr vert="horz" lIns="91440" tIns="45720" rIns="91440" bIns="45720" rtlCol="0" anchor="t">
+            <a:normAutofit lnSpcReduction="10000"/>
+          </a:bodyPr>
+          <a:lstStyle/>
+          <a:p>
+            <a:r>
+              <a:rPr lang="en-US">
+                <a:ea typeface="+mn-lt"/>
+                <a:cs typeface="+mn-lt"/>
+              </a:rPr>
+              <a:t>The mobile app market is experiencing tangible growth and enormous competition.</a:t>
+            </a:r>
+            <a:endParaRPr lang="en-US"/>
+          </a:p>
+          <a:p>
+            <a:r>
+              <a:rPr lang="en-US">
+                <a:ea typeface="+mn-lt"/>
+                <a:cs typeface="+mn-lt"/>
+              </a:rPr>
+              <a:t>User reviews and ratings are highly important assets for the evolution of an app.</a:t>
+            </a:r>
+          </a:p>
+          <a:p>
+            <a:r>
+              <a:rPr lang="en-US">
+                <a:ea typeface="+mn-lt"/>
+                <a:cs typeface="+mn-lt"/>
+              </a:rPr>
+              <a:t>If developers ignore relevant user suggestions, it is very likely that their app will lose its market share.</a:t>
+            </a:r>
+          </a:p>
+          <a:p>
+            <a:r>
+              <a:rPr lang="en-US">
+                <a:ea typeface="+mn-lt"/>
+                <a:cs typeface="+mn-lt"/>
+              </a:rPr>
+              <a:t>Conversely, satisfactorily addressing the requests users make in their reviews is likely to increase the app's overall rating.</a:t>
+            </a:r>
+          </a:p>
+          <a:p>
+            <a:r>
+              <a:rPr lang="en-US">
+                <a:ea typeface="+mn-lt"/>
+                <a:cs typeface="+mn-lt"/>
+              </a:rPr>
+              <a:t>Providing an automated solution saves hundreds of hours of manual labor, translating user feedback directly into a prioritized roadmap for the next release.</a:t>
+            </a:r>
+            <a:endParaRPr lang="en-US"/>
+          </a:p>
+          <a:p>
+            <a:pPr marL="0" indent="0">
+              <a:buNone/>
+            </a:pPr>
+            <a:endParaRPr lang="en-US"/>
           </a:p>
         </p:txBody>
       </p:sp>
@@ -3797,10 +7436,861 @@
 </p:sld>
 </file>
 
+<file path=ppt/slides/slide5.xml><?xml version="1.0" encoding="utf-8"?>
+<p:sld xmlns:a="http://schemas.openxmlformats.org/drawingml/2006/main" xmlns:r="http://schemas.openxmlformats.org/officeDocument/2006/relationships" xmlns:p="http://schemas.openxmlformats.org/presentationml/2006/main">
+  <p:cSld>
+    <p:spTree>
+      <p:nvGrpSpPr>
+        <p:cNvPr id="1" name="">
+          <a:extLst>
+            <a:ext uri="{FF2B5EF4-FFF2-40B4-BE49-F238E27FC236}">
+              <a16:creationId xmlns:a16="http://schemas.microsoft.com/office/drawing/2014/main" id="{D375344F-84DF-7781-AB45-F01AD610E6F8}"/>
+            </a:ext>
+          </a:extLst>
+        </p:cNvPr>
+        <p:cNvGrpSpPr/>
+        <p:nvPr/>
+      </p:nvGrpSpPr>
+      <p:grpSpPr>
+        <a:xfrm>
+          <a:off x="0" y="0"/>
+          <a:ext cx="0" cy="0"/>
+          <a:chOff x="0" y="0"/>
+          <a:chExt cx="0" cy="0"/>
+        </a:xfrm>
+      </p:grpSpPr>
+      <p:sp>
+        <p:nvSpPr>
+          <p:cNvPr id="2" name="Title 1">
+            <a:extLst>
+              <a:ext uri="{FF2B5EF4-FFF2-40B4-BE49-F238E27FC236}">
+                <a16:creationId xmlns:a16="http://schemas.microsoft.com/office/drawing/2014/main" id="{32A38BBD-CC6E-932C-6F22-BFA50B69C640}"/>
+              </a:ext>
+            </a:extLst>
+          </p:cNvPr>
+          <p:cNvSpPr>
+            <a:spLocks noGrp="1"/>
+          </p:cNvSpPr>
+          <p:nvPr>
+            <p:ph type="title"/>
+          </p:nvPr>
+        </p:nvSpPr>
+        <p:spPr/>
+        <p:txBody>
+          <a:bodyPr/>
+          <a:lstStyle/>
+          <a:p>
+            <a:r>
+              <a:rPr lang="en-US"/>
+              <a:t>MOTIVATION</a:t>
+            </a:r>
+          </a:p>
+        </p:txBody>
+      </p:sp>
+      <p:sp>
+        <p:nvSpPr>
+          <p:cNvPr id="3" name="Content Placeholder 2">
+            <a:extLst>
+              <a:ext uri="{FF2B5EF4-FFF2-40B4-BE49-F238E27FC236}">
+                <a16:creationId xmlns:a16="http://schemas.microsoft.com/office/drawing/2014/main" id="{E70A46BB-CE40-2943-461C-7720446FE98B}"/>
+              </a:ext>
+            </a:extLst>
+          </p:cNvPr>
+          <p:cNvSpPr>
+            <a:spLocks noGrp="1"/>
+          </p:cNvSpPr>
+          <p:nvPr>
+            <p:ph idx="1"/>
+          </p:nvPr>
+        </p:nvSpPr>
+        <p:spPr/>
+        <p:txBody>
+          <a:bodyPr vert="horz" lIns="91440" tIns="45720" rIns="91440" bIns="45720" rtlCol="0" anchor="t">
+            <a:normAutofit fontScale="92500" lnSpcReduction="10000"/>
+          </a:bodyPr>
+          <a:lstStyle/>
+          <a:p>
+            <a:pPr marL="0" indent="0">
+              <a:buNone/>
+            </a:pPr>
+            <a:r>
+              <a:rPr lang="en-US"/>
+              <a:t>[ AR-MINER ] App-Review Mining</a:t>
+            </a:r>
+            <a:endParaRPr lang="en-US">
+              <a:ea typeface="+mn-lt"/>
+              <a:cs typeface="+mn-lt"/>
+            </a:endParaRPr>
+          </a:p>
+          <a:p>
+            <a:pPr marL="285750" indent="-285750"/>
+            <a:r>
+              <a:rPr lang="en-US">
+                <a:ea typeface="+mn-lt"/>
+                <a:cs typeface="+mn-lt"/>
+              </a:rPr>
+              <a:t>(</a:t>
+            </a:r>
+            <a:r>
+              <a:rPr lang="en-US" err="1">
+                <a:ea typeface="+mn-lt"/>
+                <a:cs typeface="+mn-lt"/>
+              </a:rPr>
+              <a:t>i</a:t>
+            </a:r>
+            <a:r>
+              <a:rPr lang="en-US">
+                <a:ea typeface="+mn-lt"/>
+                <a:cs typeface="+mn-lt"/>
+              </a:rPr>
+              <a:t>) extracting informative user reviews by filtering noisy and irrelevant ones</a:t>
+            </a:r>
+          </a:p>
+          <a:p>
+            <a:pPr marL="285750" indent="-285750"/>
+            <a:r>
+              <a:rPr lang="en-US">
+                <a:ea typeface="+mn-lt"/>
+                <a:cs typeface="+mn-lt"/>
+              </a:rPr>
+              <a:t>(ii) grouping the informative reviews automatically using topic modeling</a:t>
+            </a:r>
+          </a:p>
+          <a:p>
+            <a:pPr marL="285750" indent="-285750"/>
+            <a:r>
+              <a:rPr lang="en-US">
+                <a:ea typeface="+mn-lt"/>
+                <a:cs typeface="+mn-lt"/>
+              </a:rPr>
+              <a:t>(iii) further prioritizing the informative reviews by an effective review ranking scheme</a:t>
+            </a:r>
+          </a:p>
+          <a:p>
+            <a:pPr marL="285750" indent="-285750"/>
+            <a:r>
+              <a:rPr lang="en-US">
+                <a:ea typeface="+mn-lt"/>
+                <a:cs typeface="+mn-lt"/>
+              </a:rPr>
+              <a:t>(iv) presenting the groups of most “informative” reviews via an intuitive visualization approach</a:t>
+            </a:r>
+          </a:p>
+          <a:p>
+            <a:pPr marL="0" indent="0">
+              <a:buNone/>
+            </a:pPr>
+            <a:r>
+              <a:rPr lang="en-US">
+                <a:solidFill>
+                  <a:srgbClr val="FF0000"/>
+                </a:solidFill>
+              </a:rPr>
+              <a:t>&gt; But what's next? Why not automate the whole process?</a:t>
+            </a:r>
+          </a:p>
+          <a:p>
+            <a:pPr marL="0" indent="0">
+              <a:buNone/>
+            </a:pPr>
+            <a:r>
+              <a:rPr lang="en-US">
+                <a:solidFill>
+                  <a:srgbClr val="FF0000"/>
+                </a:solidFill>
+              </a:rPr>
+              <a:t>  (e.g. categorization, self-learning)</a:t>
+            </a:r>
+          </a:p>
+        </p:txBody>
+      </p:sp>
+    </p:spTree>
+    <p:extLst>
+      <p:ext uri="{BB962C8B-B14F-4D97-AF65-F5344CB8AC3E}">
+        <p14:creationId xmlns:p14="http://schemas.microsoft.com/office/powerpoint/2010/main" val="152513560"/>
+      </p:ext>
+    </p:extLst>
+  </p:cSld>
+  <p:clrMapOvr>
+    <a:masterClrMapping/>
+  </p:clrMapOvr>
+  <p:timing>
+    <p:tnLst>
+      <p:par>
+        <p:cTn id="1" dur="indefinite" restart="never" nodeType="tmRoot">
+          <p:childTnLst>
+            <p:seq concurrent="1" nextAc="seek">
+              <p:cTn id="2" dur="indefinite" nodeType="mainSeq">
+                <p:childTnLst>
+                  <p:par>
+                    <p:cTn id="3" fill="hold">
+                      <p:stCondLst>
+                        <p:cond delay="indefinite"/>
+                      </p:stCondLst>
+                      <p:childTnLst>
+                        <p:par>
+                          <p:cTn id="4" fill="hold">
+                            <p:stCondLst>
+                              <p:cond delay="0"/>
+                            </p:stCondLst>
+                            <p:childTnLst>
+                              <p:par>
+                                <p:cTn id="5" presetID="1" presetClass="entr" presetSubtype="0" fill="hold" grpId="0" nodeType="clickEffect">
+                                  <p:stCondLst>
+                                    <p:cond delay="0"/>
+                                  </p:stCondLst>
+                                  <p:childTnLst>
+                                    <p:set>
+                                      <p:cBhvr>
+                                        <p:cTn id="6" dur="1" fill="hold">
+                                          <p:stCondLst>
+                                            <p:cond delay="0"/>
+                                          </p:stCondLst>
+                                        </p:cTn>
+                                        <p:tgtEl>
+                                          <p:spTgt spid="3">
+                                            <p:txEl>
+                                              <p:pRg st="5" end="5"/>
+                                            </p:txEl>
+                                          </p:spTgt>
+                                        </p:tgtEl>
+                                        <p:attrNameLst>
+                                          <p:attrName>style.visibility</p:attrName>
+                                        </p:attrNameLst>
+                                      </p:cBhvr>
+                                      <p:to>
+                                        <p:strVal val="visible"/>
+                                      </p:to>
+                                    </p:set>
+                                  </p:childTnLst>
+                                </p:cTn>
+                              </p:par>
+                              <p:par>
+                                <p:cTn id="7" presetID="1" presetClass="entr" presetSubtype="0" fill="hold" grpId="0" nodeType="withEffect">
+                                  <p:stCondLst>
+                                    <p:cond delay="0"/>
+                                  </p:stCondLst>
+                                  <p:childTnLst>
+                                    <p:set>
+                                      <p:cBhvr>
+                                        <p:cTn id="8" dur="1" fill="hold">
+                                          <p:stCondLst>
+                                            <p:cond delay="0"/>
+                                          </p:stCondLst>
+                                        </p:cTn>
+                                        <p:tgtEl>
+                                          <p:spTgt spid="3">
+                                            <p:txEl>
+                                              <p:pRg st="6" end="6"/>
+                                            </p:txEl>
+                                          </p:spTgt>
+                                        </p:tgtEl>
+                                        <p:attrNameLst>
+                                          <p:attrName>style.visibility</p:attrName>
+                                        </p:attrNameLst>
+                                      </p:cBhvr>
+                                      <p:to>
+                                        <p:strVal val="visible"/>
+                                      </p:to>
+                                    </p:set>
+                                  </p:childTnLst>
+                                </p:cTn>
+                              </p:par>
+                            </p:childTnLst>
+                          </p:cTn>
+                        </p:par>
+                      </p:childTnLst>
+                    </p:cTn>
+                  </p:par>
+                </p:childTnLst>
+              </p:cTn>
+              <p:prevCondLst>
+                <p:cond evt="onPrev" delay="0">
+                  <p:tgtEl>
+                    <p:sldTgt/>
+                  </p:tgtEl>
+                </p:cond>
+              </p:prevCondLst>
+              <p:nextCondLst>
+                <p:cond evt="onNext" delay="0">
+                  <p:tgtEl>
+                    <p:sldTgt/>
+                  </p:tgtEl>
+                </p:cond>
+              </p:nextCondLst>
+            </p:seq>
+          </p:childTnLst>
+        </p:cTn>
+      </p:par>
+    </p:tnLst>
+    <p:bldLst>
+      <p:bldP spid="3" grpId="0" build="p"/>
+    </p:bldLst>
+  </p:timing>
+</p:sld>
+</file>
+
+<file path=ppt/slides/slide6.xml><?xml version="1.0" encoding="utf-8"?>
+<p:sld xmlns:a="http://schemas.openxmlformats.org/drawingml/2006/main" xmlns:r="http://schemas.openxmlformats.org/officeDocument/2006/relationships" xmlns:p="http://schemas.openxmlformats.org/presentationml/2006/main">
+  <p:cSld>
+    <p:spTree>
+      <p:nvGrpSpPr>
+        <p:cNvPr id="1" name=""/>
+        <p:cNvGrpSpPr/>
+        <p:nvPr/>
+      </p:nvGrpSpPr>
+      <p:grpSpPr>
+        <a:xfrm>
+          <a:off x="0" y="0"/>
+          <a:ext cx="0" cy="0"/>
+          <a:chOff x="0" y="0"/>
+          <a:chExt cx="0" cy="0"/>
+        </a:xfrm>
+      </p:grpSpPr>
+      <p:sp>
+        <p:nvSpPr>
+          <p:cNvPr id="2" name="Title 1">
+            <a:extLst>
+              <a:ext uri="{FF2B5EF4-FFF2-40B4-BE49-F238E27FC236}">
+                <a16:creationId xmlns:a16="http://schemas.microsoft.com/office/drawing/2014/main" id="{F17469BB-B00A-90B5-248E-5D65A93B5B50}"/>
+              </a:ext>
+            </a:extLst>
+          </p:cNvPr>
+          <p:cNvSpPr>
+            <a:spLocks noGrp="1"/>
+          </p:cNvSpPr>
+          <p:nvPr>
+            <p:ph type="title"/>
+          </p:nvPr>
+        </p:nvSpPr>
+        <p:spPr/>
+        <p:txBody>
+          <a:bodyPr/>
+          <a:lstStyle/>
+          <a:p>
+            <a:r>
+              <a:rPr lang="en-US"/>
+              <a:t>NOVELTY</a:t>
+            </a:r>
+          </a:p>
+        </p:txBody>
+      </p:sp>
+      <p:sp>
+        <p:nvSpPr>
+          <p:cNvPr id="3" name="Content Placeholder 2">
+            <a:extLst>
+              <a:ext uri="{FF2B5EF4-FFF2-40B4-BE49-F238E27FC236}">
+                <a16:creationId xmlns:a16="http://schemas.microsoft.com/office/drawing/2014/main" id="{1A481761-35DA-467C-5E6B-31CD2B3280FB}"/>
+              </a:ext>
+            </a:extLst>
+          </p:cNvPr>
+          <p:cNvSpPr>
+            <a:spLocks noGrp="1"/>
+          </p:cNvSpPr>
+          <p:nvPr>
+            <p:ph idx="1"/>
+          </p:nvPr>
+        </p:nvSpPr>
+        <p:spPr/>
+        <p:txBody>
+          <a:bodyPr vert="horz" lIns="91440" tIns="45720" rIns="91440" bIns="45720" rtlCol="0" anchor="t">
+            <a:normAutofit/>
+          </a:bodyPr>
+          <a:lstStyle/>
+          <a:p>
+            <a:pPr marL="0" indent="0">
+              <a:buNone/>
+            </a:pPr>
+            <a:r>
+              <a:rPr lang="en-US">
+                <a:ea typeface="+mn-lt"/>
+                <a:cs typeface="+mn-lt"/>
+              </a:rPr>
+              <a:t>"Unlike AR-Miner, </a:t>
+            </a:r>
+            <a:r>
+              <a:rPr lang="en-US">
+                <a:solidFill>
+                  <a:srgbClr val="FF0000"/>
+                </a:solidFill>
+                <a:ea typeface="+mn-lt"/>
+                <a:cs typeface="+mn-lt"/>
+              </a:rPr>
+              <a:t>CLAP classifies reviews into bug report and feature suggestion</a:t>
+            </a:r>
+            <a:r>
+              <a:rPr lang="en-US">
+                <a:ea typeface="+mn-lt"/>
+                <a:cs typeface="+mn-lt"/>
+              </a:rPr>
+              <a:t>, providing additional insights to the developer about the nature of the review. Also, while AR-Miner simply provides a ranking of the user reviews based on their importance as assessed by a pre-defined formula, </a:t>
+            </a:r>
+            <a:r>
+              <a:rPr lang="en-US">
+                <a:solidFill>
+                  <a:srgbClr val="FF0000"/>
+                </a:solidFill>
+                <a:ea typeface="+mn-lt"/>
+                <a:cs typeface="+mn-lt"/>
+              </a:rPr>
+              <a:t>CLAP learns from past history</a:t>
+            </a:r>
+            <a:r>
+              <a:rPr lang="en-US">
+                <a:ea typeface="+mn-lt"/>
+                <a:cs typeface="+mn-lt"/>
+              </a:rPr>
+              <a:t> of the same app or of other apps to </a:t>
+            </a:r>
+            <a:r>
+              <a:rPr lang="en-US">
+                <a:solidFill>
+                  <a:srgbClr val="FF0000"/>
+                </a:solidFill>
+                <a:ea typeface="+mn-lt"/>
+                <a:cs typeface="+mn-lt"/>
+              </a:rPr>
+              <a:t>determine the factors that contribute to determining whether a review should be addressed or not.</a:t>
+            </a:r>
+            <a:r>
+              <a:rPr lang="en-US">
+                <a:ea typeface="+mn-lt"/>
+                <a:cs typeface="+mn-lt"/>
+              </a:rPr>
+              <a:t>"</a:t>
+            </a:r>
+            <a:endParaRPr lang="en-US"/>
+          </a:p>
+          <a:p>
+            <a:endParaRPr lang="en-US"/>
+          </a:p>
+        </p:txBody>
+      </p:sp>
+    </p:spTree>
+    <p:extLst>
+      <p:ext uri="{BB962C8B-B14F-4D97-AF65-F5344CB8AC3E}">
+        <p14:creationId xmlns:p14="http://schemas.microsoft.com/office/powerpoint/2010/main" val="622951656"/>
+      </p:ext>
+    </p:extLst>
+  </p:cSld>
+  <p:clrMapOvr>
+    <a:masterClrMapping/>
+  </p:clrMapOvr>
+</p:sld>
+</file>
+
+<file path=ppt/slides/slide7.xml><?xml version="1.0" encoding="utf-8"?>
+<p:sld xmlns:a="http://schemas.openxmlformats.org/drawingml/2006/main" xmlns:r="http://schemas.openxmlformats.org/officeDocument/2006/relationships" xmlns:p="http://schemas.openxmlformats.org/presentationml/2006/main">
+  <p:cSld>
+    <p:spTree>
+      <p:nvGrpSpPr>
+        <p:cNvPr id="1" name=""/>
+        <p:cNvGrpSpPr/>
+        <p:nvPr/>
+      </p:nvGrpSpPr>
+      <p:grpSpPr>
+        <a:xfrm>
+          <a:off x="0" y="0"/>
+          <a:ext cx="0" cy="0"/>
+          <a:chOff x="0" y="0"/>
+          <a:chExt cx="0" cy="0"/>
+        </a:xfrm>
+      </p:grpSpPr>
+      <p:sp>
+        <p:nvSpPr>
+          <p:cNvPr id="2" name="Title 1">
+            <a:extLst>
+              <a:ext uri="{FF2B5EF4-FFF2-40B4-BE49-F238E27FC236}">
+                <a16:creationId xmlns:a16="http://schemas.microsoft.com/office/drawing/2014/main" id="{907EA7BB-43BB-550B-8505-D9FDFFF0CFAE}"/>
+              </a:ext>
+            </a:extLst>
+          </p:cNvPr>
+          <p:cNvSpPr>
+            <a:spLocks noGrp="1"/>
+          </p:cNvSpPr>
+          <p:nvPr>
+            <p:ph type="title"/>
+          </p:nvPr>
+        </p:nvSpPr>
+        <p:spPr/>
+        <p:txBody>
+          <a:bodyPr/>
+          <a:lstStyle/>
+          <a:p>
+            <a:r>
+              <a:rPr lang="en-US"/>
+              <a:t>METHOD - Overview</a:t>
+            </a:r>
+          </a:p>
+        </p:txBody>
+      </p:sp>
+      <p:sp>
+        <p:nvSpPr>
+          <p:cNvPr id="3" name="Content Placeholder 2">
+            <a:extLst>
+              <a:ext uri="{FF2B5EF4-FFF2-40B4-BE49-F238E27FC236}">
+                <a16:creationId xmlns:a16="http://schemas.microsoft.com/office/drawing/2014/main" id="{7A42D408-B048-CAC7-BA8F-8CEBD0F6E9BB}"/>
+              </a:ext>
+            </a:extLst>
+          </p:cNvPr>
+          <p:cNvSpPr>
+            <a:spLocks noGrp="1"/>
+          </p:cNvSpPr>
+          <p:nvPr>
+            <p:ph idx="1"/>
+          </p:nvPr>
+        </p:nvSpPr>
+        <p:spPr/>
+        <p:txBody>
+          <a:bodyPr/>
+          <a:lstStyle/>
+          <a:p>
+            <a:r>
+              <a:rPr lang="en-US"/>
+              <a:t>CLAP works in a 3-step process</a:t>
+            </a:r>
+          </a:p>
+          <a:p>
+            <a:endParaRPr lang="en-US"/>
+          </a:p>
+          <a:p>
+            <a:pPr marL="342900" indent="-342900">
+              <a:buFont typeface="+mj-lt"/>
+              <a:buAutoNum type="arabicPeriod"/>
+            </a:pPr>
+            <a:r>
+              <a:rPr lang="en-US"/>
+              <a:t>Categorizing User Reviews</a:t>
+            </a:r>
+          </a:p>
+          <a:p>
+            <a:pPr marL="342900" indent="-342900">
+              <a:buFont typeface="+mj-lt"/>
+              <a:buAutoNum type="arabicPeriod"/>
+            </a:pPr>
+            <a:endParaRPr lang="en-US"/>
+          </a:p>
+          <a:p>
+            <a:pPr marL="342900" indent="-342900">
+              <a:buFont typeface="+mj-lt"/>
+              <a:buAutoNum type="arabicPeriod"/>
+            </a:pPr>
+            <a:r>
+              <a:rPr lang="en-US"/>
+              <a:t>Clustering Related Reviews</a:t>
+            </a:r>
+          </a:p>
+          <a:p>
+            <a:pPr marL="342900" indent="-342900">
+              <a:buFont typeface="+mj-lt"/>
+              <a:buAutoNum type="arabicPeriod"/>
+            </a:pPr>
+            <a:endParaRPr lang="en-US"/>
+          </a:p>
+          <a:p>
+            <a:pPr marL="342900" indent="-342900">
+              <a:buFont typeface="+mj-lt"/>
+              <a:buAutoNum type="arabicPeriod"/>
+            </a:pPr>
+            <a:r>
+              <a:rPr lang="en-US"/>
+              <a:t>Prioritizing Review Clusters</a:t>
+            </a:r>
+          </a:p>
+        </p:txBody>
+      </p:sp>
+    </p:spTree>
+    <p:extLst>
+      <p:ext uri="{BB962C8B-B14F-4D97-AF65-F5344CB8AC3E}">
+        <p14:creationId xmlns:p14="http://schemas.microsoft.com/office/powerpoint/2010/main" val="2197768062"/>
+      </p:ext>
+    </p:extLst>
+  </p:cSld>
+  <p:clrMapOvr>
+    <a:masterClrMapping/>
+  </p:clrMapOvr>
+</p:sld>
+</file>
+
+<file path=ppt/slides/slide8.xml><?xml version="1.0" encoding="utf-8"?>
+<p:sld xmlns:a="http://schemas.openxmlformats.org/drawingml/2006/main" xmlns:r="http://schemas.openxmlformats.org/officeDocument/2006/relationships" xmlns:p="http://schemas.openxmlformats.org/presentationml/2006/main">
+  <p:cSld>
+    <p:spTree>
+      <p:nvGrpSpPr>
+        <p:cNvPr id="1" name=""/>
+        <p:cNvGrpSpPr/>
+        <p:nvPr/>
+      </p:nvGrpSpPr>
+      <p:grpSpPr>
+        <a:xfrm>
+          <a:off x="0" y="0"/>
+          <a:ext cx="0" cy="0"/>
+          <a:chOff x="0" y="0"/>
+          <a:chExt cx="0" cy="0"/>
+        </a:xfrm>
+      </p:grpSpPr>
+      <p:sp>
+        <p:nvSpPr>
+          <p:cNvPr id="2" name="Title 1">
+            <a:extLst>
+              <a:ext uri="{FF2B5EF4-FFF2-40B4-BE49-F238E27FC236}">
+                <a16:creationId xmlns:a16="http://schemas.microsoft.com/office/drawing/2014/main" id="{C78AFC12-1542-995C-B7D9-B437EE2B7F2A}"/>
+              </a:ext>
+            </a:extLst>
+          </p:cNvPr>
+          <p:cNvSpPr>
+            <a:spLocks noGrp="1"/>
+          </p:cNvSpPr>
+          <p:nvPr>
+            <p:ph type="title"/>
+          </p:nvPr>
+        </p:nvSpPr>
+        <p:spPr/>
+        <p:txBody>
+          <a:bodyPr>
+            <a:normAutofit/>
+          </a:bodyPr>
+          <a:lstStyle/>
+          <a:p>
+            <a:r>
+              <a:rPr lang="en-US"/>
+              <a:t>Method – Step 1 – Categorizing User reviews</a:t>
+            </a:r>
+          </a:p>
+        </p:txBody>
+      </p:sp>
+      <p:sp>
+        <p:nvSpPr>
+          <p:cNvPr id="3" name="Content Placeholder 2">
+            <a:extLst>
+              <a:ext uri="{FF2B5EF4-FFF2-40B4-BE49-F238E27FC236}">
+                <a16:creationId xmlns:a16="http://schemas.microsoft.com/office/drawing/2014/main" id="{5D209B06-A39E-AEDD-5B3F-59378B82D5CD}"/>
+              </a:ext>
+            </a:extLst>
+          </p:cNvPr>
+          <p:cNvSpPr>
+            <a:spLocks noGrp="1"/>
+          </p:cNvSpPr>
+          <p:nvPr>
+            <p:ph idx="1"/>
+          </p:nvPr>
+        </p:nvSpPr>
+        <p:spPr/>
+        <p:txBody>
+          <a:bodyPr>
+            <a:normAutofit fontScale="85000" lnSpcReduction="20000"/>
+          </a:bodyPr>
+          <a:lstStyle/>
+          <a:p>
+            <a:r>
+              <a:rPr lang="en-US"/>
+              <a:t>Multi-Class classification – Bug Report, New Feature Suggestion, Other (non-informative)</a:t>
+            </a:r>
+          </a:p>
+          <a:p>
+            <a:endParaRPr lang="en-US"/>
+          </a:p>
+          <a:p>
+            <a:r>
+              <a:rPr lang="en-US"/>
+              <a:t>Preprocessing: Stanford Parser, Stop Word Removal, Stemming, Unifying Synonyms, N-grams Extraction</a:t>
+            </a:r>
+          </a:p>
+          <a:p>
+            <a:endParaRPr lang="en-US"/>
+          </a:p>
+          <a:p>
+            <a:r>
+              <a:rPr lang="en-US"/>
+              <a:t>After preprocessing they are left with 3 </a:t>
+            </a:r>
+            <a:r>
+              <a:rPr lang="en-US" i="1"/>
+              <a:t>features</a:t>
+            </a:r>
+            <a:r>
+              <a:rPr lang="en-US"/>
+              <a:t>: Rating, N-Grams, Bag-Of-Words</a:t>
+            </a:r>
+          </a:p>
+          <a:p>
+            <a:pPr marL="0" indent="0">
+              <a:buNone/>
+            </a:pPr>
+            <a:endParaRPr lang="en-US"/>
+          </a:p>
+          <a:p>
+            <a:r>
+              <a:rPr lang="en-US"/>
+              <a:t>Uses Random Forest ML algorithm</a:t>
+            </a:r>
+          </a:p>
+          <a:p>
+            <a:pPr marL="0" indent="0">
+              <a:buNone/>
+            </a:pPr>
+            <a:endParaRPr lang="en-US"/>
+          </a:p>
+          <a:p>
+            <a:r>
+              <a:rPr lang="en-US">
+                <a:solidFill>
+                  <a:srgbClr val="FF0000"/>
+                </a:solidFill>
+              </a:rPr>
+              <a:t>Classification also uses some pre-assigned values for dependent variable (not explicitly shown)</a:t>
+            </a:r>
+          </a:p>
+        </p:txBody>
+      </p:sp>
+    </p:spTree>
+    <p:extLst>
+      <p:ext uri="{BB962C8B-B14F-4D97-AF65-F5344CB8AC3E}">
+        <p14:creationId xmlns:p14="http://schemas.microsoft.com/office/powerpoint/2010/main" val="2653251690"/>
+      </p:ext>
+    </p:extLst>
+  </p:cSld>
+  <p:clrMapOvr>
+    <a:masterClrMapping/>
+  </p:clrMapOvr>
+</p:sld>
+</file>
+
+<file path=ppt/slides/slide9.xml><?xml version="1.0" encoding="utf-8"?>
+<p:sld xmlns:a="http://schemas.openxmlformats.org/drawingml/2006/main" xmlns:r="http://schemas.openxmlformats.org/officeDocument/2006/relationships" xmlns:p="http://schemas.openxmlformats.org/presentationml/2006/main">
+  <p:cSld>
+    <p:spTree>
+      <p:nvGrpSpPr>
+        <p:cNvPr id="1" name=""/>
+        <p:cNvGrpSpPr/>
+        <p:nvPr/>
+      </p:nvGrpSpPr>
+      <p:grpSpPr>
+        <a:xfrm>
+          <a:off x="0" y="0"/>
+          <a:ext cx="0" cy="0"/>
+          <a:chOff x="0" y="0"/>
+          <a:chExt cx="0" cy="0"/>
+        </a:xfrm>
+      </p:grpSpPr>
+      <p:sp>
+        <p:nvSpPr>
+          <p:cNvPr id="2" name="Title 1">
+            <a:extLst>
+              <a:ext uri="{FF2B5EF4-FFF2-40B4-BE49-F238E27FC236}">
+                <a16:creationId xmlns:a16="http://schemas.microsoft.com/office/drawing/2014/main" id="{D849C0A8-55AD-26CD-4C22-CA6B246F5FDB}"/>
+              </a:ext>
+            </a:extLst>
+          </p:cNvPr>
+          <p:cNvSpPr>
+            <a:spLocks noGrp="1"/>
+          </p:cNvSpPr>
+          <p:nvPr>
+            <p:ph type="title"/>
+          </p:nvPr>
+        </p:nvSpPr>
+        <p:spPr/>
+        <p:txBody>
+          <a:bodyPr/>
+          <a:lstStyle/>
+          <a:p>
+            <a:r>
+              <a:rPr lang="en-US"/>
+              <a:t>Method – Step 1 – Categorizing User reviews</a:t>
+            </a:r>
+          </a:p>
+        </p:txBody>
+      </p:sp>
+      <p:pic>
+        <p:nvPicPr>
+          <p:cNvPr id="5" name="Content Placeholder 4">
+            <a:extLst>
+              <a:ext uri="{FF2B5EF4-FFF2-40B4-BE49-F238E27FC236}">
+                <a16:creationId xmlns:a16="http://schemas.microsoft.com/office/drawing/2014/main" id="{E1192C79-5921-4105-741D-BB258453EC0A}"/>
+              </a:ext>
+            </a:extLst>
+          </p:cNvPr>
+          <p:cNvPicPr>
+            <a:picLocks noGrp="1" noChangeAspect="1"/>
+          </p:cNvPicPr>
+          <p:nvPr>
+            <p:ph idx="1"/>
+          </p:nvPr>
+        </p:nvPicPr>
+        <p:blipFill>
+          <a:blip r:embed="rId2"/>
+          <a:stretch>
+            <a:fillRect/>
+          </a:stretch>
+        </p:blipFill>
+        <p:spPr>
+          <a:xfrm>
+            <a:off x="3523869" y="2721626"/>
+            <a:ext cx="5458587" cy="2038635"/>
+          </a:xfrm>
+          <a:prstGeom prst="rect">
+            <a:avLst/>
+          </a:prstGeom>
+        </p:spPr>
+      </p:pic>
+      <p:sp>
+        <p:nvSpPr>
+          <p:cNvPr id="3" name="TextBox 2">
+            <a:extLst>
+              <a:ext uri="{FF2B5EF4-FFF2-40B4-BE49-F238E27FC236}">
+                <a16:creationId xmlns:a16="http://schemas.microsoft.com/office/drawing/2014/main" id="{F0EB9F45-687D-2862-1859-89A727482791}"/>
+              </a:ext>
+            </a:extLst>
+          </p:cNvPr>
+          <p:cNvSpPr txBox="1"/>
+          <p:nvPr/>
+        </p:nvSpPr>
+        <p:spPr>
+          <a:xfrm>
+            <a:off x="4714712" y="6016316"/>
+            <a:ext cx="2762574" cy="276999"/>
+          </a:xfrm>
+          <a:prstGeom prst="rect">
+            <a:avLst/>
+          </a:prstGeom>
+          <a:noFill/>
+        </p:spPr>
+        <p:txBody>
+          <a:bodyPr wrap="square" rtlCol="0">
+            <a:spAutoFit/>
+          </a:bodyPr>
+          <a:lstStyle/>
+          <a:p>
+            <a:r>
+              <a:rPr lang="en-US" sz="1200" i="1">
+                <a:solidFill>
+                  <a:schemeClr val="bg1">
+                    <a:lumMod val="50000"/>
+                  </a:schemeClr>
+                </a:solidFill>
+              </a:rPr>
+              <a:t>Example Regression Tree when categorizing</a:t>
+            </a:r>
+          </a:p>
+        </p:txBody>
+      </p:sp>
+    </p:spTree>
+    <p:extLst>
+      <p:ext uri="{BB962C8B-B14F-4D97-AF65-F5344CB8AC3E}">
+        <p14:creationId xmlns:p14="http://schemas.microsoft.com/office/powerpoint/2010/main" val="341965317"/>
+      </p:ext>
+    </p:extLst>
+  </p:cSld>
+  <p:clrMapOvr>
+    <a:masterClrMapping/>
+  </p:clrMapOvr>
+</p:sld>
+</file>
+
 <file path=ppt/theme/theme1.xml><?xml version="1.0" encoding="utf-8"?>
-<a:theme xmlns:a="http://schemas.openxmlformats.org/drawingml/2006/main" name="Parcel">
+<a:theme xmlns:a="http://schemas.openxmlformats.org/drawingml/2006/main" name="Gallery">
   <a:themeElements>
-    <a:clrScheme name="Blue Warm">
+    <a:clrScheme name="Gallery">
       <a:dk1>
         <a:sysClr val="windowText" lastClr="000000"/>
       </a:dk1>
@@ -3808,48 +8298,81 @@
         <a:sysClr val="window" lastClr="FFFFFF"/>
       </a:lt1>
       <a:dk2>
-        <a:srgbClr val="242852"/>
+        <a:srgbClr val="454545"/>
       </a:dk2>
       <a:lt2>
-        <a:srgbClr val="ACCBF9"/>
+        <a:srgbClr val="DFDBD5"/>
       </a:lt2>
       <a:accent1>
-        <a:srgbClr val="4A66AC"/>
+        <a:srgbClr val="B71E42"/>
       </a:accent1>
       <a:accent2>
-        <a:srgbClr val="629DD1"/>
+        <a:srgbClr val="DE478E"/>
       </a:accent2>
       <a:accent3>
-        <a:srgbClr val="297FD5"/>
+        <a:srgbClr val="BC72F0"/>
       </a:accent3>
       <a:accent4>
-        <a:srgbClr val="7F8FA9"/>
+        <a:srgbClr val="795FAF"/>
       </a:accent4>
       <a:accent5>
-        <a:srgbClr val="5AA2AE"/>
+        <a:srgbClr val="586EA6"/>
       </a:accent5>
       <a:accent6>
-        <a:srgbClr val="9D90A0"/>
+        <a:srgbClr val="6892A0"/>
       </a:accent6>
       <a:hlink>
-        <a:srgbClr val="9454C3"/>
+        <a:srgbClr val="FA2B5C"/>
       </a:hlink>
       <a:folHlink>
-        <a:srgbClr val="3EBBF0"/>
+        <a:srgbClr val="BC658E"/>
       </a:folHlink>
     </a:clrScheme>
-    <a:fontScheme name="Parcel">
+    <a:fontScheme name="Gallery">
       <a:majorFont>
         <a:latin typeface="Gill Sans MT" panose="020B0502020104020203"/>
         <a:ea typeface=""/>
         <a:cs typeface=""/>
-        <a:font script="Grek" typeface="Corbel"/>
-        <a:font script="Cyrl" typeface="Corbel"/>
-        <a:font script="Jpan" typeface="HGｺﾞｼｯｸE"/>
-        <a:font script="Hang" typeface="휴먼매직체"/>
-        <a:font script="Hans" typeface="华文中宋"/>
-        <a:font script="Hant" typeface="微軟正黑體"/>
-        <a:font script="Arab" typeface="Majalla UI"/>
+        <a:font script="Jpan" typeface="游ゴシック Light"/>
+        <a:font script="Hang" typeface="맑은 고딕"/>
+        <a:font script="Hans" typeface="等线 Light"/>
+        <a:font script="Hant" typeface="新細明體"/>
+        <a:font script="Arab" typeface="Times New Roman"/>
+        <a:font script="Hebr" typeface="Times New Roman"/>
+        <a:font script="Thai" typeface="Angsana New"/>
+        <a:font script="Ethi" typeface="Nyala"/>
+        <a:font script="Beng" typeface="Vrinda"/>
+        <a:font script="Gujr" typeface="Shruti"/>
+        <a:font script="Khmr" typeface="MoolBoran"/>
+        <a:font script="Knda" typeface="Tunga"/>
+        <a:font script="Guru" typeface="Raavi"/>
+        <a:font script="Cans" typeface="Euphemia"/>
+        <a:font script="Cher" typeface="Plantagenet Cherokee"/>
+        <a:font script="Yiii" typeface="Microsoft Yi Baiti"/>
+        <a:font script="Tibt" typeface="Microsoft Himalaya"/>
+        <a:font script="Thaa" typeface="MV Boli"/>
+        <a:font script="Deva" typeface="Mangal"/>
+        <a:font script="Telu" typeface="Gautami"/>
+        <a:font script="Taml" typeface="Latha"/>
+        <a:font script="Syrc" typeface="Estrangelo Edessa"/>
+        <a:font script="Orya" typeface="Kalinga"/>
+        <a:font script="Mlym" typeface="Kartika"/>
+        <a:font script="Laoo" typeface="DokChampa"/>
+        <a:font script="Sinh" typeface="Iskoola Pota"/>
+        <a:font script="Mong" typeface="Mongolian Baiti"/>
+        <a:font script="Viet" typeface="Times New Roman"/>
+        <a:font script="Uigh" typeface="Microsoft Uighur"/>
+        <a:font script="Geor" typeface="Sylfaen"/>
+      </a:majorFont>
+      <a:minorFont>
+        <a:latin typeface="Gill Sans MT" panose="020B0502020104020203"/>
+        <a:ea typeface=""/>
+        <a:cs typeface=""/>
+        <a:font script="Jpan" typeface="游ゴシック"/>
+        <a:font script="Hang" typeface="맑은 고딕"/>
+        <a:font script="Hans" typeface="等线"/>
+        <a:font script="Hant" typeface="新細明體"/>
+        <a:font script="Arab" typeface="Arial"/>
         <a:font script="Hebr" typeface="Arial"/>
         <a:font script="Thai" typeface="Cordia New"/>
         <a:font script="Ethi" typeface="Nyala"/>
@@ -3872,21 +8395,254 @@
         <a:font script="Laoo" typeface="DokChampa"/>
         <a:font script="Sinh" typeface="Iskoola Pota"/>
         <a:font script="Mong" typeface="Mongolian Baiti"/>
-        <a:font script="Viet" typeface="Tahoma"/>
+        <a:font script="Viet" typeface="Arial"/>
         <a:font script="Uigh" typeface="Microsoft Uighur"/>
         <a:font script="Geor" typeface="Sylfaen"/>
+      </a:minorFont>
+    </a:fontScheme>
+    <a:fmtScheme name="Gallery">
+      <a:fillStyleLst>
+        <a:solidFill>
+          <a:schemeClr val="phClr"/>
+        </a:solidFill>
+        <a:gradFill rotWithShape="1">
+          <a:gsLst>
+            <a:gs pos="0">
+              <a:schemeClr val="phClr">
+                <a:tint val="54000"/>
+                <a:alpha val="100000"/>
+                <a:satMod val="105000"/>
+                <a:lumMod val="110000"/>
+              </a:schemeClr>
+            </a:gs>
+            <a:gs pos="100000">
+              <a:schemeClr val="phClr">
+                <a:tint val="78000"/>
+                <a:alpha val="92000"/>
+                <a:satMod val="109000"/>
+                <a:lumMod val="100000"/>
+              </a:schemeClr>
+            </a:gs>
+          </a:gsLst>
+          <a:lin ang="5400000" scaled="0"/>
+        </a:gradFill>
+        <a:gradFill rotWithShape="1">
+          <a:gsLst>
+            <a:gs pos="0">
+              <a:schemeClr val="phClr">
+                <a:tint val="98000"/>
+                <a:satMod val="110000"/>
+                <a:lumMod val="104000"/>
+              </a:schemeClr>
+            </a:gs>
+            <a:gs pos="69000">
+              <a:schemeClr val="phClr">
+                <a:shade val="88000"/>
+                <a:satMod val="130000"/>
+                <a:lumMod val="92000"/>
+              </a:schemeClr>
+            </a:gs>
+            <a:gs pos="100000">
+              <a:schemeClr val="phClr">
+                <a:shade val="78000"/>
+                <a:satMod val="130000"/>
+                <a:lumMod val="92000"/>
+              </a:schemeClr>
+            </a:gs>
+          </a:gsLst>
+          <a:lin ang="5400000" scaled="0"/>
+        </a:gradFill>
+      </a:fillStyleLst>
+      <a:lnStyleLst>
+        <a:ln w="9525" cap="flat" cmpd="sng" algn="ctr">
+          <a:solidFill>
+            <a:schemeClr val="phClr"/>
+          </a:solidFill>
+          <a:prstDash val="solid"/>
+        </a:ln>
+        <a:ln w="15875" cap="flat" cmpd="sng" algn="ctr">
+          <a:solidFill>
+            <a:schemeClr val="phClr"/>
+          </a:solidFill>
+          <a:prstDash val="solid"/>
+        </a:ln>
+        <a:ln w="22225" cap="flat" cmpd="sng" algn="ctr">
+          <a:solidFill>
+            <a:schemeClr val="phClr"/>
+          </a:solidFill>
+          <a:prstDash val="solid"/>
+        </a:ln>
+      </a:lnStyleLst>
+      <a:effectStyleLst>
+        <a:effectStyle>
+          <a:effectLst/>
+        </a:effectStyle>
+        <a:effectStyle>
+          <a:effectLst/>
+        </a:effectStyle>
+        <a:effectStyle>
+          <a:effectLst>
+            <a:outerShdw blurRad="50800" dist="50800" dir="5400000" sx="96000" sy="96000" rotWithShape="0">
+              <a:srgbClr val="000000">
+                <a:alpha val="48000"/>
+              </a:srgbClr>
+            </a:outerShdw>
+          </a:effectLst>
+          <a:scene3d>
+            <a:camera prst="orthographicFront">
+              <a:rot lat="0" lon="0" rev="0"/>
+            </a:camera>
+            <a:lightRig rig="balanced" dir="t">
+              <a:rot lat="0" lon="0" rev="1080000"/>
+            </a:lightRig>
+          </a:scene3d>
+          <a:sp3d>
+            <a:bevelT w="38100" h="12700" prst="softRound"/>
+          </a:sp3d>
+        </a:effectStyle>
+      </a:effectStyleLst>
+      <a:bgFillStyleLst>
+        <a:solidFill>
+          <a:schemeClr val="phClr"/>
+        </a:solidFill>
+        <a:solidFill>
+          <a:schemeClr val="phClr"/>
+        </a:solidFill>
+        <a:gradFill rotWithShape="1">
+          <a:gsLst>
+            <a:gs pos="0">
+              <a:schemeClr val="phClr">
+                <a:tint val="94000"/>
+                <a:satMod val="80000"/>
+                <a:lumMod val="106000"/>
+              </a:schemeClr>
+            </a:gs>
+            <a:gs pos="100000">
+              <a:schemeClr val="phClr">
+                <a:shade val="80000"/>
+              </a:schemeClr>
+            </a:gs>
+          </a:gsLst>
+          <a:path path="circle">
+            <a:fillToRect l="43000" r="43000" b="100000"/>
+          </a:path>
+        </a:gradFill>
+      </a:bgFillStyleLst>
+    </a:fmtScheme>
+  </a:themeElements>
+  <a:objectDefaults/>
+  <a:extraClrSchemeLst/>
+  <a:extLst>
+    <a:ext uri="{05A4C25C-085E-4340-85A3-A5531E510DB2}">
+      <thm15:themeFamily xmlns:thm15="http://schemas.microsoft.com/office/thememl/2012/main" name="Gallery" id="{BBFCD31E-59A1-489D-B089-A3EAD7CAE12E}" vid="{F5E91637-A7B6-4E27-B710-77DA7014EE1E}"/>
+    </a:ext>
+  </a:extLst>
+</a:theme>
+</file>
+
+<file path=ppt/theme/theme2.xml><?xml version="1.0" encoding="utf-8"?>
+<a:theme xmlns:a="http://schemas.openxmlformats.org/drawingml/2006/main" name="Office Theme">
+  <a:themeElements>
+    <a:clrScheme name="Office">
+      <a:dk1>
+        <a:sysClr val="windowText" lastClr="000000"/>
+      </a:dk1>
+      <a:lt1>
+        <a:sysClr val="window" lastClr="FFFFFF"/>
+      </a:lt1>
+      <a:dk2>
+        <a:srgbClr val="44546A"/>
+      </a:dk2>
+      <a:lt2>
+        <a:srgbClr val="E7E6E6"/>
+      </a:lt2>
+      <a:accent1>
+        <a:srgbClr val="4472C4"/>
+      </a:accent1>
+      <a:accent2>
+        <a:srgbClr val="ED7D31"/>
+      </a:accent2>
+      <a:accent3>
+        <a:srgbClr val="A5A5A5"/>
+      </a:accent3>
+      <a:accent4>
+        <a:srgbClr val="FFC000"/>
+      </a:accent4>
+      <a:accent5>
+        <a:srgbClr val="5B9BD5"/>
+      </a:accent5>
+      <a:accent6>
+        <a:srgbClr val="70AD47"/>
+      </a:accent6>
+      <a:hlink>
+        <a:srgbClr val="0563C1"/>
+      </a:hlink>
+      <a:folHlink>
+        <a:srgbClr val="954F72"/>
+      </a:folHlink>
+    </a:clrScheme>
+    <a:fontScheme name="Office">
+      <a:majorFont>
+        <a:latin typeface="Calibri Light" panose="020F0302020204030204"/>
+        <a:ea typeface=""/>
+        <a:cs typeface=""/>
+        <a:font script="Jpan" typeface="游ゴシック Light"/>
+        <a:font script="Hang" typeface="맑은 고딕"/>
+        <a:font script="Hans" typeface="等线 Light"/>
+        <a:font script="Hant" typeface="新細明體"/>
+        <a:font script="Arab" typeface="Times New Roman"/>
+        <a:font script="Hebr" typeface="Times New Roman"/>
+        <a:font script="Thai" typeface="Angsana New"/>
+        <a:font script="Ethi" typeface="Nyala"/>
+        <a:font script="Beng" typeface="Vrinda"/>
+        <a:font script="Gujr" typeface="Shruti"/>
+        <a:font script="Khmr" typeface="MoolBoran"/>
+        <a:font script="Knda" typeface="Tunga"/>
+        <a:font script="Guru" typeface="Raavi"/>
+        <a:font script="Cans" typeface="Euphemia"/>
+        <a:font script="Cher" typeface="Plantagenet Cherokee"/>
+        <a:font script="Yiii" typeface="Microsoft Yi Baiti"/>
+        <a:font script="Tibt" typeface="Microsoft Himalaya"/>
+        <a:font script="Thaa" typeface="MV Boli"/>
+        <a:font script="Deva" typeface="Mangal"/>
+        <a:font script="Telu" typeface="Gautami"/>
+        <a:font script="Taml" typeface="Latha"/>
+        <a:font script="Syrc" typeface="Estrangelo Edessa"/>
+        <a:font script="Orya" typeface="Kalinga"/>
+        <a:font script="Mlym" typeface="Kartika"/>
+        <a:font script="Laoo" typeface="DokChampa"/>
+        <a:font script="Sinh" typeface="Iskoola Pota"/>
+        <a:font script="Mong" typeface="Mongolian Baiti"/>
+        <a:font script="Viet" typeface="Times New Roman"/>
+        <a:font script="Uigh" typeface="Microsoft Uighur"/>
+        <a:font script="Geor" typeface="Sylfaen"/>
+        <a:font script="Armn" typeface="Arial"/>
+        <a:font script="Bugi" typeface="Leelawadee UI"/>
+        <a:font script="Bopo" typeface="Microsoft JhengHei"/>
+        <a:font script="Java" typeface="Javanese Text"/>
+        <a:font script="Lisu" typeface="Segoe UI"/>
+        <a:font script="Mymr" typeface="Myanmar Text"/>
+        <a:font script="Nkoo" typeface="Ebrima"/>
+        <a:font script="Olck" typeface="Nirmala UI"/>
+        <a:font script="Osma" typeface="Ebrima"/>
+        <a:font script="Phag" typeface="Phagspa"/>
+        <a:font script="Syrn" typeface="Estrangelo Edessa"/>
+        <a:font script="Syrj" typeface="Estrangelo Edessa"/>
+        <a:font script="Syre" typeface="Estrangelo Edessa"/>
+        <a:font script="Sora" typeface="Nirmala UI"/>
+        <a:font script="Tale" typeface="Microsoft Tai Le"/>
+        <a:font script="Talu" typeface="Microsoft New Tai Lue"/>
+        <a:font script="Tfng" typeface="Ebrima"/>
       </a:majorFont>
       <a:minorFont>
-        <a:latin typeface="Gill Sans MT" panose="020B0502020104020203"/>
+        <a:latin typeface="Calibri" panose="020F0502020204030204"/>
         <a:ea typeface=""/>
         <a:cs typeface=""/>
-        <a:font script="Grek" typeface="Corbel"/>
-        <a:font script="Cyrl" typeface="Corbel"/>
-        <a:font script="Jpan" typeface="HGｺﾞｼｯｸE"/>
-        <a:font script="Hang" typeface="휴먼매직체"/>
-        <a:font script="Hans" typeface="华文中宋"/>
-        <a:font script="Hant" typeface="微軟正黑體"/>
-        <a:font script="Arab" typeface="Majalla UI"/>
+        <a:font script="Jpan" typeface="游ゴシック"/>
+        <a:font script="Hang" typeface="맑은 고딕"/>
+        <a:font script="Hans" typeface="等线"/>
+        <a:font script="Hant" typeface="新細明體"/>
+        <a:font script="Arab" typeface="Arial"/>
         <a:font script="Hebr" typeface="Arial"/>
         <a:font script="Thai" typeface="Cordia New"/>
         <a:font script="Ethi" typeface="Nyala"/>
@@ -3909,12 +8665,29 @@
         <a:font script="Laoo" typeface="DokChampa"/>
         <a:font script="Sinh" typeface="Iskoola Pota"/>
         <a:font script="Mong" typeface="Mongolian Baiti"/>
-        <a:font script="Viet" typeface="Tahoma"/>
+        <a:font script="Viet" typeface="Arial"/>
         <a:font script="Uigh" typeface="Microsoft Uighur"/>
         <a:font script="Geor" typeface="Sylfaen"/>
+        <a:font script="Armn" typeface="Arial"/>
+        <a:font script="Bugi" typeface="Leelawadee UI"/>
+        <a:font script="Bopo" typeface="Microsoft JhengHei"/>
+        <a:font script="Java" typeface="Javanese Text"/>
+        <a:font script="Lisu" typeface="Segoe UI"/>
+        <a:font script="Mymr" typeface="Myanmar Text"/>
+        <a:font script="Nkoo" typeface="Ebrima"/>
+        <a:font script="Olck" typeface="Nirmala UI"/>
+        <a:font script="Osma" typeface="Ebrima"/>
+        <a:font script="Phag" typeface="Phagspa"/>
+        <a:font script="Syrn" typeface="Estrangelo Edessa"/>
+        <a:font script="Syrj" typeface="Estrangelo Edessa"/>
+        <a:font script="Syre" typeface="Estrangelo Edessa"/>
+        <a:font script="Sora" typeface="Nirmala UI"/>
+        <a:font script="Tale" typeface="Microsoft Tai Le"/>
+        <a:font script="Talu" typeface="Microsoft New Tai Lue"/>
+        <a:font script="Tfng" typeface="Ebrima"/>
       </a:minorFont>
     </a:fontScheme>
-    <a:fmtScheme name="Parcel">
+    <a:fmtScheme name="Office">
       <a:fillStyleLst>
         <a:solidFill>
           <a:schemeClr val="phClr"/>
@@ -3923,16 +8696,23 @@
           <a:gsLst>
             <a:gs pos="0">
               <a:schemeClr val="phClr">
-                <a:tint val="80000"/>
-                <a:satMod val="107000"/>
-                <a:lumMod val="103000"/>
+                <a:lumMod val="110000"/>
+                <a:satMod val="105000"/>
+                <a:tint val="67000"/>
+              </a:schemeClr>
+            </a:gs>
+            <a:gs pos="50000">
+              <a:schemeClr val="phClr">
+                <a:lumMod val="105000"/>
+                <a:satMod val="103000"/>
+                <a:tint val="73000"/>
               </a:schemeClr>
             </a:gs>
             <a:gs pos="100000">
               <a:schemeClr val="phClr">
-                <a:tint val="82000"/>
+                <a:lumMod val="105000"/>
                 <a:satMod val="109000"/>
-                <a:lumMod val="103000"/>
+                <a:tint val="81000"/>
               </a:schemeClr>
             </a:gs>
           </a:gsLst>
@@ -3942,23 +8722,23 @@
           <a:gsLst>
             <a:gs pos="0">
               <a:schemeClr val="phClr">
-                <a:tint val="97000"/>
-                <a:satMod val="100000"/>
+                <a:satMod val="103000"/>
                 <a:lumMod val="102000"/>
+                <a:tint val="94000"/>
               </a:schemeClr>
             </a:gs>
             <a:gs pos="50000">
               <a:schemeClr val="phClr">
+                <a:satMod val="110000"/>
+                <a:lumMod val="100000"/>
                 <a:shade val="100000"/>
-                <a:satMod val="103000"/>
-                <a:lumMod val="100000"/>
               </a:schemeClr>
             </a:gs>
             <a:gs pos="100000">
               <a:schemeClr val="phClr">
-                <a:shade val="93000"/>
-                <a:satMod val="110000"/>
                 <a:lumMod val="99000"/>
+                <a:satMod val="120000"/>
+                <a:shade val="78000"/>
               </a:schemeClr>
             </a:gs>
           </a:gsLst>
@@ -3971,18 +8751,21 @@
             <a:schemeClr val="phClr"/>
           </a:solidFill>
           <a:prstDash val="solid"/>
+          <a:miter lim="800000"/>
         </a:ln>
         <a:ln w="12700" cap="flat" cmpd="sng" algn="ctr">
           <a:solidFill>
             <a:schemeClr val="phClr"/>
           </a:solidFill>
           <a:prstDash val="solid"/>
+          <a:miter lim="800000"/>
         </a:ln>
-        <a:ln w="31750" cap="flat" cmpd="sng" algn="ctr">
+        <a:ln w="19050" cap="flat" cmpd="sng" algn="ctr">
           <a:solidFill>
             <a:schemeClr val="phClr"/>
           </a:solidFill>
           <a:prstDash val="solid"/>
+          <a:miter lim="800000"/>
         </a:ln>
       </a:lnStyleLst>
       <a:effectStyleLst>
@@ -3994,21 +8777,12 @@
         </a:effectStyle>
         <a:effectStyle>
           <a:effectLst>
-            <a:outerShdw blurRad="55880" dist="15240" dir="5400000" algn="ctr" rotWithShape="0">
+            <a:outerShdw blurRad="57150" dist="19050" dir="5400000" algn="ctr" rotWithShape="0">
               <a:srgbClr val="000000">
-                <a:alpha val="45000"/>
+                <a:alpha val="63000"/>
               </a:srgbClr>
             </a:outerShdw>
           </a:effectLst>
-          <a:scene3d>
-            <a:camera prst="orthographicFront">
-              <a:rot lat="0" lon="0" rev="0"/>
-            </a:camera>
-            <a:lightRig rig="brightRoom" dir="tl"/>
-          </a:scene3d>
-          <a:sp3d prstMaterial="dkEdge">
-            <a:bevelT w="0" h="0"/>
-          </a:sp3d>
         </a:effectStyle>
       </a:effectStyleLst>
       <a:bgFillStyleLst>
@@ -4025,24 +8799,28 @@
           <a:gsLst>
             <a:gs pos="0">
               <a:schemeClr val="phClr">
-                <a:tint val="97000"/>
-                <a:shade val="100000"/>
-                <a:satMod val="185000"/>
-                <a:lumMod val="120000"/>
+                <a:tint val="93000"/>
+                <a:satMod val="150000"/>
+                <a:shade val="98000"/>
+                <a:lumMod val="102000"/>
+              </a:schemeClr>
+            </a:gs>
+            <a:gs pos="50000">
+              <a:schemeClr val="phClr">
+                <a:tint val="98000"/>
+                <a:satMod val="130000"/>
+                <a:shade val="90000"/>
+                <a:lumMod val="103000"/>
               </a:schemeClr>
             </a:gs>
             <a:gs pos="100000">
               <a:schemeClr val="phClr">
-                <a:tint val="96000"/>
-                <a:shade val="95000"/>
-                <a:satMod val="215000"/>
-                <a:lumMod val="80000"/>
+                <a:shade val="63000"/>
+                <a:satMod val="120000"/>
               </a:schemeClr>
             </a:gs>
           </a:gsLst>
-          <a:path path="circle">
-            <a:fillToRect l="50000" t="55000" r="125000" b="100000"/>
-          </a:path>
+          <a:lin ang="5400000" scaled="0"/>
         </a:gradFill>
       </a:bgFillStyleLst>
     </a:fmtScheme>
@@ -4051,7 +8829,7 @@
   <a:extraClrSchemeLst/>
   <a:extLst>
     <a:ext uri="{05A4C25C-085E-4340-85A3-A5531E510DB2}">
-      <thm15:themeFamily xmlns:thm15="http://schemas.microsoft.com/office/thememl/2012/main" name="Parcel" id="{8BEC4385-4EB9-4D53-BFB5-0EA123736B6D}" vid="{4DB32801-28C0-48B0-8C1D-A9A58613615A}"/>
+      <thm15:themeFamily xmlns:thm15="http://schemas.microsoft.com/office/thememl/2012/main" name="Office Theme" id="{62F939B6-93AF-4DB8-9C6B-D6C7DFDC589F}" vid="{4A3C46E8-61CC-4603-A589-7422A47A8E4A}"/>
     </a:ext>
   </a:extLst>
 </a:theme>
